--- a/light-party.pptx
+++ b/light-party.pptx
@@ -538,44 +538,44 @@
           </a:p>
           <a:p>
             <a:r>
-              <a:t>本頁建議：0.5 分鐘</a:t>
-            </a:r>
-          </a:p>
-          <a:p>
-            <a:r>
-              <a:t>本頁目的：以喜樂、尊重和信仰分辨建立聚會氣氛。</a:t>
+              <a:t>呢頁建議：0.5 分鐘</a:t>
+            </a:r>
+          </a:p>
+          <a:p>
+            <a:r>
+              <a:t>呢頁重點：以喜樂、尊重和信仰分辨建立聚會氣氛。</a:t>
             </a:r>
           </a:p>
           <a:p/>
           <a:p>
             <a:r>
-              <a:t>導師講述：</a:t>
-            </a:r>
-          </a:p>
-          <a:p>
-            <a:r>
-              <a:t>1. 歡迎大家。今天不是要取笑慶祝萬聖節的人，而是一起想清楚自己的選擇。</a:t>
-            </a:r>
-          </a:p>
-          <a:p>
-            <a:r>
-              <a:t>2. 可以分享，也可以先聆聽；不需要透露令你不舒服的經歷。</a:t>
-            </a:r>
-          </a:p>
-          <a:p>
-            <a:r>
-              <a:t>3. 我們會玩遊戲、了解文化、討論同儕壓力，最後以禱告和光明派對回應。</a:t>
+              <a:t>導師可以咁講：</a:t>
+            </a:r>
+          </a:p>
+          <a:p>
+            <a:r>
+              <a:t>1. 歡迎大家。今日唔係要取笑慶祝萬聖節嘅人，而係一齊諗清楚自己嘅選擇。</a:t>
+            </a:r>
+          </a:p>
+          <a:p>
+            <a:r>
+              <a:t>2. 可以分享，都可以先聆聽；唔使透露令你唔舒服嘅經歷。</a:t>
+            </a:r>
+          </a:p>
+          <a:p>
+            <a:r>
+              <a:t>3. 我哋會玩遊戲、瞭解文化、討論同儕壓力，最後以禱告和光明派對回應。</a:t>
             </a:r>
           </a:p>
           <a:p/>
           <a:p>
             <a:r>
-              <a:t>轉場：先看看這一小時的路線。</a:t>
-            </a:r>
-          </a:p>
-          <a:p>
-            <a:r>
-              <a:t>時間提示：現場共 60 分鐘；逐頁計畫共 54 分鐘，預留 6 分鐘彈性。</a:t>
+              <a:t>轉去下一頁：先睇下呢一小時嘅路線。</a:t>
+            </a:r>
+          </a:p>
+          <a:p>
+            <a:r>
+              <a:t>時間提示：現場共 60 分鐘；每頁安排共 54 分鐘，留返 6 分鐘彈性。</a:t>
             </a:r>
           </a:p>
         </p:txBody>
@@ -655,44 +655,44 @@
           </a:p>
           <a:p>
             <a:r>
-              <a:t>本頁建議：0.5 分鐘</a:t>
-            </a:r>
-          </a:p>
-          <a:p>
-            <a:r>
-              <a:t>本頁目的：由文化知識轉向生活和信仰分辨。</a:t>
+              <a:t>呢頁建議：0.5 分鐘</a:t>
+            </a:r>
+          </a:p>
+          <a:p>
+            <a:r>
+              <a:t>呢頁重點：由文化知識轉向生活和信仰分辨。</a:t>
             </a:r>
           </a:p>
           <a:p/>
           <a:p>
             <a:r>
-              <a:t>導師講述：</a:t>
-            </a:r>
-          </a:p>
-          <a:p>
-            <a:r>
-              <a:t>1. 大家平常想到萬聖節，可能就是扮靚、食糖果、同朋友去 Party。</a:t>
-            </a:r>
-          </a:p>
-          <a:p>
-            <a:r>
-              <a:t>2. 好玩以外，我們也可以問：這個活動在慶祝甚麼？會怎樣影響我和身邊的人？</a:t>
-            </a:r>
-          </a:p>
-          <a:p>
-            <a:r>
-              <a:t>3. 今天一起了解背景，並用信仰作出有理由、也尊重他人的選擇。</a:t>
+              <a:t>導師可以咁講：</a:t>
+            </a:r>
+          </a:p>
+          <a:p>
+            <a:r>
+              <a:t>1. 大家平時諗起萬聖節，可能就係扮靚、食糖果、同朋友去派對。</a:t>
+            </a:r>
+          </a:p>
+          <a:p>
+            <a:r>
+              <a:t>2. 好玩以外，我哋都可以問：呢個活動喺慶祝乜嘢？會點樣影響我同身邊嘅人？</a:t>
+            </a:r>
+          </a:p>
+          <a:p>
+            <a:r>
+              <a:t>3. 今日一齊認識背景，再用信仰諗清楚點樣選擇，同時尊重其他人。</a:t>
             </a:r>
           </a:p>
           <a:p/>
           <a:p>
             <a:r>
-              <a:t>轉場：先把三段歷史放在同一張時間線上。</a:t>
-            </a:r>
-          </a:p>
-          <a:p>
-            <a:r>
-              <a:t>時間提示：現場共 60 分鐘；逐頁計畫共 54 分鐘，預留 6 分鐘彈性。</a:t>
+              <a:t>轉去下一頁：先把三段歷史放放喺同一張時間線上。</a:t>
+            </a:r>
+          </a:p>
+          <a:p>
+            <a:r>
+              <a:t>時間提示：現場共 60 分鐘；每頁安排共 54 分鐘，留返 6 分鐘彈性。</a:t>
             </a:r>
           </a:p>
         </p:txBody>
@@ -772,49 +772,49 @@
           </a:p>
           <a:p>
             <a:r>
-              <a:t>本頁建議：2.5 分鐘</a:t>
-            </a:r>
-          </a:p>
-          <a:p>
-            <a:r>
-              <a:t>本頁目的：區分古代民俗、基督教節期名稱和近代娛樂化。</a:t>
+              <a:t>呢頁建議：2.5 分鐘</a:t>
+            </a:r>
+          </a:p>
+          <a:p>
+            <a:r>
+              <a:t>呢頁重點：區分古代民俗、基督教節期名稱和近代娛樂化。</a:t>
             </a:r>
           </a:p>
           <a:p/>
           <a:p>
             <a:r>
-              <a:t>導師講述：</a:t>
-            </a:r>
-          </a:p>
-          <a:p>
-            <a:r>
-              <a:t>1. 第一層：古凱爾特的薩溫節，與收穫、入冬、篝火及當時的亡靈信念有關。</a:t>
-            </a:r>
-          </a:p>
-          <a:p>
-            <a:r>
-              <a:t>2. 第二層：西方教會的諸聖節是 11 月 1 日；前一晚稱 All Hallows' Eve，名稱後來成為 Halloween。</a:t>
-            </a:r>
-          </a:p>
-          <a:p>
-            <a:r>
-              <a:t>3. 第三層：民俗和移民文化延續變化，逐步形成裝扮、討糖果及商業派對。</a:t>
-            </a:r>
-          </a:p>
-          <a:p>
-            <a:r>
-              <a:t>4. 歷史關係有不同解讀；避免把所有服裝、糖果或參與者都說成敬拜鬼魂。</a:t>
+              <a:t>導師可以咁講：</a:t>
+            </a:r>
+          </a:p>
+          <a:p>
+            <a:r>
+              <a:t>1. 第一層：古凱爾特嘅薩溫節，同收穫、入冬、篝火及當時嘅亡靈信念有關。</a:t>
+            </a:r>
+          </a:p>
+          <a:p>
+            <a:r>
+              <a:t>2. 第二層：西方教會嘅諸聖節係 11 月 1 日；前一晚稱 諸聖節前夕，名稱後來成為 萬聖節。</a:t>
+            </a:r>
+          </a:p>
+          <a:p>
+            <a:r>
+              <a:t>3. 第三層：民俗和移民文化延續變化，慢慢形成裝扮、討糖果及商業派對。</a:t>
+            </a:r>
+          </a:p>
+          <a:p>
+            <a:r>
+              <a:t>4. 歷史關係有唔同解讀；避免把所有服裝、糖果或參加者都講成敬拜鬼魂。</a:t>
             </a:r>
           </a:p>
           <a:p/>
           <a:p>
             <a:r>
-              <a:t>轉場：歷史背景、今天的活動和我的信仰，是三件需要分開的事。</a:t>
-            </a:r>
-          </a:p>
-          <a:p>
-            <a:r>
-              <a:t>時間提示：現場共 60 分鐘；逐頁計畫共 54 分鐘，預留 6 分鐘彈性。</a:t>
+              <a:t>轉去下一頁：歷史背景、今日嘅活動和我嘅信仰，係三件需要分開嘅事。</a:t>
+            </a:r>
+          </a:p>
+          <a:p>
+            <a:r>
+              <a:t>時間提示：現場共 60 分鐘；每頁安排共 54 分鐘，留返 6 分鐘彈性。</a:t>
             </a:r>
           </a:p>
           <a:p/>
@@ -900,44 +900,44 @@
           </a:p>
           <a:p>
             <a:r>
-              <a:t>本頁建議：1 分鐘</a:t>
-            </a:r>
-          </a:p>
-          <a:p>
-            <a:r>
-              <a:t>本頁目的：說明基督徒並非一概不慶祝，清楚交代本次聚會立場。</a:t>
+              <a:t>呢頁建議：1 分鐘</a:t>
+            </a:r>
+          </a:p>
+          <a:p>
+            <a:r>
+              <a:t>呢頁重點：講清楚基督徒唔係一概唔慶祝，清楚交代本次聚會立場。</a:t>
             </a:r>
           </a:p>
           <a:p/>
           <a:p>
             <a:r>
-              <a:t>導師講述：</a:t>
-            </a:r>
-          </a:p>
-          <a:p>
-            <a:r>
-              <a:t>1. 基督徒及不同教會對萬聖節並非完全一致：有人不參與，有人記念諸聖節，也有人參加非恐怖的社區活動。</a:t>
-            </a:r>
-          </a:p>
-          <a:p>
-            <a:r>
-              <a:t>2. 本次聚會採取不參與招魂、占卜及恐怖主題活動，改以光明派對回應的方向。</a:t>
-            </a:r>
-          </a:p>
-          <a:p>
-            <a:r>
-              <a:t>3. 我們看實際活動內容、信仰和良心，不用標籤別人；若有疑問，可與家長或導師商量。</a:t>
+              <a:t>導師可以咁講：</a:t>
+            </a:r>
+          </a:p>
+          <a:p>
+            <a:r>
+              <a:t>1. 基督徒及唔同教會對萬聖節唔係完全一致：有人唔參加，有人記念諸聖節，都有人參加非恐怖嘅社區活動。</a:t>
+            </a:r>
+          </a:p>
+          <a:p>
+            <a:r>
+              <a:t>2. 本次聚會採取唔參加招魂、占卜及恐怖主題活動，改以光明派對回應嘅方向。</a:t>
+            </a:r>
+          </a:p>
+          <a:p>
+            <a:r>
+              <a:t>3. 我哋看實際活動內容、信仰和良心，唔用標籤別人；如果有疑問，可同家長或導師商量。</a:t>
             </a:r>
           </a:p>
           <a:p/>
           <a:p>
             <a:r>
-              <a:t>轉場：接下來用三段經文，想想自己的身份、分辨和勇氣。</a:t>
-            </a:r>
-          </a:p>
-          <a:p>
-            <a:r>
-              <a:t>時間提示：現場共 60 分鐘；逐頁計畫共 54 分鐘，預留 6 分鐘彈性。</a:t>
+              <a:t>轉去下一頁：跟住用三段經文，諗下自己嘅身份、分辨和勇氣。</a:t>
+            </a:r>
+          </a:p>
+          <a:p>
+            <a:r>
+              <a:t>時間提示：現場共 60 分鐘；每頁安排共 54 分鐘，留返 6 分鐘彈性。</a:t>
             </a:r>
           </a:p>
         </p:txBody>
@@ -1007,7 +1007,7 @@
           <a:lstStyle/>
           <a:p>
             <a:r>
-              <a:t>我們追求光，活出生命</a:t>
+              <a:t>我哋追求光，活出生命</a:t>
             </a:r>
           </a:p>
           <a:p>
@@ -1017,49 +1017,49 @@
           </a:p>
           <a:p>
             <a:r>
-              <a:t>本頁建議：2.5 分鐘</a:t>
-            </a:r>
-          </a:p>
-          <a:p>
-            <a:r>
-              <a:t>本頁目的：以耶穌是世界的光建立正面的信仰身份。</a:t>
+              <a:t>呢頁建議：2.5 分鐘</a:t>
+            </a:r>
+          </a:p>
+          <a:p>
+            <a:r>
+              <a:t>呢頁重點：以耶穌係世界嘅光建立正面嘅信仰身份。</a:t>
             </a:r>
           </a:p>
           <a:p/>
           <a:p>
             <a:r>
-              <a:t>導師講述：</a:t>
-            </a:r>
-          </a:p>
-          <a:p>
-            <a:r>
-              <a:t>1. 邀請大家讀約翰福音 8:12。耶穌帶來的是生命的光，不只是叫我們避開某個節日。</a:t>
-            </a:r>
-          </a:p>
-          <a:p>
-            <a:r>
-              <a:t>2. 我們不是因為膽小才作出選擇；我們希望把愛、希望和生命帶給身邊的人。</a:t>
-            </a:r>
-          </a:p>
-          <a:p>
-            <a:r>
-              <a:t>3. 不把同學叫作黑暗的人，也不把喜歡裝扮的人看成壞人；我們分辨活動，而不是羞辱人。</a:t>
-            </a:r>
-          </a:p>
-          <a:p>
-            <a:r>
-              <a:t>4. 問：今天有哪些行動，可以讓一位朋友感到被接納？</a:t>
+              <a:t>導師可以咁講：</a:t>
+            </a:r>
+          </a:p>
+          <a:p>
+            <a:r>
+              <a:t>1. 邀請大家讀約翰福音 8:12。耶穌帶來嘅係生命嘅光，唔止係叫我哋避開某個節日。</a:t>
+            </a:r>
+          </a:p>
+          <a:p>
+            <a:r>
+              <a:t>2. 我哋唔係因為膽小才做出選擇；我哋希望把愛、希望和生命帶給身邊嘅人。</a:t>
+            </a:r>
+          </a:p>
+          <a:p>
+            <a:r>
+              <a:t>3. 唔把同學叫作黑暗嘅人，都唔把喜歡裝扮嘅人睇成壞人；我哋分辨活動，而唔係羞辱人。</a:t>
+            </a:r>
+          </a:p>
+          <a:p>
+            <a:r>
+              <a:t>4. 問：今日有哪些行動，可以令朋友感受到被接納？</a:t>
             </a:r>
           </a:p>
           <a:p/>
           <a:p>
             <a:r>
-              <a:t>轉場：有了身份，還需要學會停一停、諗一諗。</a:t>
-            </a:r>
-          </a:p>
-          <a:p>
-            <a:r>
-              <a:t>時間提示：現場共 60 分鐘；逐頁計畫共 54 分鐘，預留 6 分鐘彈性。</a:t>
+              <a:t>轉去下一頁：有咗身份，仲需要學會停一停、諗一諗。</a:t>
+            </a:r>
+          </a:p>
+          <a:p>
+            <a:r>
+              <a:t>時間提示：現場共 60 分鐘；每頁安排共 54 分鐘，留返 6 分鐘彈性。</a:t>
             </a:r>
           </a:p>
         </p:txBody>
@@ -1139,49 +1139,49 @@
           </a:p>
           <a:p>
             <a:r>
-              <a:t>本頁建議：2.5 分鐘</a:t>
-            </a:r>
-          </a:p>
-          <a:p>
-            <a:r>
-              <a:t>本頁目的：把羅馬書 12:2 化為青少年可用的分辨問題。</a:t>
+              <a:t>呢頁建議：2.5 分鐘</a:t>
+            </a:r>
+          </a:p>
+          <a:p>
+            <a:r>
+              <a:t>呢頁重點：把羅馬書 12:2 化為青少年可用嘅分辨問題。</a:t>
             </a:r>
           </a:p>
           <a:p/>
           <a:p>
             <a:r>
-              <a:t>導師講述：</a:t>
-            </a:r>
-          </a:p>
-          <a:p>
-            <a:r>
-              <a:t>1. 讀羅馬書 12:2。心意更新不是盲目與人相反，而是察驗甚麼合乎神的心意。</a:t>
-            </a:r>
-          </a:p>
-          <a:p>
-            <a:r>
-              <a:t>2. 流行不等於有益；同樣，一個活動的名字也不能代替對內容的了解。</a:t>
-            </a:r>
-          </a:p>
-          <a:p>
-            <a:r>
-              <a:t>3. 問：活動是否涉及招魂、占卜、刻意驚嚇或不安全行為？我是否真心願意，還是怕被排斥？</a:t>
-            </a:r>
-          </a:p>
-          <a:p>
-            <a:r>
-              <a:t>4. 可以詢問詳情、拒絕某些內容，或提出其他聚會方式。</a:t>
+              <a:t>導師可以咁講：</a:t>
+            </a:r>
+          </a:p>
+          <a:p>
+            <a:r>
+              <a:t>1. 讀羅馬書 12:2。心意更新唔係盲目同人唱反調，而係察驗乜嘢合乎神嘅心意。</a:t>
+            </a:r>
+          </a:p>
+          <a:p>
+            <a:r>
+              <a:t>2. 流行唔等於有益；同樣，一個活動嘅名字都唔可以代替對內容嘅瞭解。</a:t>
+            </a:r>
+          </a:p>
+          <a:p>
+            <a:r>
+              <a:t>3. 問：活動係咪涉及招魂、占卜、刻意驚嚇或唔安全行為？我係咪真心願意，仲係怕被排斥？</a:t>
+            </a:r>
+          </a:p>
+          <a:p>
+            <a:r>
+              <a:t>4. 可以問詳情、拒絕某些內容，或提出其他聚會方式。</a:t>
             </a:r>
           </a:p>
           <a:p/>
           <a:p>
             <a:r>
-              <a:t>轉場：當別人都去，而我想說不，需要哪一種勇氣？</a:t>
-            </a:r>
-          </a:p>
-          <a:p>
-            <a:r>
-              <a:t>時間提示：現場共 60 分鐘；逐頁計畫共 54 分鐘，預留 6 分鐘彈性。</a:t>
+              <a:t>轉去下一頁：當別人都去，而我想講唔，需要哪一種勇氣？</a:t>
+            </a:r>
+          </a:p>
+          <a:p>
+            <a:r>
+              <a:t>時間提示：現場共 60 分鐘；每頁安排共 54 分鐘，留返 6 分鐘彈性。</a:t>
             </a:r>
           </a:p>
         </p:txBody>
@@ -1261,49 +1261,49 @@
           </a:p>
           <a:p>
             <a:r>
-              <a:t>本頁建議：2.5 分鐘</a:t>
-            </a:r>
-          </a:p>
-          <a:p>
-            <a:r>
-              <a:t>本頁目的：用提摩太後書 1:7 鼓勵有勇氣、有愛心、有自制的回應。</a:t>
+              <a:t>呢頁建議：2.5 分鐘</a:t>
+            </a:r>
+          </a:p>
+          <a:p>
+            <a:r>
+              <a:t>呢頁重點：用提摩太後書 1:7 鼓勵有勇氣、有愛心、有自制嘅回應。</a:t>
             </a:r>
           </a:p>
           <a:p/>
           <a:p>
             <a:r>
-              <a:t>導師講述：</a:t>
-            </a:r>
-          </a:p>
-          <a:p>
-            <a:r>
-              <a:t>1. 讀提摩太後書 1:7。神所賜的，不是膽怯的心。</a:t>
-            </a:r>
-          </a:p>
-          <a:p>
-            <a:r>
-              <a:t>2. 剛強：可以表明自己的界線；仁愛：語氣溫柔，不批評朋友；謹守：照顧安全與身心。</a:t>
-            </a:r>
-          </a:p>
-          <a:p>
-            <a:r>
-              <a:t>3. 有害怕的感覺並不代表信心不足；可以找信任的大人談談，不必硬撐。</a:t>
-            </a:r>
-          </a:p>
-          <a:p>
-            <a:r>
-              <a:t>4. 我們不用透過嚇人證明勇敢，也不用透過嘲笑別人證明自己正確。</a:t>
+              <a:t>導師可以咁講：</a:t>
+            </a:r>
+          </a:p>
+          <a:p>
+            <a:r>
+              <a:t>1. 讀提摩太後書 1:7。神所賜嘅，唔係膽怯嘅心。</a:t>
+            </a:r>
+          </a:p>
+          <a:p>
+            <a:r>
+              <a:t>2. 剛強：可以表明自己嘅界線；仁愛：語氣溫柔，唔批評朋友；謹守：照顧安全同身心。</a:t>
+            </a:r>
+          </a:p>
+          <a:p>
+            <a:r>
+              <a:t>3. 覺得驚唔代表信心唔足；可以搵信任嘅大人傾嚇，唔使硬撐。</a:t>
+            </a:r>
+          </a:p>
+          <a:p>
+            <a:r>
+              <a:t>4. 我哋唔需要靠嚇人去證明勇敢，亦唔使靠嘲笑別人去證明自己啱。</a:t>
             </a:r>
           </a:p>
           <a:p/>
           <a:p>
             <a:r>
-              <a:t>轉場：把三個角度，變成一次具體的生活選擇。</a:t>
-            </a:r>
-          </a:p>
-          <a:p>
-            <a:r>
-              <a:t>時間提示：現場共 60 分鐘；逐頁計畫共 54 分鐘，預留 6 分鐘彈性。</a:t>
+              <a:t>轉去下一頁：把三個角度，變成一次具體嘅生活選擇。</a:t>
+            </a:r>
+          </a:p>
+          <a:p>
+            <a:r>
+              <a:t>時間提示：現場共 60 分鐘；每頁安排共 54 分鐘，留返 6 分鐘彈性。</a:t>
             </a:r>
           </a:p>
         </p:txBody>
@@ -1383,49 +1383,49 @@
           </a:p>
           <a:p>
             <a:r>
-              <a:t>本頁建議：2 分鐘</a:t>
-            </a:r>
-          </a:p>
-          <a:p>
-            <a:r>
-              <a:t>本頁目的：示範不憑節日名稱判斷、而是查看內容與提出替代方案。</a:t>
+              <a:t>呢頁建議：2 分鐘</a:t>
+            </a:r>
+          </a:p>
+          <a:p>
+            <a:r>
+              <a:t>呢頁重點：示範唔憑節日名稱判斷、而係查看內容同提出替代方案。</a:t>
             </a:r>
           </a:p>
           <a:p/>
           <a:p>
             <a:r>
-              <a:t>導師講述：</a:t>
-            </a:r>
-          </a:p>
-          <a:p>
-            <a:r>
-              <a:t>1. 遇到派對邀請，先問清楚內容，不急着答應或責備對方。</a:t>
-            </a:r>
-          </a:p>
-          <a:p>
-            <a:r>
-              <a:t>2. 若有招魂、占卜、恐怖驚嚇或令你不安的內容，可以拒絕並說明自己的界線。</a:t>
-            </a:r>
-          </a:p>
-          <a:p>
-            <a:r>
-              <a:t>3. 本次聚會選擇光明派對：用點心、鼓勵和祝福，保留友誼與喜樂。</a:t>
-            </a:r>
-          </a:p>
-          <a:p>
-            <a:r>
-              <a:t>4. 尊重不同教會和家庭的規範；有疑問時，與家長、導師一起分辨。</a:t>
+              <a:t>導師可以咁講：</a:t>
+            </a:r>
+          </a:p>
+          <a:p>
+            <a:r>
+              <a:t>1. 遇到派對邀請，先問清楚內容，唔使急住答應或責備對方。</a:t>
+            </a:r>
+          </a:p>
+          <a:p>
+            <a:r>
+              <a:t>2. 如果有招魂、占卜、恐怖驚嚇或令你唔安嘅內容，可以拒絕並講清楚自己嘅界線。</a:t>
+            </a:r>
+          </a:p>
+          <a:p>
+            <a:r>
+              <a:t>3. 本次聚會選擇光明派對：用點心、鼓勵和祝福，保留友誼同喜樂。</a:t>
+            </a:r>
+          </a:p>
+          <a:p>
+            <a:r>
+              <a:t>4. 尊重唔同教會和家庭嘅規範；有疑問時，同家長、導師一起分辨。</a:t>
             </a:r>
           </a:p>
           <a:p/>
           <a:p>
             <a:r>
-              <a:t>轉場：現在交給小組，聽聽你們真實的想法。</a:t>
-            </a:r>
-          </a:p>
-          <a:p>
-            <a:r>
-              <a:t>時間提示：現場共 60 分鐘；逐頁計畫共 54 分鐘，預留 6 分鐘彈性。</a:t>
+              <a:t>轉去下一頁：而家交給小組，聽聽你哋真實嘅想法。</a:t>
+            </a:r>
+          </a:p>
+          <a:p>
+            <a:r>
+              <a:t>時間提示：現場共 60 分鐘；每頁安排共 54 分鐘，留返 6 分鐘彈性。</a:t>
             </a:r>
           </a:p>
         </p:txBody>
@@ -1495,7 +1495,7 @@
           <a:lstStyle/>
           <a:p>
             <a:r>
-              <a:t>真實說，也好好聽</a:t>
+              <a:t>真實講，都好好聽</a:t>
             </a:r>
           </a:p>
           <a:p>
@@ -1505,28 +1505,28 @@
           </a:p>
           <a:p>
             <a:r>
-              <a:t>本頁建議：1 分鐘</a:t>
-            </a:r>
-          </a:p>
-          <a:p>
-            <a:r>
-              <a:t>本頁目的：建立 4–6 人討論的安全規則及時間安排。</a:t>
+              <a:t>呢頁建議：1 分鐘</a:t>
+            </a:r>
+          </a:p>
+          <a:p>
+            <a:r>
+              <a:t>呢頁重點：建立 4–6 人討論嘅安全規則及時間安排。</a:t>
             </a:r>
           </a:p>
           <a:p/>
           <a:p>
             <a:r>
-              <a:t>導師講述：</a:t>
-            </a:r>
-          </a:p>
-          <a:p>
-            <a:r>
-              <a:t>1. 每組 4–6 人，由一位導師引導；請大家圍坐並找一位自願分享者。</a:t>
-            </a:r>
-          </a:p>
-          <a:p>
-            <a:r>
-              <a:t>2. 可以選擇先聆聽，不追問私人經歷；不嘲笑、不打斷，不把別組的分享當笑話。</a:t>
+              <a:t>導師可以咁講：</a:t>
+            </a:r>
+          </a:p>
+          <a:p>
+            <a:r>
+              <a:t>1. 每組 4–6 人，由一位導師引導；請大家圍坐並搵一位自願分享者。</a:t>
+            </a:r>
+          </a:p>
+          <a:p>
+            <a:r>
+              <a:t>2. 可以選擇先聆聽，唔追問私人經歷；唔嘲笑、唔打斷，唔把別組嘅分享當笑話。</a:t>
             </a:r>
           </a:p>
           <a:p>
@@ -1536,18 +1536,18 @@
           </a:p>
           <a:p>
             <a:r>
-              <a:t>4. 若出現安全或求助訊息，導師需依教會的兒少保護程序處理，不承諾絕對保密。</a:t>
+              <a:t>4. 如果出現安全或求助訊息，導師需依教會嘅兒少保護程序處理，唔承諾絕對保密。</a:t>
             </a:r>
           </a:p>
           <a:p/>
           <a:p>
             <a:r>
-              <a:t>轉場：三個問題，從同學的邀請聊到我們的行動。</a:t>
-            </a:r>
-          </a:p>
-          <a:p>
-            <a:r>
-              <a:t>時間提示：現場共 60 分鐘；逐頁計畫共 54 分鐘，預留 6 分鐘彈性。</a:t>
+              <a:t>轉去下一頁：三個問題，從同學嘅邀請聊到我哋嘅行動。</a:t>
+            </a:r>
+          </a:p>
+          <a:p>
+            <a:r>
+              <a:t>時間提示：現場共 60 分鐘；每頁安排共 54 分鐘，留返 6 分鐘彈性。</a:t>
             </a:r>
           </a:p>
         </p:txBody>
@@ -1617,7 +1617,7 @@
           <a:lstStyle/>
           <a:p>
             <a:r>
-              <a:t>你會怎樣選擇？</a:t>
+              <a:t>你會點樣選擇？</a:t>
             </a:r>
           </a:p>
           <a:p>
@@ -1627,49 +1627,49 @@
           </a:p>
           <a:p>
             <a:r>
-              <a:t>本頁建議：11 分鐘</a:t>
-            </a:r>
-          </a:p>
-          <a:p>
-            <a:r>
-              <a:t>本頁目的：讓青少年表達同儕壓力、文化觀察和替代活動的想法。</a:t>
+              <a:t>呢頁建議：11 分鐘</a:t>
+            </a:r>
+          </a:p>
+          <a:p>
+            <a:r>
+              <a:t>呢頁重點：等青少年講出同儕壓力、文化觀察和替代活動嘅想法。</a:t>
             </a:r>
           </a:p>
           <a:p/>
           <a:p>
             <a:r>
-              <a:t>導師講述：</a:t>
-            </a:r>
-          </a:p>
-          <a:p>
-            <a:r>
-              <a:t>1. 第一題約 4 分鐘：朋友邀請你參加萬聖節派對或扮鬼活動，你最擔心甚麼？你會怎樣回應？</a:t>
-            </a:r>
-          </a:p>
-          <a:p>
-            <a:r>
-              <a:t>2. 第二題約 3 分鐘：商家如何把恐怖包裝成娛樂？哪些內容有趣，哪些讓你不舒服？不要假定每個人想法相同。</a:t>
-            </a:r>
-          </a:p>
-          <a:p>
-            <a:r>
-              <a:t>3. 第三題約 4 分鐘：若不討糖果或扮鬼，可以用甚麼有意義又好玩的方式度過這一天？</a:t>
-            </a:r>
-          </a:p>
-          <a:p>
-            <a:r>
-              <a:t>4. 讓每人有機會說話；導師多聽、少講，不急着給標準答案。</a:t>
+              <a:t>導師可以咁講：</a:t>
+            </a:r>
+          </a:p>
+          <a:p>
+            <a:r>
+              <a:t>1. 第一題約 4 分鐘：朋友邀請你參加萬聖節派對或扮鬼活動，你最擔心乜嘢？你會點樣回應？</a:t>
+            </a:r>
+          </a:p>
+          <a:p>
+            <a:r>
+              <a:t>2. 第二題約 3 分鐘：商家點樣把恐怖包裝成娛樂？哪些內容有趣，哪些等你唔舒服？唔好假定每個人想法相同。</a:t>
+            </a:r>
+          </a:p>
+          <a:p>
+            <a:r>
+              <a:t>3. 第三題約 4 分鐘：如果唔討糖果或扮鬼，可以用乜嘢有意義又好玩嘅方式度過呢一天？</a:t>
+            </a:r>
+          </a:p>
+          <a:p>
+            <a:r>
+              <a:t>4. 等每人有機會講嘢；導師多聽、少講，唔使急住給標準答案。</a:t>
             </a:r>
           </a:p>
           <a:p/>
           <a:p>
             <a:r>
-              <a:t>轉場：試着把想法縮成一句，讓朋友聽得懂。</a:t>
-            </a:r>
-          </a:p>
-          <a:p>
-            <a:r>
-              <a:t>時間提示：現場共 60 分鐘；逐頁計畫共 54 分鐘，預留 6 分鐘彈性。</a:t>
+              <a:t>轉去下一頁：試着把想法縮成一句，等朋友聽得懂。</a:t>
+            </a:r>
+          </a:p>
+          <a:p>
+            <a:r>
+              <a:t>時間提示：現場共 60 分鐘；每頁安排共 54 分鐘，留返 6 分鐘彈性。</a:t>
             </a:r>
           </a:p>
         </p:txBody>
@@ -1739,7 +1739,7 @@
           <a:lstStyle/>
           <a:p>
             <a:r>
-              <a:t>有界線，也有友誼</a:t>
+              <a:t>有界線，都有友誼</a:t>
             </a:r>
           </a:p>
           <a:p>
@@ -1749,23 +1749,23 @@
           </a:p>
           <a:p>
             <a:r>
-              <a:t>本頁建議：1.5 分鐘</a:t>
-            </a:r>
-          </a:p>
-          <a:p>
-            <a:r>
-              <a:t>本頁目的：提供不羞辱朋友、又能清楚拒絕的語句，讓青少年練習。</a:t>
+              <a:t>呢頁建議：1.5 分鐘</a:t>
+            </a:r>
+          </a:p>
+          <a:p>
+            <a:r>
+              <a:t>呢頁重點：提供唔羞辱朋友、又能清楚拒絕嘅語句，等青少年練習。</a:t>
             </a:r>
           </a:p>
           <a:p/>
           <a:p>
             <a:r>
-              <a:t>導師講述：</a:t>
-            </a:r>
-          </a:p>
-          <a:p>
-            <a:r>
-              <a:t>1. 邀請兩人一組，一人扮邀請的朋友，一人練習回應；再交換角色。</a:t>
+              <a:t>導師可以咁講：</a:t>
+            </a:r>
+          </a:p>
+          <a:p>
+            <a:r>
+              <a:t>1. 邀請兩人一組，一人扮邀請嘅朋友，一人練習回應；再交換角色。</a:t>
             </a:r>
           </a:p>
           <a:p>
@@ -1775,23 +1775,23 @@
           </a:p>
           <a:p>
             <a:r>
-              <a:t>3. 可以按自己的說話方式修改；重點是感謝、界線、替代方案。</a:t>
-            </a:r>
-          </a:p>
-          <a:p>
-            <a:r>
-              <a:t>4. 若朋友持續施壓或嘲笑，不必爭辯；可以退出對話並找導師或家長幫忙。</a:t>
+              <a:t>3. 可以按自己嘅講嘢方式修改；重點係感謝、界線、替代方案。</a:t>
+            </a:r>
+          </a:p>
+          <a:p>
+            <a:r>
+              <a:t>4. 如果朋友持續施壓或嘲笑，唔使爭辯；可以離開對話並搵導師或家長幫手。</a:t>
             </a:r>
           </a:p>
           <a:p/>
           <a:p>
             <a:r>
-              <a:t>轉場：我們不只作出選擇，也一起把需要帶到神面前。</a:t>
-            </a:r>
-          </a:p>
-          <a:p>
-            <a:r>
-              <a:t>時間提示：現場共 60 分鐘；逐頁計畫共 54 分鐘，預留 6 分鐘彈性。</a:t>
+              <a:t>轉去下一頁：我哋唔只做出選擇，都一起把需要帶到神面前。</a:t>
+            </a:r>
+          </a:p>
+          <a:p>
+            <a:r>
+              <a:t>時間提示：現場共 60 分鐘；每頁安排共 54 分鐘，留返 6 分鐘彈性。</a:t>
             </a:r>
           </a:p>
         </p:txBody>
@@ -1871,44 +1871,44 @@
           </a:p>
           <a:p>
             <a:r>
-              <a:t>本頁建議：0.5 分鐘</a:t>
-            </a:r>
-          </a:p>
-          <a:p>
-            <a:r>
-              <a:t>本頁目的：讓青少年知道五個環節及各自的時間。</a:t>
+              <a:t>呢頁建議：0.5 分鐘</a:t>
+            </a:r>
+          </a:p>
+          <a:p>
+            <a:r>
+              <a:t>呢頁重點：等青少年知道五個環節及各自嘅時間。</a:t>
             </a:r>
           </a:p>
           <a:p/>
           <a:p>
             <a:r>
-              <a:t>導師講述：</a:t>
-            </a:r>
-          </a:p>
-          <a:p>
-            <a:r>
-              <a:t>1. 按時間介紹五個環節，不逐字朗讀表格。</a:t>
-            </a:r>
-          </a:p>
-          <a:p>
-            <a:r>
-              <a:t>2. 活動共 60 分鐘；逐頁計畫 54 分鐘，預留 6 分鐘作停頓、換組和交流。</a:t>
-            </a:r>
-          </a:p>
-          <a:p>
-            <a:r>
-              <a:t>3. 小組討論不設標準答案；歡迎真實說出同學邀請時的困難。</a:t>
+              <a:t>導師可以咁講：</a:t>
+            </a:r>
+          </a:p>
+          <a:p>
+            <a:r>
+              <a:t>1. 按時間介紹五個環節，唔逐字朗讀表格。</a:t>
+            </a:r>
+          </a:p>
+          <a:p>
+            <a:r>
+              <a:t>2. 活動共 60 分鐘；逐頁安排 54 分鐘，留返 6 分鐘停一停、換組和交流。</a:t>
+            </a:r>
+          </a:p>
+          <a:p>
+            <a:r>
+              <a:t>3. 小組討論唔設標準答案；歡迎真實講出同學邀請時嘅困難。</a:t>
             </a:r>
           </a:p>
           <a:p/>
           <a:p>
             <a:r>
-              <a:t>轉場：用三道真假題熱身，看看我們知道多少。</a:t>
-            </a:r>
-          </a:p>
-          <a:p>
-            <a:r>
-              <a:t>時間提示：現場共 60 分鐘；逐頁計畫共 54 分鐘，預留 6 分鐘彈性。</a:t>
+              <a:t>轉去下一頁：用三道真假題熱身，睇下我哋知道多少。</a:t>
+            </a:r>
+          </a:p>
+          <a:p>
+            <a:r>
+              <a:t>時間提示：現場共 60 分鐘；每頁安排共 54 分鐘，留返 6 分鐘彈性。</a:t>
             </a:r>
           </a:p>
         </p:txBody>
@@ -1978,54 +1978,54 @@
           <a:lstStyle/>
           <a:p>
             <a:r>
-              <a:t>不是少一點樂趣，是多一點光</a:t>
-            </a:r>
-          </a:p>
-          <a:p>
-            <a:r>
-              <a:t>回應與禱告｜40–50 分鐘</a:t>
-            </a:r>
-          </a:p>
-          <a:p>
-            <a:r>
-              <a:t>本頁建議：1 分鐘</a:t>
-            </a:r>
-          </a:p>
-          <a:p>
-            <a:r>
-              <a:t>本頁目的：以生命、和平和祝福總結，不以恐懼或敵意呼召。</a:t>
+              <a:t>唔係少一點樂趣，係多一點光</a:t>
+            </a:r>
+          </a:p>
+          <a:p>
+            <a:r>
+              <a:t>回應同禱告｜40–50 分鐘</a:t>
+            </a:r>
+          </a:p>
+          <a:p>
+            <a:r>
+              <a:t>呢頁建議：1 分鐘</a:t>
+            </a:r>
+          </a:p>
+          <a:p>
+            <a:r>
+              <a:t>呢頁重點：以生命、和平和祝福總結，唔以恐懼或敵意呼召。</a:t>
             </a:r>
           </a:p>
           <a:p/>
           <a:p>
             <a:r>
-              <a:t>導師講述：</a:t>
-            </a:r>
-          </a:p>
-          <a:p>
-            <a:r>
-              <a:t>1. 今天不是要剝奪大家的樂趣，而是學習選擇成為點亮光芒的人。</a:t>
-            </a:r>
-          </a:p>
-          <a:p>
-            <a:r>
-              <a:t>2. 我們可以不參與不合信仰或良心的內容，同時保留對朋友的愛和尊重。</a:t>
-            </a:r>
-          </a:p>
-          <a:p>
-            <a:r>
-              <a:t>3. 當文化強調恐怖時，我們可以主動傳遞生命、和平與喜樂。</a:t>
+              <a:t>導師可以咁講：</a:t>
+            </a:r>
+          </a:p>
+          <a:p>
+            <a:r>
+              <a:t>1. 今日唔係要剝奪大家嘅樂趣，而係學習選擇成為點亮光芒嘅人。</a:t>
+            </a:r>
+          </a:p>
+          <a:p>
+            <a:r>
+              <a:t>2. 我哋可以唔參加唔合信仰或良心嘅內容，同時保留對朋友嘅愛和尊重。</a:t>
+            </a:r>
+          </a:p>
+          <a:p>
+            <a:r>
+              <a:t>3. 當文化強調恐怖時，我哋可以主動傳遞生命、和平同喜樂。</a:t>
             </a:r>
           </a:p>
           <a:p/>
           <a:p>
             <a:r>
-              <a:t>轉場：三段經文，帶走三個提醒。</a:t>
-            </a:r>
-          </a:p>
-          <a:p>
-            <a:r>
-              <a:t>時間提示：現場共 60 分鐘；逐頁計畫共 54 分鐘，預留 6 分鐘彈性。</a:t>
+              <a:t>轉去下一頁：三段經文，帶走三個提醒。</a:t>
+            </a:r>
+          </a:p>
+          <a:p>
+            <a:r>
+              <a:t>時間提示：現場共 60 分鐘；每頁安排共 54 分鐘，留返 6 分鐘彈性。</a:t>
             </a:r>
           </a:p>
         </p:txBody>
@@ -2100,54 +2100,54 @@
           </a:p>
           <a:p>
             <a:r>
-              <a:t>回應與禱告｜40–50 分鐘</a:t>
-            </a:r>
-          </a:p>
-          <a:p>
-            <a:r>
-              <a:t>本頁建議：2 分鐘</a:t>
-            </a:r>
-          </a:p>
-          <a:p>
-            <a:r>
-              <a:t>本頁目的：重溫經文主題，讓青少年選一項今天要實踐的提醒。</a:t>
+              <a:t>回應同禱告｜40–50 分鐘</a:t>
+            </a:r>
+          </a:p>
+          <a:p>
+            <a:r>
+              <a:t>呢頁建議：2 分鐘</a:t>
+            </a:r>
+          </a:p>
+          <a:p>
+            <a:r>
+              <a:t>呢頁重點：重溫經文主題，等青少年選一項今日要實踐嘅提醒。</a:t>
             </a:r>
           </a:p>
           <a:p/>
           <a:p>
             <a:r>
-              <a:t>導師講述：</a:t>
-            </a:r>
-          </a:p>
-          <a:p>
-            <a:r>
-              <a:t>1. 這頁是經文主題摘要，不是逐字引文；完整引文在前面的經文頁。</a:t>
-            </a:r>
-          </a:p>
-          <a:p>
-            <a:r>
-              <a:t>2. 約翰福音 8:12：跟從耶穌，帶出生命的光；羅馬書 12:2：心意更新，學習分辨。</a:t>
-            </a:r>
-          </a:p>
-          <a:p>
-            <a:r>
-              <a:t>3. 提摩太後書 1:7：剛強、仁愛、謹守；不必用恐懼作決定。</a:t>
-            </a:r>
-          </a:p>
-          <a:p>
-            <a:r>
-              <a:t>4. 請大家默想：今天最想帶走哪一句？心裏選一項就可以，不必公開表態。</a:t>
+              <a:t>導師可以咁講：</a:t>
+            </a:r>
+          </a:p>
+          <a:p>
+            <a:r>
+              <a:t>1. 呢頁係經文主題摘要，唔係逐字引文；完整引文在前面嘅經文頁。</a:t>
+            </a:r>
+          </a:p>
+          <a:p>
+            <a:r>
+              <a:t>2. 約翰福音 8:12：跟從耶穌，帶出生命嘅光；羅馬書 12:2：心意更新，學習分辨。</a:t>
+            </a:r>
+          </a:p>
+          <a:p>
+            <a:r>
+              <a:t>3. 提摩太後書 1:7：剛強、仁愛、謹守；唔使用恐懼作決定。</a:t>
+            </a:r>
+          </a:p>
+          <a:p>
+            <a:r>
+              <a:t>4. 請大家默想：今日最想帶走哪一句？心裏選一項就可以，唔使公開表態。</a:t>
             </a:r>
           </a:p>
           <a:p/>
           <a:p>
             <a:r>
-              <a:t>轉場：安靜一下，用禱告回應。</a:t>
-            </a:r>
-          </a:p>
-          <a:p>
-            <a:r>
-              <a:t>時間提示：現場共 60 分鐘；逐頁計畫共 54 分鐘，預留 6 分鐘彈性。</a:t>
+              <a:t>轉去下一頁：安靜一下，用禱告回應。</a:t>
+            </a:r>
+          </a:p>
+          <a:p>
+            <a:r>
+              <a:t>時間提示：現場共 60 分鐘；每頁安排共 54 分鐘，留返 6 分鐘彈性。</a:t>
             </a:r>
           </a:p>
         </p:txBody>
@@ -2217,59 +2217,59 @@
           <a:lstStyle/>
           <a:p>
             <a:r>
-              <a:t>求祢讓我們，成為祝福</a:t>
-            </a:r>
-          </a:p>
-          <a:p>
-            <a:r>
-              <a:t>回應與禱告｜40–50 分鐘</a:t>
-            </a:r>
-          </a:p>
-          <a:p>
-            <a:r>
-              <a:t>本頁建議：3 分鐘</a:t>
-            </a:r>
-          </a:p>
-          <a:p>
-            <a:r>
-              <a:t>本頁目的：提供修正後、可直接帶領的結束禱告。</a:t>
+              <a:t>求祢幫我哋成為別人嘅祝福</a:t>
+            </a:r>
+          </a:p>
+          <a:p>
+            <a:r>
+              <a:t>回應同禱告｜40–50 分鐘</a:t>
+            </a:r>
+          </a:p>
+          <a:p>
+            <a:r>
+              <a:t>呢頁建議：3 分鐘</a:t>
+            </a:r>
+          </a:p>
+          <a:p>
+            <a:r>
+              <a:t>呢頁重點：提供修正後、可直接帶領嘅結束禱告。</a:t>
             </a:r>
           </a:p>
           <a:p/>
           <a:p>
             <a:r>
-              <a:t>導師講述：</a:t>
-            </a:r>
-          </a:p>
-          <a:p>
-            <a:r>
-              <a:t>1. 先預留片刻安靜；邀請大家用自己舒適的姿勢禱告，也可以安靜聆聽。</a:t>
-            </a:r>
-          </a:p>
-          <a:p>
-            <a:r>
-              <a:t>2. 親愛的天父，謝謝祢召喚我們成為光明的兒女。在各種文化潮流中，求祢賜給我們智慧去分辨，勇氣去堅持合宜的選擇，也賜給我們愛心去尊重身邊的人。</a:t>
-            </a:r>
-          </a:p>
-          <a:p>
-            <a:r>
-              <a:t>3. 當我們面對同儕壓力或心裏不安，求祢幫助我們記得：祢所賜的是剛強、仁愛、謹守的心。讓我們用祢的愛與喜樂祝福朋友，成為帶來希望的人。</a:t>
-            </a:r>
-          </a:p>
-          <a:p>
-            <a:r>
-              <a:t>4. 禱告奉耶穌基督的名求，阿門。原稿「耶穌水晶」已修正為「耶穌基督」。</a:t>
+              <a:t>導師可以咁講：</a:t>
+            </a:r>
+          </a:p>
+          <a:p>
+            <a:r>
+              <a:t>1. 先留返片刻安靜；邀請大家用自己舒適嘅姿勢禱告，都可以安靜聆聽。</a:t>
+            </a:r>
+          </a:p>
+          <a:p>
+            <a:r>
+              <a:t>2. 親愛嘅天父，謝謝祢召喚我哋成為光明嘅兒女。面對唔同文化潮流，求祢賜給我哋智慧去分辨，勇氣去堅持合宜嘅選擇，都賜給我哋愛心去尊重身邊嘅人。</a:t>
+            </a:r>
+          </a:p>
+          <a:p>
+            <a:r>
+              <a:t>3. 當我哋面對同儕壓力或心裏唔安，求祢幫助我哋記住：祢所賜嘅係剛強、仁愛、謹守嘅心。等我哋用祢嘅愛同喜樂祝福朋友，成為帶來希望嘅人。</a:t>
+            </a:r>
+          </a:p>
+          <a:p>
+            <a:r>
+              <a:t>4. 禱告奉耶穌基督嘅名求，阿門。原稿「耶穌水晶」已修正為「耶穌基督」。</a:t>
             </a:r>
           </a:p>
           <a:p/>
           <a:p>
             <a:r>
-              <a:t>轉場：若你願意，也可以和身邊一位伙伴彼此代禱。</a:t>
-            </a:r>
-          </a:p>
-          <a:p>
-            <a:r>
-              <a:t>時間提示：現場共 60 分鐘；逐頁計畫共 54 分鐘，預留 6 分鐘彈性。</a:t>
+              <a:t>轉去下一頁：如果你願意，都可以和身邊一位夥伴彼此代禱。</a:t>
+            </a:r>
+          </a:p>
+          <a:p>
+            <a:r>
+              <a:t>時間提示：現場共 60 分鐘；每頁安排共 54 分鐘，留返 6 分鐘彈性。</a:t>
             </a:r>
           </a:p>
         </p:txBody>
@@ -2339,59 +2339,59 @@
           <a:lstStyle/>
           <a:p>
             <a:r>
-              <a:t>為一位伙伴，送上禱告</a:t>
-            </a:r>
-          </a:p>
-          <a:p>
-            <a:r>
-              <a:t>回應與禱告｜40–50 分鐘</a:t>
-            </a:r>
-          </a:p>
-          <a:p>
-            <a:r>
-              <a:t>本頁建議：3 分鐘</a:t>
-            </a:r>
-          </a:p>
-          <a:p>
-            <a:r>
-              <a:t>本頁目的：用自願、低壓力的方式進行彼此代禱。</a:t>
+              <a:t>為一位夥伴，送上禱告</a:t>
+            </a:r>
+          </a:p>
+          <a:p>
+            <a:r>
+              <a:t>回應同禱告｜40–50 分鐘</a:t>
+            </a:r>
+          </a:p>
+          <a:p>
+            <a:r>
+              <a:t>呢頁建議：3 分鐘</a:t>
+            </a:r>
+          </a:p>
+          <a:p>
+            <a:r>
+              <a:t>呢頁重點：用自願、低壓力嘅方式做彼此代禱。</a:t>
             </a:r>
           </a:p>
           <a:p/>
           <a:p>
             <a:r>
-              <a:t>導師講述：</a:t>
-            </a:r>
-          </a:p>
-          <a:p>
-            <a:r>
-              <a:t>1. 兩人一組，自願分享一件想得到支持的事情，例如同儕壓力或作選擇的困難。</a:t>
-            </a:r>
-          </a:p>
-          <a:p>
-            <a:r>
-              <a:t>2. 約 1 分鐘彼此分享，再各用約 1 分鐘代禱；不想分享的人可安靜默禱。</a:t>
-            </a:r>
-          </a:p>
-          <a:p>
-            <a:r>
-              <a:t>3. 不必評論對方，也不必分享私密經歷；若有人需要進一步支持，請找導師。</a:t>
-            </a:r>
-          </a:p>
-          <a:p>
-            <a:r>
-              <a:t>4. 結束時提醒大家：我們不孤單，可以彼此支持。</a:t>
+              <a:t>導師可以咁講：</a:t>
+            </a:r>
+          </a:p>
+          <a:p>
+            <a:r>
+              <a:t>1. 兩人一組，自願分享一件想得到支持嘅事，例如同儕壓力或唔知點揀。</a:t>
+            </a:r>
+          </a:p>
+          <a:p>
+            <a:r>
+              <a:t>2. 約 1 分鐘彼此分享，再各用約 1 分鐘代禱；唔想分享嘅人可安靜默禱。</a:t>
+            </a:r>
+          </a:p>
+          <a:p>
+            <a:r>
+              <a:t>3. 唔使評論對方，都唔使分享私密經歷；如果有人需要進一步支持，請搵導師。</a:t>
+            </a:r>
+          </a:p>
+          <a:p>
+            <a:r>
+              <a:t>4. 完結嗰陣提醒大家：我哋唔孤單，可以彼此支持。</a:t>
             </a:r>
           </a:p>
           <a:p/>
           <a:p>
             <a:r>
-              <a:t>轉場：把今天的祝福，化成一場有喜樂的光明派對。</a:t>
-            </a:r>
-          </a:p>
-          <a:p>
-            <a:r>
-              <a:t>時間提示：現場共 60 分鐘；逐頁計畫共 54 分鐘，預留 6 分鐘彈性。</a:t>
+              <a:t>轉去下一頁：把今日嘅祝福，化成一場有喜樂嘅光明派對。</a:t>
+            </a:r>
+          </a:p>
+          <a:p>
+            <a:r>
+              <a:t>時間提示：現場共 60 分鐘；每頁安排共 54 分鐘，留返 6 分鐘彈性。</a:t>
             </a:r>
           </a:p>
         </p:txBody>
@@ -2461,7 +2461,7 @@
           <a:lstStyle/>
           <a:p>
             <a:r>
-              <a:t>光明派對，現在開始</a:t>
+              <a:t>光明派對，而家開始</a:t>
             </a:r>
           </a:p>
           <a:p>
@@ -2471,49 +2471,49 @@
           </a:p>
           <a:p>
             <a:r>
-              <a:t>本頁建議：1 分鐘</a:t>
-            </a:r>
-          </a:p>
-          <a:p>
-            <a:r>
-              <a:t>本頁目的：清楚介紹光明禮包、點心和祝福卡活動。</a:t>
+              <a:t>呢頁建議：1 分鐘</a:t>
+            </a:r>
+          </a:p>
+          <a:p>
+            <a:r>
+              <a:t>呢頁重點：清楚介紹光明禮包、點心和祝福卡活動。</a:t>
             </a:r>
           </a:p>
           <a:p/>
           <a:p>
             <a:r>
-              <a:t>導師講述：</a:t>
-            </a:r>
-          </a:p>
-          <a:p>
-            <a:r>
-              <a:t>1. 邀請大家自由交流，領取果汁、零食包或寫有鼓勵經文的小禮物。</a:t>
-            </a:r>
-          </a:p>
-          <a:p>
-            <a:r>
-              <a:t>2. 螢光棒可作裝飾，但不要拆開或咬破；飲食前留意食物標示和過敏需要。</a:t>
-            </a:r>
-          </a:p>
-          <a:p>
-            <a:r>
-              <a:t>3. 拿一張卡，寫給一位朋友：一句真誠鼓勵，加上一個你願意做的支持行動。</a:t>
-            </a:r>
-          </a:p>
-          <a:p>
-            <a:r>
-              <a:t>4. 不需要暗房、火焰或恐怖元素，也能一起開心；確保走道和活動空間安全。</a:t>
+              <a:t>導師可以咁講：</a:t>
+            </a:r>
+          </a:p>
+          <a:p>
+            <a:r>
+              <a:t>1. 邀請大家自由交流，領取果汁、零食包或寫有鼓勵經文嘅小禮物。</a:t>
+            </a:r>
+          </a:p>
+          <a:p>
+            <a:r>
+              <a:t>2. 螢光棒可作裝飾，但唔好拆開或咬破；飲食前留意食物標示和過敏需要。</a:t>
+            </a:r>
+          </a:p>
+          <a:p>
+            <a:r>
+              <a:t>3. 攞一張卡，寫給一位朋友：一句真誠鼓勵，加上一個你願意做嘅支持行動。</a:t>
+            </a:r>
+          </a:p>
+          <a:p>
+            <a:r>
+              <a:t>4. 唔使暗房、火焰或恐怖元素，都能一起開心；確保走道和活動空間安全。</a:t>
             </a:r>
           </a:p>
           <a:p/>
           <a:p>
             <a:r>
-              <a:t>轉場：先寫下一束光，再把它帶出去。</a:t>
-            </a:r>
-          </a:p>
-          <a:p>
-            <a:r>
-              <a:t>時間提示：現場共 60 分鐘；逐頁計畫共 54 分鐘，預留 6 分鐘彈性。</a:t>
+              <a:t>轉去下一頁：先寫下一束光，再把它帶出去。</a:t>
+            </a:r>
+          </a:p>
+          <a:p>
+            <a:r>
+              <a:t>時間提示：現場共 60 分鐘；每頁安排共 54 分鐘，留返 6 分鐘彈性。</a:t>
             </a:r>
           </a:p>
         </p:txBody>
@@ -2593,18 +2593,18 @@
           </a:p>
           <a:p>
             <a:r>
-              <a:t>本頁建議：7.5 分鐘</a:t>
-            </a:r>
-          </a:p>
-          <a:p>
-            <a:r>
-              <a:t>本頁目的：在點心和交流中，完成可送出的具體祝福。</a:t>
+              <a:t>呢頁建議：7.5 分鐘</a:t>
+            </a:r>
+          </a:p>
+          <a:p>
+            <a:r>
+              <a:t>呢頁重點：在點心和交流中，完成可送出嘅具體祝福。</a:t>
             </a:r>
           </a:p>
           <a:p/>
           <a:p>
             <a:r>
-              <a:t>導師講述：</a:t>
+              <a:t>導師可以咁講：</a:t>
             </a:r>
           </a:p>
           <a:p>
@@ -2614,28 +2614,28 @@
           </a:p>
           <a:p>
             <a:r>
-              <a:t>2. 卡片可以寫「多謝你一直陪住我」、「願你今天有平安」或其他真誠的說話。</a:t>
-            </a:r>
-          </a:p>
-          <a:p>
-            <a:r>
-              <a:t>3. 可以加一句經文或自己願意做的支持行動，例如陪朋友談談、一起溫習。</a:t>
-            </a:r>
-          </a:p>
-          <a:p>
-            <a:r>
-              <a:t>4. 尊重收卡人的信仰和意願，不以贈送零食或禮物作施壓；不強迫公開卡片內容。</a:t>
+              <a:t>2. 卡片可以寫「多謝你一直陪住我」、「願你今日有平安」或其他真誠嘅講嘢。</a:t>
+            </a:r>
+          </a:p>
+          <a:p>
+            <a:r>
+              <a:t>3. 可以加一句經文或自己願意做嘅支持行動，例如陪朋友談談、一起溫習。</a:t>
+            </a:r>
+          </a:p>
+          <a:p>
+            <a:r>
+              <a:t>4. 尊重收卡人嘅信仰和意願，唔以贈送零食或禮物作施壓；唔強迫公開卡片內容。</a:t>
             </a:r>
           </a:p>
           <a:p/>
           <a:p>
             <a:r>
-              <a:t>轉場：聚會快結束了，把今天的一個選擇帶進生活。</a:t>
-            </a:r>
-          </a:p>
-          <a:p>
-            <a:r>
-              <a:t>時間提示：現場共 60 分鐘；逐頁計畫共 54 分鐘，預留 6 分鐘彈性。</a:t>
+              <a:t>轉去下一頁：聚會快結束了，把今日嘅一個選擇帶進生活。</a:t>
+            </a:r>
+          </a:p>
+          <a:p>
+            <a:r>
+              <a:t>時間提示：現場共 60 分鐘；每頁安排共 54 分鐘，留返 6 分鐘彈性。</a:t>
             </a:r>
           </a:p>
         </p:txBody>
@@ -2705,7 +2705,7 @@
           <a:lstStyle/>
           <a:p>
             <a:r>
-              <a:t>不只避開黑暗，更要活出光</a:t>
+              <a:t>唔只避開黑暗，更要活出光</a:t>
             </a:r>
           </a:p>
           <a:p>
@@ -2715,44 +2715,44 @@
           </a:p>
           <a:p>
             <a:r>
-              <a:t>本頁建議：0.4 分鐘</a:t>
-            </a:r>
-          </a:p>
-          <a:p>
-            <a:r>
-              <a:t>本頁目的：用一個生活行動結束聚會。</a:t>
+              <a:t>呢頁建議：0.4 分鐘</a:t>
+            </a:r>
+          </a:p>
+          <a:p>
+            <a:r>
+              <a:t>呢頁重點：用一個生活行動結束聚會。</a:t>
             </a:r>
           </a:p>
           <a:p/>
           <a:p>
             <a:r>
-              <a:t>導師講述：</a:t>
-            </a:r>
-          </a:p>
-          <a:p>
-            <a:r>
-              <a:t>1. 感謝大家真實參與；提醒把卡片送給那位朋友。</a:t>
-            </a:r>
-          </a:p>
-          <a:p>
-            <a:r>
-              <a:t>2. 今天可以選擇一個行動：溫柔表達界線、向信任的人求助，或鼓勵一位朋友。</a:t>
-            </a:r>
-          </a:p>
-          <a:p>
-            <a:r>
-              <a:t>3. 祝福大家帶着平安與喜樂離開；若仍有問題或不安，聚會後可以找導師聊聊。</a:t>
+              <a:t>導師可以咁講：</a:t>
+            </a:r>
+          </a:p>
+          <a:p>
+            <a:r>
+              <a:t>1. 感謝大家真實參加；提醒把卡片送給嗰位朋友。</a:t>
+            </a:r>
+          </a:p>
+          <a:p>
+            <a:r>
+              <a:t>2. 今日可以選擇一個行動：溫柔講出界線、向信任嘅人求助，或鼓勵一位朋友。</a:t>
+            </a:r>
+          </a:p>
+          <a:p>
+            <a:r>
+              <a:t>3. 祝福大家帶着平安同喜樂離開；如果仲有問題或唔安，聚會後可以搵導師聊聊。</a:t>
             </a:r>
           </a:p>
           <a:p/>
           <a:p>
             <a:r>
-              <a:t>轉場：正常聚會在此結束；下一頁是供導師查閱的資料。</a:t>
-            </a:r>
-          </a:p>
-          <a:p>
-            <a:r>
-              <a:t>時間提示：現場共 60 分鐘；逐頁計畫共 54 分鐘，預留 6 分鐘彈性。</a:t>
+              <a:t>轉去下一頁：正常聚會在此結束；下一頁係供導師查閱嘅資料。</a:t>
+            </a:r>
+          </a:p>
+          <a:p>
+            <a:r>
+              <a:t>時間提示：現場共 60 分鐘；每頁安排共 54 分鐘，留返 6 分鐘彈性。</a:t>
             </a:r>
           </a:p>
         </p:txBody>
@@ -2822,59 +2822,59 @@
           <a:lstStyle/>
           <a:p>
             <a:r>
-              <a:t>導師參考與內容說明</a:t>
-            </a:r>
-          </a:p>
-          <a:p>
-            <a:r>
-              <a:t>附錄｜不需投影</a:t>
-            </a:r>
-          </a:p>
-          <a:p>
-            <a:r>
-              <a:t>本頁建議：0.1 分鐘</a:t>
-            </a:r>
-          </a:p>
-          <a:p>
-            <a:r>
-              <a:t>本頁目的：保存歷史來源、經文出處及本次聚會的立場界線。</a:t>
+              <a:t>導師備查及內容簡介</a:t>
+            </a:r>
+          </a:p>
+          <a:p>
+            <a:r>
+              <a:t>附錄｜唔需投影</a:t>
+            </a:r>
+          </a:p>
+          <a:p>
+            <a:r>
+              <a:t>呢頁建議：0.1 分鐘</a:t>
+            </a:r>
+          </a:p>
+          <a:p>
+            <a:r>
+              <a:t>呢頁重點：儲存歷史來源、經文出處及本次聚會嘅立場界線。</a:t>
             </a:r>
           </a:p>
           <a:p/>
           <a:p>
             <a:r>
-              <a:t>導師講述：</a:t>
-            </a:r>
-          </a:p>
-          <a:p>
-            <a:r>
-              <a:t>1. 本頁是導師附錄，不需要在正常聚會逐項講解。</a:t>
-            </a:r>
-          </a:p>
-          <a:p>
-            <a:r>
-              <a:t>2. 歷史概述參考 HISTORY 的 History of Halloween；民俗的確切關係仍有學術討論，不宣稱單一起源。</a:t>
-            </a:r>
-          </a:p>
-          <a:p>
-            <a:r>
-              <a:t>3. 經文採用使用者提供的和合本用語；三句帶走提醒頁標示為主題摘要，並非逐字引文。</a:t>
-            </a:r>
-          </a:p>
-          <a:p>
-            <a:r>
-              <a:t>4. 不把所有基督徒、教會或萬聖節參與者一概而論；按實際活動內容、信仰、良心及家庭規範分辨。</a:t>
+              <a:t>導師可以咁講：</a:t>
+            </a:r>
+          </a:p>
+          <a:p>
+            <a:r>
+              <a:t>1. 呢頁係導師附錄，唔使在正常聚會逐項講解。</a:t>
+            </a:r>
+          </a:p>
+          <a:p>
+            <a:r>
+              <a:t>2. 歷史概述參考 歷史資料 嘅 萬聖節歷史簡介；唔同民俗之間嘅具體關係仲有學者討論，唔會宣稱只有單一起源。</a:t>
+            </a:r>
+          </a:p>
+          <a:p>
+            <a:r>
+              <a:t>3. 經文採用使用者提供嘅和合本用語；三句帶走提醒頁標示為主題摘要，唔係逐字引文。</a:t>
+            </a:r>
+          </a:p>
+          <a:p>
+            <a:r>
+              <a:t>4. 唔把所有基督徒、教會或萬聖節參加者一概而論；按實際活動內容、信仰、良心及家庭規範分辨。</a:t>
             </a:r>
           </a:p>
           <a:p/>
           <a:p>
             <a:r>
-              <a:t>轉場：如需查閱來源，可點擊本頁連結。</a:t>
-            </a:r>
-          </a:p>
-          <a:p>
-            <a:r>
-              <a:t>時間提示：現場共 60 分鐘；逐頁計畫共 54 分鐘，預留 6 分鐘彈性。</a:t>
+              <a:t>轉去下一頁：如需查閱來源，可點擊呢頁連結。</a:t>
+            </a:r>
+          </a:p>
+          <a:p>
+            <a:r>
+              <a:t>時間提示：現場共 60 分鐘；每頁安排共 54 分鐘，留返 6 分鐘彈性。</a:t>
             </a:r>
           </a:p>
           <a:p/>
@@ -2960,23 +2960,23 @@
           </a:p>
           <a:p>
             <a:r>
-              <a:t>本頁建議：1 分鐘</a:t>
-            </a:r>
-          </a:p>
-          <a:p>
-            <a:r>
-              <a:t>本頁目的：講清楚分隊、作答和計分，建立安全、輕鬆的參與方式。</a:t>
+              <a:t>呢頁建議：1 分鐘</a:t>
+            </a:r>
+          </a:p>
+          <a:p>
+            <a:r>
+              <a:t>呢頁重點：講清楚分隊、作答和計分，建立安心又輕鬆嘅參加方式。</a:t>
             </a:r>
           </a:p>
           <a:p/>
           <a:p>
             <a:r>
-              <a:t>導師講述：</a:t>
-            </a:r>
-          </a:p>
-          <a:p>
-            <a:r>
-              <a:t>1. 分成「光明隊」與「晨光隊」，兩個隊名都正面，不把任何一組叫黑暗隊。</a:t>
+              <a:t>導師可以咁講：</a:t>
+            </a:r>
+          </a:p>
+          <a:p>
+            <a:r>
+              <a:t>1. 分成「光明隊」同「晨光隊」，兩個隊名都正面，唔把任何一組叫黑暗隊。</a:t>
             </a:r>
           </a:p>
           <a:p>
@@ -2986,18 +2986,18 @@
           </a:p>
           <a:p>
             <a:r>
-              <a:t>3. 答對得 1 分；先鎖定答案才翻下一頁揭曉。不嘲笑答錯的人。</a:t>
+              <a:t>3. 答對得 1 分；先鎖定答案才翻下一頁揭曉。唔嘲笑答錯嘅人。</a:t>
             </a:r>
           </a:p>
           <a:p/>
           <a:p>
             <a:r>
-              <a:t>轉場：第一題：討糖果最初就是為了拿巧克力嗎？</a:t>
-            </a:r>
-          </a:p>
-          <a:p>
-            <a:r>
-              <a:t>時間提示：現場共 60 分鐘；逐頁計畫共 54 分鐘，預留 6 分鐘彈性。</a:t>
+              <a:t>轉去下一頁：第一題：討糖果最初係咪為咗攞朱古力？</a:t>
+            </a:r>
+          </a:p>
+          <a:p>
+            <a:r>
+              <a:t>時間提示：現場共 60 分鐘；每頁安排共 54 分鐘，留返 6 分鐘彈性。</a:t>
             </a:r>
           </a:p>
         </p:txBody>
@@ -3067,7 +3067,7 @@
           <a:lstStyle/>
           <a:p>
             <a:r>
-              <a:t>討糖果，一開始就是為了拿巧克力？</a:t>
+              <a:t>討糖果，一開始就係為咗攞朱古力？</a:t>
             </a:r>
           </a:p>
           <a:p>
@@ -3077,23 +3077,23 @@
           </a:p>
           <a:p>
             <a:r>
-              <a:t>本頁建議：0.75 分鐘</a:t>
-            </a:r>
-          </a:p>
-          <a:p>
-            <a:r>
-              <a:t>本頁目的：讓兩隊先作答，再揭曉，避免答案提前出現。</a:t>
+              <a:t>呢頁建議：0.75 分鐘</a:t>
+            </a:r>
+          </a:p>
+          <a:p>
+            <a:r>
+              <a:t>呢頁重點：等兩隊先作答，再揭曉，避免答案提前出現。</a:t>
             </a:r>
           </a:p>
           <a:p/>
           <a:p>
             <a:r>
-              <a:t>導師講述：</a:t>
-            </a:r>
-          </a:p>
-          <a:p>
-            <a:r>
-              <a:t>1. 只讀題目，不透露答案頁的內容。</a:t>
+              <a:t>導師可以咁講：</a:t>
+            </a:r>
+          </a:p>
+          <a:p>
+            <a:r>
+              <a:t>1. 只讀題目，唔透露答案頁嘅內容。</a:t>
             </a:r>
           </a:p>
           <a:p>
@@ -3109,12 +3109,12 @@
           <a:p/>
           <a:p>
             <a:r>
-              <a:t>轉場：看看今天的糖果習俗，有哪些歷史前身。</a:t>
-            </a:r>
-          </a:p>
-          <a:p>
-            <a:r>
-              <a:t>時間提示：現場共 60 分鐘；逐頁計畫共 54 分鐘，預留 6 分鐘彈性。</a:t>
+              <a:t>轉去下一頁：睇下今日嘅糖果習俗，有哪些歷史前身。</a:t>
+            </a:r>
+          </a:p>
+          <a:p>
+            <a:r>
+              <a:t>時間提示：現場共 60 分鐘；每頁安排共 54 分鐘，留返 6 分鐘彈性。</a:t>
             </a:r>
           </a:p>
         </p:txBody>
@@ -3184,7 +3184,7 @@
           <a:lstStyle/>
           <a:p>
             <a:r>
-              <a:t>假：糖果不是唯一的起點</a:t>
+              <a:t>假：糖果唔係唯一嘅起點</a:t>
             </a:r>
           </a:p>
           <a:p>
@@ -3194,44 +3194,44 @@
           </a:p>
           <a:p>
             <a:r>
-              <a:t>本頁建議：1.5 分鐘</a:t>
-            </a:r>
-          </a:p>
-          <a:p>
-            <a:r>
-              <a:t>本頁目的：用較審慎的說法交代 souling、guising 與現代討糖果的關係。</a:t>
+              <a:t>呢頁建議：1.5 分鐘</a:t>
+            </a:r>
+          </a:p>
+          <a:p>
+            <a:r>
+              <a:t>呢頁重點：用審慎嘅講法交代祈禱換取靈魂餅、化裝表演同現代討糖果習俗之間嘅關係。</a:t>
             </a:r>
           </a:p>
           <a:p/>
           <a:p>
             <a:r>
-              <a:t>導師講述：</a:t>
-            </a:r>
-          </a:p>
-          <a:p>
-            <a:r>
-              <a:t>1. 宣布答案：假。討糖果並非最初為了拿巧克力。</a:t>
-            </a:r>
-          </a:p>
-          <a:p>
-            <a:r>
-              <a:t>2. 相關前身包括 souling：以為亡者祈禱換取食物或「靈魂餅」；以及 guising：裝扮後表演換取食物或小禮物。</a:t>
-            </a:r>
-          </a:p>
-          <a:p>
-            <a:r>
-              <a:t>3. 習俗經不同地區和年代演變，不能把現代討糖果簡化為一條確定的「古凱爾特驅鬼」直線。</a:t>
+              <a:t>導師可以咁講：</a:t>
+            </a:r>
+          </a:p>
+          <a:p>
+            <a:r>
+              <a:t>1. 宣佈答案：假。討糖果唔係最初為咗攞朱古力。</a:t>
+            </a:r>
+          </a:p>
+          <a:p>
+            <a:r>
+              <a:t>2. 相關前身之一係為亡者祈禱，換取食物或「靈魂餅」；另一種做法係化裝上門表演，換取食物或小禮物。</a:t>
+            </a:r>
+          </a:p>
+          <a:p>
+            <a:r>
+              <a:t>3. 習俗經唔同地區和年代演變，唔可以把現代討糖果簡化為一條確定嘅「古凱爾特驅鬼」直線。</a:t>
             </a:r>
           </a:p>
           <a:p/>
           <a:p>
             <a:r>
-              <a:t>轉場：接下來看南瓜燈：主角一直都是南瓜嗎？</a:t>
-            </a:r>
-          </a:p>
-          <a:p>
-            <a:r>
-              <a:t>時間提示：現場共 60 分鐘；逐頁計畫共 54 分鐘，預留 6 分鐘彈性。</a:t>
+              <a:t>轉去下一頁：跟住看南瓜燈：主角一直都係南瓜嗎？</a:t>
+            </a:r>
+          </a:p>
+          <a:p>
+            <a:r>
+              <a:t>時間提示：現場共 60 分鐘；每頁安排共 54 分鐘，留返 6 分鐘彈性。</a:t>
             </a:r>
           </a:p>
           <a:p/>
@@ -3307,7 +3307,7 @@
           <a:lstStyle/>
           <a:p>
             <a:r>
-              <a:t>南瓜燈，最早就是用南瓜做的？</a:t>
+              <a:t>南瓜燈，最早係用南瓜做嘅？</a:t>
             </a:r>
           </a:p>
           <a:p>
@@ -3317,23 +3317,23 @@
           </a:p>
           <a:p>
             <a:r>
-              <a:t>本頁建議：0.75 分鐘</a:t>
-            </a:r>
-          </a:p>
-          <a:p>
-            <a:r>
-              <a:t>本頁目的：以熟悉的節日符號引起好奇。</a:t>
+              <a:t>呢頁建議：0.75 分鐘</a:t>
+            </a:r>
+          </a:p>
+          <a:p>
+            <a:r>
+              <a:t>呢頁重點：以熟悉嘅節日符號引起好奇。</a:t>
             </a:r>
           </a:p>
           <a:p/>
           <a:p>
             <a:r>
-              <a:t>導師講述：</a:t>
-            </a:r>
-          </a:p>
-          <a:p>
-            <a:r>
-              <a:t>1. 讀題：「Jack-o'-lantern 最早就是用南瓜做的？」</a:t>
+              <a:t>導師可以咁講：</a:t>
+            </a:r>
+          </a:p>
+          <a:p>
+            <a:r>
+              <a:t>1. 讀題：「傑克燈 最早就係用南瓜做嘅？」</a:t>
             </a:r>
           </a:p>
           <a:p>
@@ -3343,18 +3343,18 @@
           </a:p>
           <a:p>
             <a:r>
-              <a:t>3. 鎖定答案後才翻頁；可以先請一位隊員說說理由。</a:t>
+              <a:t>3. 鎖定答案後才翻頁；可以先請一位隊員講講理由。</a:t>
             </a:r>
           </a:p>
           <a:p/>
           <a:p>
             <a:r>
-              <a:t>轉場：答案藏在愛爾蘭的蔬菜裡。</a:t>
-            </a:r>
-          </a:p>
-          <a:p>
-            <a:r>
-              <a:t>時間提示：現場共 60 分鐘；逐頁計畫共 54 分鐘，預留 6 分鐘彈性。</a:t>
+              <a:t>轉去下一頁：答案藏在愛爾蘭嘅蔬菜裡。</a:t>
+            </a:r>
+          </a:p>
+          <a:p>
+            <a:r>
+              <a:t>時間提示：現場共 60 分鐘；每頁安排共 54 分鐘，留返 6 分鐘彈性。</a:t>
             </a:r>
           </a:p>
         </p:txBody>
@@ -3434,23 +3434,23 @@
           </a:p>
           <a:p>
             <a:r>
-              <a:t>本頁建議：1.5 分鐘</a:t>
-            </a:r>
-          </a:p>
-          <a:p>
-            <a:r>
-              <a:t>本頁目的：讓青少年看見民俗隨地區和材料而改變。</a:t>
+              <a:t>呢頁建議：1.5 分鐘</a:t>
+            </a:r>
+          </a:p>
+          <a:p>
+            <a:r>
+              <a:t>呢頁重點：等青少年看見民俗隨地區和材料而改變。</a:t>
             </a:r>
           </a:p>
           <a:p/>
           <a:p>
             <a:r>
-              <a:t>導師講述：</a:t>
-            </a:r>
-          </a:p>
-          <a:p>
-            <a:r>
-              <a:t>1. 宣布答案：假。愛爾蘭等地早期常用蕪菁或其他根莖蔬菜雕刻燈籠。</a:t>
+              <a:t>導師可以咁講：</a:t>
+            </a:r>
+          </a:p>
+          <a:p>
+            <a:r>
+              <a:t>1. 宣佈答案：假。愛爾蘭等地早期常用蕪菁或其他根莖蔬菜雕刻燈籠。</a:t>
             </a:r>
           </a:p>
           <a:p>
@@ -3460,18 +3460,18 @@
           </a:p>
           <a:p>
             <a:r>
-              <a:t>3. 符號和材料會變；今天我們也可以主動選擇傳遞希望的創意，而不是用恐怖嚇人。</a:t>
+              <a:t>3. 符號和材料會變；今日我哋都可以主動選擇傳遞希望嘅創意，而唔係用恐怖嚇人。</a:t>
             </a:r>
           </a:p>
           <a:p/>
           <a:p>
             <a:r>
-              <a:t>轉場：最後一題，回到節日更早的背景。</a:t>
-            </a:r>
-          </a:p>
-          <a:p>
-            <a:r>
-              <a:t>時間提示：現場共 60 分鐘；逐頁計畫共 54 分鐘，預留 6 分鐘彈性。</a:t>
+              <a:t>轉去下一頁：最後一題，回到節日更早嘅背景。</a:t>
+            </a:r>
+          </a:p>
+          <a:p>
+            <a:r>
+              <a:t>時間提示：現場共 60 分鐘；每頁安排共 54 分鐘，留返 6 分鐘彈性。</a:t>
             </a:r>
           </a:p>
           <a:p/>
@@ -3547,7 +3547,7 @@
           <a:lstStyle/>
           <a:p>
             <a:r>
-              <a:t>萬聖節的歷史背景，包括薩溫節？</a:t>
+              <a:t>萬聖節嘅歷史背景，包括薩溫節？</a:t>
             </a:r>
           </a:p>
           <a:p>
@@ -3557,44 +3557,44 @@
           </a:p>
           <a:p>
             <a:r>
-              <a:t>本頁建議：0.75 分鐘</a:t>
-            </a:r>
-          </a:p>
-          <a:p>
-            <a:r>
-              <a:t>本頁目的：把遊戲自然連接到歷史講解，避免混淆薩溫節與冬至。</a:t>
+              <a:t>呢頁建議：0.75 分鐘</a:t>
+            </a:r>
+          </a:p>
+          <a:p>
+            <a:r>
+              <a:t>呢頁重點：把遊戲自然連線到歷史講解，避免混淆薩溫節同冬至。</a:t>
             </a:r>
           </a:p>
           <a:p/>
           <a:p>
             <a:r>
-              <a:t>導師講述：</a:t>
-            </a:r>
-          </a:p>
-          <a:p>
-            <a:r>
-              <a:t>1. 讀題：「萬聖節的歷史背景，包括古凱爾特人的薩溫節？」</a:t>
-            </a:r>
-          </a:p>
-          <a:p>
-            <a:r>
-              <a:t>2. 口數 5 秒；不把問題改成「只有單一起源」，以免造成誤導。</a:t>
-            </a:r>
-          </a:p>
-          <a:p>
-            <a:r>
-              <a:t>3. 先鎖定答案，再揭曉；順便宣布兩隊分數。</a:t>
+              <a:t>導師可以咁講：</a:t>
+            </a:r>
+          </a:p>
+          <a:p>
+            <a:r>
+              <a:t>1. 讀題：「萬聖節嘅歷史背景，包括古凱爾特人嘅薩溫節？」</a:t>
+            </a:r>
+          </a:p>
+          <a:p>
+            <a:r>
+              <a:t>2. 口數 5 秒；唔把問題改成「只有單一起源」，以免造成誤導。</a:t>
+            </a:r>
+          </a:p>
+          <a:p>
+            <a:r>
+              <a:t>3. 先鎖定答案，再揭曉；順便宣佈兩隊分數。</a:t>
             </a:r>
           </a:p>
           <a:p/>
           <a:p>
             <a:r>
-              <a:t>轉場：正確答案，也提醒我們一個常見的日期誤會。</a:t>
-            </a:r>
-          </a:p>
-          <a:p>
-            <a:r>
-              <a:t>時間提示：現場共 60 分鐘；逐頁計畫共 54 分鐘，預留 6 分鐘彈性。</a:t>
+              <a:t>轉去下一頁：正確答案，都提醒我哋一個常見嘅日期誤會。</a:t>
+            </a:r>
+          </a:p>
+          <a:p>
+            <a:r>
+              <a:t>時間提示：現場共 60 分鐘；每頁安排共 54 分鐘，留返 6 分鐘彈性。</a:t>
             </a:r>
           </a:p>
         </p:txBody>
@@ -3664,7 +3664,7 @@
           <a:lstStyle/>
           <a:p>
             <a:r>
-              <a:t>真：薩溫節是重要背景之一</a:t>
+              <a:t>真：薩溫節係重要背景之一</a:t>
             </a:r>
           </a:p>
           <a:p>
@@ -3674,44 +3674,44 @@
           </a:p>
           <a:p>
             <a:r>
-              <a:t>本頁建議：1.75 分鐘</a:t>
-            </a:r>
-          </a:p>
-          <a:p>
-            <a:r>
-              <a:t>本頁目的：修正冬至前夕的誤說，建立多來源歷史框架。</a:t>
+              <a:t>呢頁建議：1.75 分鐘</a:t>
+            </a:r>
+          </a:p>
+          <a:p>
+            <a:r>
+              <a:t>呢頁重點：修正冬至前夕嘅誤講，建立多來源歷史框架。</a:t>
             </a:r>
           </a:p>
           <a:p/>
           <a:p>
             <a:r>
-              <a:t>導師講述：</a:t>
-            </a:r>
-          </a:p>
-          <a:p>
-            <a:r>
-              <a:t>1. 宣布答案：真，薩溫節是萬聖節的重要歷史背景之一。</a:t>
-            </a:r>
-          </a:p>
-          <a:p>
-            <a:r>
-              <a:t>2. 薩溫節與收穫季結束、進入冬季有關，約在 10 月 31 日至 11 月 1 日；不是 12 月的冬至前夕。</a:t>
-            </a:r>
-          </a:p>
-          <a:p>
-            <a:r>
-              <a:t>3. 萬聖節也有基督教節期與後來民俗的影響。古人的亡靈信念是歷史記述，不是今天要證實的事實。</a:t>
+              <a:t>導師可以咁講：</a:t>
+            </a:r>
+          </a:p>
+          <a:p>
+            <a:r>
+              <a:t>1. 宣佈答案：真，薩溫節係萬聖節嘅重要歷史背景之一。</a:t>
+            </a:r>
+          </a:p>
+          <a:p>
+            <a:r>
+              <a:t>2. 薩溫節同收穫季結束、進入冬季有關，大約係 10 月 31 日至 11 月 1 日；唔係 12 月嘅冬至前夕。</a:t>
+            </a:r>
+          </a:p>
+          <a:p>
+            <a:r>
+              <a:t>3. 萬聖節都有基督教節期同後來民俗嘅影響。古人嘅亡靈信念係歷史記述，唔係今日要證實嘅事實。</a:t>
             </a:r>
           </a:p>
           <a:p/>
           <a:p>
             <a:r>
-              <a:t>轉場：知道節日從哪裡來後，我們還要問：今天怎樣選擇？</a:t>
-            </a:r>
-          </a:p>
-          <a:p>
-            <a:r>
-              <a:t>時間提示：現場共 60 分鐘；逐頁計畫共 54 分鐘，預留 6 分鐘彈性。</a:t>
+              <a:t>轉去下一頁：知道節日從哪裡來後，我哋仲要問：今日點樣選擇？</a:t>
+            </a:r>
+          </a:p>
+          <a:p>
+            <a:r>
+              <a:t>時間提示：現場共 60 分鐘；每頁安排共 54 分鐘，留返 6 分鐘彈性。</a:t>
             </a:r>
           </a:p>
           <a:p/>
@@ -6733,7 +6733,7 @@
       <p:grpSpPr/>
       <p:sp>
         <p:nvSpPr>
-          <p:cNvPr id="2" name="Text: LIGHT PARTY  /  青少年團契"/>
+          <p:cNvPr id="2" name="Text: 光明派對  /  青少年團契"/>
           <p:cNvSpPr txBox="1"/>
           <p:nvPr/>
         </p:nvSpPr>
@@ -6765,14 +6765,14 @@
               </a:spcAft>
             </a:pPr>
             <a:r>
-              <a:rPr sz="1100" b="0" lang="zh-TW">
+              <a:rPr sz="1100" b="0" lang="zh-HK">
                 <a:solidFill>
                   <a:srgbClr val="CFC0A9"/>
                 </a:solidFill>
                 <a:latin typeface="Microsoft JhengHei"/>
                 <a:ea typeface="Microsoft JhengHei"/>
               </a:rPr>
-              <a:t>LIGHT PARTY  /  青少年團契</a:t>
+              <a:t>光明派對  /  青少年團契</a:t>
             </a:r>
           </a:p>
         </p:txBody>
@@ -6811,7 +6811,7 @@
               </a:spcAft>
             </a:pPr>
             <a:r>
-              <a:rPr sz="1100" b="0" lang="zh-TW">
+              <a:rPr sz="1100" b="0" lang="zh-HK">
                 <a:solidFill>
                   <a:srgbClr val="CFC0A9"/>
                 </a:solidFill>
@@ -6927,7 +6927,7 @@
               </a:spcAft>
             </a:pPr>
             <a:r>
-              <a:rPr sz="1000" b="0" lang="zh-TW">
+              <a:rPr sz="1000" b="0" lang="zh-HK">
                 <a:solidFill>
                   <a:srgbClr val="CFC0A9"/>
                 </a:solidFill>
@@ -6941,7 +6941,7 @@
       </p:sp>
       <p:sp>
         <p:nvSpPr>
-          <p:cNvPr id="7" name="Text: 一場關於文化、信仰與選擇的聚會"/>
+          <p:cNvPr id="7" name="Text: 一場關於文化、信仰同選擇嘅聚會"/>
           <p:cNvSpPr txBox="1"/>
           <p:nvPr/>
         </p:nvSpPr>
@@ -6973,14 +6973,14 @@
               </a:spcAft>
             </a:pPr>
             <a:r>
-              <a:rPr sz="1800" b="0" lang="zh-TW">
+              <a:rPr sz="1800" b="0" lang="zh-HK">
                 <a:solidFill>
                   <a:srgbClr val="D8B78F"/>
                 </a:solidFill>
                 <a:latin typeface="Microsoft JhengHei"/>
                 <a:ea typeface="Microsoft JhengHei"/>
               </a:rPr>
-              <a:t>一場關於文化、信仰與選擇的聚會</a:t>
+              <a:t>一場關於文化、信仰同選擇嘅聚會</a:t>
             </a:r>
           </a:p>
         </p:txBody>
@@ -7019,7 +7019,7 @@
               </a:spcAft>
             </a:pPr>
             <a:r>
-              <a:rPr sz="6400" b="1" lang="zh-TW">
+              <a:rPr sz="6400" b="1" lang="zh-HK">
                 <a:solidFill>
                   <a:srgbClr val="EEDFC7"/>
                 </a:solidFill>
@@ -7042,7 +7042,7 @@
               </a:spcAft>
             </a:pPr>
             <a:r>
-              <a:rPr sz="6400" b="1" lang="zh-TW">
+              <a:rPr sz="6400" b="1" lang="zh-HK">
                 <a:solidFill>
                   <a:srgbClr val="EEDFC7"/>
                 </a:solidFill>
@@ -7088,7 +7088,7 @@
               </a:spcAft>
             </a:pPr>
             <a:r>
-              <a:rPr sz="2300" b="0" lang="zh-TW">
+              <a:rPr sz="2300" b="0" lang="zh-HK">
                 <a:solidFill>
                   <a:srgbClr val="EEDFC7"/>
                 </a:solidFill>
@@ -7134,7 +7134,7 @@
               </a:spcAft>
             </a:pPr>
             <a:r>
-              <a:rPr sz="1600" b="0" lang="zh-TW">
+              <a:rPr sz="1600" b="0" lang="zh-HK">
                 <a:solidFill>
                   <a:srgbClr val="CFC0A9"/>
                 </a:solidFill>
@@ -7600,7 +7600,7 @@
       </p:cxnSp>
       <p:sp>
         <p:nvSpPr>
-          <p:cNvPr id="23" name="Text: LIGHT&#10;PARTY"/>
+          <p:cNvPr id="23" name="Text: 光明&#10;派對"/>
           <p:cNvSpPr txBox="1"/>
           <p:nvPr/>
         </p:nvSpPr>
@@ -7632,14 +7632,14 @@
               </a:spcAft>
             </a:pPr>
             <a:r>
-              <a:rPr sz="2500" b="0" lang="zh-TW">
+              <a:rPr sz="2500" b="0" lang="zh-HK">
                 <a:solidFill>
                   <a:srgbClr val="EEDFC7"/>
                 </a:solidFill>
                 <a:latin typeface="PMingLiU"/>
                 <a:ea typeface="PMingLiU"/>
               </a:rPr>
-              <a:t>LIGHT</a:t>
+              <a:t>光明</a:t>
             </a:r>
           </a:p>
           <a:p>
@@ -7655,14 +7655,14 @@
               </a:spcAft>
             </a:pPr>
             <a:r>
-              <a:rPr sz="2500" b="0" lang="zh-TW">
+              <a:rPr sz="2500" b="0" lang="zh-HK">
                 <a:solidFill>
                   <a:srgbClr val="EEDFC7"/>
                 </a:solidFill>
                 <a:latin typeface="PMingLiU"/>
                 <a:ea typeface="PMingLiU"/>
               </a:rPr>
-              <a:t>PARTY</a:t>
+              <a:t>派對</a:t>
             </a:r>
           </a:p>
         </p:txBody>
@@ -7695,7 +7695,7 @@
       <p:grpSpPr/>
       <p:sp>
         <p:nvSpPr>
-          <p:cNvPr id="2" name="Text: LIGHT PARTY  /  青少年團契"/>
+          <p:cNvPr id="2" name="Text: 光明派對  /  青少年團契"/>
           <p:cNvSpPr txBox="1"/>
           <p:nvPr/>
         </p:nvSpPr>
@@ -7727,14 +7727,14 @@
               </a:spcAft>
             </a:pPr>
             <a:r>
-              <a:rPr sz="1100" b="0" lang="zh-TW">
+              <a:rPr sz="1100" b="0" lang="zh-HK">
                 <a:solidFill>
                   <a:srgbClr val="6A513D"/>
                 </a:solidFill>
                 <a:latin typeface="Microsoft JhengHei"/>
                 <a:ea typeface="Microsoft JhengHei"/>
               </a:rPr>
-              <a:t>LIGHT PARTY  /  青少年團契</a:t>
+              <a:t>光明派對  /  青少年團契</a:t>
             </a:r>
           </a:p>
         </p:txBody>
@@ -7773,7 +7773,7 @@
               </a:spcAft>
             </a:pPr>
             <a:r>
-              <a:rPr sz="1100" b="0" lang="zh-TW">
+              <a:rPr sz="1100" b="0" lang="zh-HK">
                 <a:solidFill>
                   <a:srgbClr val="6A513D"/>
                 </a:solidFill>
@@ -7889,7 +7889,7 @@
               </a:spcAft>
             </a:pPr>
             <a:r>
-              <a:rPr sz="1000" b="0" lang="zh-TW">
+              <a:rPr sz="1000" b="0" lang="zh-HK">
                 <a:solidFill>
                   <a:srgbClr val="6A513D"/>
                 </a:solidFill>
@@ -7935,7 +7935,7 @@
               </a:spcAft>
             </a:pPr>
             <a:r>
-              <a:rPr sz="1900" b="0" lang="zh-TW">
+              <a:rPr sz="1900" b="0" lang="zh-HK">
                 <a:solidFill>
                   <a:srgbClr val="804212"/>
                 </a:solidFill>
@@ -7949,7 +7949,7 @@
       </p:sp>
       <p:sp>
         <p:nvSpPr>
-          <p:cNvPr id="8" name="Text: 這個活動，&#10;在慶祝甚麼？"/>
+          <p:cNvPr id="8" name="Text: 呢個活動，&#10;喺慶祝乜嘢？"/>
           <p:cNvSpPr txBox="1"/>
           <p:nvPr/>
         </p:nvSpPr>
@@ -7981,14 +7981,14 @@
               </a:spcAft>
             </a:pPr>
             <a:r>
-              <a:rPr sz="5800" b="1" lang="zh-TW">
+              <a:rPr sz="5800" b="1" lang="zh-HK">
                 <a:solidFill>
                   <a:srgbClr val="2A1E13"/>
                 </a:solidFill>
                 <a:latin typeface="PMingLiU"/>
                 <a:ea typeface="PMingLiU"/>
               </a:rPr>
-              <a:t>這個活動，</a:t>
+              <a:t>呢個活動，</a:t>
             </a:r>
           </a:p>
           <a:p>
@@ -8004,21 +8004,21 @@
               </a:spcAft>
             </a:pPr>
             <a:r>
-              <a:rPr sz="5800" b="1" lang="zh-TW">
+              <a:rPr sz="5800" b="1" lang="zh-HK">
                 <a:solidFill>
                   <a:srgbClr val="2A1E13"/>
                 </a:solidFill>
                 <a:latin typeface="PMingLiU"/>
                 <a:ea typeface="PMingLiU"/>
               </a:rPr>
-              <a:t>在慶祝甚麼？</a:t>
-            </a:r>
-          </a:p>
-        </p:txBody>
-      </p:sp>
-      <p:sp>
-        <p:nvSpPr>
-          <p:cNvPr id="9" name="Text: 先了解文化背景，再想清楚自己的選擇。"/>
+              <a:t>喺慶祝乜嘢？</a:t>
+            </a:r>
+          </a:p>
+        </p:txBody>
+      </p:sp>
+      <p:sp>
+        <p:nvSpPr>
+          <p:cNvPr id="9" name="Text: 先認識文化背景，再想清楚自己嘅選擇。"/>
           <p:cNvSpPr txBox="1"/>
           <p:nvPr/>
         </p:nvSpPr>
@@ -8050,14 +8050,14 @@
               </a:spcAft>
             </a:pPr>
             <a:r>
-              <a:rPr sz="2500" b="0" lang="zh-TW">
+              <a:rPr sz="2500" b="0" lang="zh-HK">
                 <a:solidFill>
                   <a:srgbClr val="6A513D"/>
                 </a:solidFill>
                 <a:latin typeface="Microsoft JhengHei"/>
                 <a:ea typeface="Microsoft JhengHei"/>
               </a:rPr>
-              <a:t>先了解文化背景，再想清楚自己的選擇。</a:t>
+              <a:t>先認識文化背景，再想清楚自己嘅選擇。</a:t>
             </a:r>
           </a:p>
         </p:txBody>
@@ -8090,7 +8090,7 @@
       <p:grpSpPr/>
       <p:sp>
         <p:nvSpPr>
-          <p:cNvPr id="2" name="Text: LIGHT PARTY  /  青少年團契"/>
+          <p:cNvPr id="2" name="Text: 光明派對  /  青少年團契"/>
           <p:cNvSpPr txBox="1"/>
           <p:nvPr/>
         </p:nvSpPr>
@@ -8122,14 +8122,14 @@
               </a:spcAft>
             </a:pPr>
             <a:r>
-              <a:rPr sz="1100" b="0" lang="zh-TW">
+              <a:rPr sz="1100" b="0" lang="zh-HK">
                 <a:solidFill>
                   <a:srgbClr val="6A513D"/>
                 </a:solidFill>
                 <a:latin typeface="Microsoft JhengHei"/>
                 <a:ea typeface="Microsoft JhengHei"/>
               </a:rPr>
-              <a:t>LIGHT PARTY  /  青少年團契</a:t>
+              <a:t>光明派對  /  青少年團契</a:t>
             </a:r>
           </a:p>
         </p:txBody>
@@ -8168,7 +8168,7 @@
               </a:spcAft>
             </a:pPr>
             <a:r>
-              <a:rPr sz="1100" b="0" lang="zh-TW">
+              <a:rPr sz="1100" b="0" lang="zh-HK">
                 <a:solidFill>
                   <a:srgbClr val="6A513D"/>
                 </a:solidFill>
@@ -8284,7 +8284,7 @@
               </a:spcAft>
             </a:pPr>
             <a:r>
-              <a:rPr sz="1000" b="0" lang="zh-TW">
+              <a:rPr sz="1000" b="0" lang="zh-HK">
                 <a:solidFill>
                   <a:srgbClr val="6A513D"/>
                 </a:solidFill>
@@ -8298,7 +8298,7 @@
       </p:sp>
       <p:sp>
         <p:nvSpPr>
-          <p:cNvPr id="7" name="Text: 節日會演變，不能只用一個起點解釋"/>
+          <p:cNvPr id="7" name="Text: 節日會演變，唔可以只用一個起點解釋"/>
           <p:cNvSpPr txBox="1"/>
           <p:nvPr/>
         </p:nvSpPr>
@@ -8330,14 +8330,14 @@
               </a:spcAft>
             </a:pPr>
             <a:r>
-              <a:rPr sz="1500" b="1" lang="zh-TW">
+              <a:rPr sz="1500" b="1" lang="zh-HK">
                 <a:solidFill>
                   <a:srgbClr val="804212"/>
                 </a:solidFill>
                 <a:latin typeface="Microsoft JhengHei"/>
                 <a:ea typeface="Microsoft JhengHei"/>
               </a:rPr>
-              <a:t>節日會演變，不能只用一個起點解釋</a:t>
+              <a:t>節日會演變，唔可以只用一個起點解釋</a:t>
             </a:r>
           </a:p>
         </p:txBody>
@@ -8376,7 +8376,7 @@
               </a:spcAft>
             </a:pPr>
             <a:r>
-              <a:rPr sz="3600" b="1" lang="zh-TW">
+              <a:rPr sz="3600" b="1" lang="zh-HK">
                 <a:solidFill>
                   <a:srgbClr val="2A1E13"/>
                 </a:solidFill>
@@ -8457,7 +8457,7 @@
               </a:spcAft>
             </a:pPr>
             <a:r>
-              <a:rPr sz="1500" b="1" lang="zh-TW">
+              <a:rPr sz="1500" b="1" lang="zh-HK">
                 <a:solidFill>
                   <a:srgbClr val="804212"/>
                 </a:solidFill>
@@ -8471,7 +8471,7 @@
       </p:sp>
       <p:sp>
         <p:nvSpPr>
-          <p:cNvPr id="11" name="Text: 薩溫節 Samhain"/>
+          <p:cNvPr id="11" name="Text: 薩溫節 薩溫節"/>
           <p:cNvSpPr txBox="1"/>
           <p:nvPr/>
         </p:nvSpPr>
@@ -8503,21 +8503,21 @@
               </a:spcAft>
             </a:pPr>
             <a:r>
-              <a:rPr sz="2200" b="1" lang="zh-TW">
+              <a:rPr sz="2200" b="1" lang="zh-HK">
                 <a:solidFill>
                   <a:srgbClr val="2A1E13"/>
                 </a:solidFill>
                 <a:latin typeface="PMingLiU"/>
                 <a:ea typeface="PMingLiU"/>
               </a:rPr>
-              <a:t>薩溫節 Samhain</a:t>
-            </a:r>
-          </a:p>
-        </p:txBody>
-      </p:sp>
-      <p:sp>
-        <p:nvSpPr>
-          <p:cNvPr id="12" name="Text: 收穫季結束、冬季開始。&#10;古人以篝火和民俗回應&#10;當時對亡靈的信念。"/>
+              <a:t>薩溫節 薩溫節</a:t>
+            </a:r>
+          </a:p>
+        </p:txBody>
+      </p:sp>
+      <p:sp>
+        <p:nvSpPr>
+          <p:cNvPr id="12" name="Text: 收穫季結束、冬季開始。&#10;古人以篝火和民俗回應&#10;當時對亡靈嘅信念。"/>
           <p:cNvSpPr txBox="1"/>
           <p:nvPr/>
         </p:nvSpPr>
@@ -8549,7 +8549,7 @@
               </a:spcAft>
             </a:pPr>
             <a:r>
-              <a:rPr sz="1800" b="0" lang="zh-TW">
+              <a:rPr sz="1800" b="0" lang="zh-HK">
                 <a:solidFill>
                   <a:srgbClr val="6A513D"/>
                 </a:solidFill>
@@ -8572,7 +8572,7 @@
               </a:spcAft>
             </a:pPr>
             <a:r>
-              <a:rPr sz="1800" b="0" lang="zh-TW">
+              <a:rPr sz="1800" b="0" lang="zh-HK">
                 <a:solidFill>
                   <a:srgbClr val="6A513D"/>
                 </a:solidFill>
@@ -8595,14 +8595,14 @@
               </a:spcAft>
             </a:pPr>
             <a:r>
-              <a:rPr sz="1800" b="0" lang="zh-TW">
+              <a:rPr sz="1800" b="0" lang="zh-HK">
                 <a:solidFill>
                   <a:srgbClr val="6A513D"/>
                 </a:solidFill>
                 <a:latin typeface="Microsoft JhengHei"/>
                 <a:ea typeface="Microsoft JhengHei"/>
               </a:rPr>
-              <a:t>當時對亡靈的信念。</a:t>
+              <a:t>當時對亡靈嘅信念。</a:t>
             </a:r>
           </a:p>
         </p:txBody>
@@ -8676,7 +8676,7 @@
               </a:spcAft>
             </a:pPr>
             <a:r>
-              <a:rPr sz="1500" b="1" lang="zh-TW">
+              <a:rPr sz="1500" b="1" lang="zh-HK">
                 <a:solidFill>
                   <a:srgbClr val="804212"/>
                 </a:solidFill>
@@ -8722,7 +8722,7 @@
               </a:spcAft>
             </a:pPr>
             <a:r>
-              <a:rPr sz="2200" b="1" lang="zh-TW">
+              <a:rPr sz="2200" b="1" lang="zh-HK">
                 <a:solidFill>
                   <a:srgbClr val="2A1E13"/>
                 </a:solidFill>
@@ -8736,7 +8736,7 @@
       </p:sp>
       <p:sp>
         <p:nvSpPr>
-          <p:cNvPr id="16" name="Text: 11 月 1 日為諸聖節。&#10;前一晚 All Hallows' E"/>
+          <p:cNvPr id="16" name="Text: 11 月 1 日為諸聖節。&#10;前一晚 諸聖節前夕，&#10;後來成為 萬聖"/>
           <p:cNvSpPr txBox="1"/>
           <p:nvPr/>
         </p:nvSpPr>
@@ -8768,7 +8768,7 @@
               </a:spcAft>
             </a:pPr>
             <a:r>
-              <a:rPr sz="1800" b="0" lang="zh-TW">
+              <a:rPr sz="1800" b="0" lang="zh-HK">
                 <a:solidFill>
                   <a:srgbClr val="6A513D"/>
                 </a:solidFill>
@@ -8791,14 +8791,14 @@
               </a:spcAft>
             </a:pPr>
             <a:r>
-              <a:rPr sz="1800" b="0" lang="zh-TW">
+              <a:rPr sz="1800" b="0" lang="zh-HK">
                 <a:solidFill>
                   <a:srgbClr val="6A513D"/>
                 </a:solidFill>
                 <a:latin typeface="Microsoft JhengHei"/>
                 <a:ea typeface="Microsoft JhengHei"/>
               </a:rPr>
-              <a:t>前一晚 All Hallows' Eve，</a:t>
+              <a:t>前一晚 諸聖節前夕，</a:t>
             </a:r>
           </a:p>
           <a:p>
@@ -8814,14 +8814,14 @@
               </a:spcAft>
             </a:pPr>
             <a:r>
-              <a:rPr sz="1800" b="0" lang="zh-TW">
+              <a:rPr sz="1800" b="0" lang="zh-HK">
                 <a:solidFill>
                   <a:srgbClr val="6A513D"/>
                 </a:solidFill>
                 <a:latin typeface="Microsoft JhengHei"/>
                 <a:ea typeface="Microsoft JhengHei"/>
               </a:rPr>
-              <a:t>後來成為 Halloween。</a:t>
+              <a:t>後來成為 萬聖節。</a:t>
             </a:r>
           </a:p>
         </p:txBody>
@@ -8895,7 +8895,7 @@
               </a:spcAft>
             </a:pPr>
             <a:r>
-              <a:rPr sz="1500" b="1" lang="zh-TW">
+              <a:rPr sz="1500" b="1" lang="zh-HK">
                 <a:solidFill>
                   <a:srgbClr val="804212"/>
                 </a:solidFill>
@@ -8941,7 +8941,7 @@
               </a:spcAft>
             </a:pPr>
             <a:r>
-              <a:rPr sz="2200" b="1" lang="zh-TW">
+              <a:rPr sz="2200" b="1" lang="zh-HK">
                 <a:solidFill>
                   <a:srgbClr val="2A1E13"/>
                 </a:solidFill>
@@ -8955,7 +8955,7 @@
       </p:sp>
       <p:sp>
         <p:nvSpPr>
-          <p:cNvPr id="20" name="Text: 民俗、移民與商業文化&#10;逐步交織，形成今天的&#10;各種節慶活動。"/>
+          <p:cNvPr id="20" name="Text: 民俗、移民同商業文化&#10;慢慢交織，形成今日嘅&#10;各種節慶活動。"/>
           <p:cNvSpPr txBox="1"/>
           <p:nvPr/>
         </p:nvSpPr>
@@ -8987,14 +8987,14 @@
               </a:spcAft>
             </a:pPr>
             <a:r>
-              <a:rPr sz="1800" b="0" lang="zh-TW">
+              <a:rPr sz="1800" b="0" lang="zh-HK">
                 <a:solidFill>
                   <a:srgbClr val="6A513D"/>
                 </a:solidFill>
                 <a:latin typeface="Microsoft JhengHei"/>
                 <a:ea typeface="Microsoft JhengHei"/>
               </a:rPr>
-              <a:t>民俗、移民與商業文化</a:t>
+              <a:t>民俗、移民同商業文化</a:t>
             </a:r>
           </a:p>
           <a:p>
@@ -9010,14 +9010,14 @@
               </a:spcAft>
             </a:pPr>
             <a:r>
-              <a:rPr sz="1800" b="0" lang="zh-TW">
+              <a:rPr sz="1800" b="0" lang="zh-HK">
                 <a:solidFill>
                   <a:srgbClr val="6A513D"/>
                 </a:solidFill>
                 <a:latin typeface="Microsoft JhengHei"/>
                 <a:ea typeface="Microsoft JhengHei"/>
               </a:rPr>
-              <a:t>逐步交織，形成今天的</a:t>
+              <a:t>慢慢交織，形成今日嘅</a:t>
             </a:r>
           </a:p>
           <a:p>
@@ -9033,7 +9033,7 @@
               </a:spcAft>
             </a:pPr>
             <a:r>
-              <a:rPr sz="1800" b="0" lang="zh-TW">
+              <a:rPr sz="1800" b="0" lang="zh-HK">
                 <a:solidFill>
                   <a:srgbClr val="6A513D"/>
                 </a:solidFill>
@@ -9047,7 +9047,7 @@
       </p:sp>
       <p:sp>
         <p:nvSpPr>
-          <p:cNvPr id="21" name="Text: 歷史記述 ≠ 證實鬼魂存在｜參考：HISTORY，History"/>
+          <p:cNvPr id="21" name="Text: 歷史記述 ≠ 證實鬼魂存在｜參考：歷史資料，萬聖節歷史簡介"/>
           <p:cNvSpPr txBox="1"/>
           <p:nvPr/>
         </p:nvSpPr>
@@ -9079,7 +9079,7 @@
               </a:spcAft>
             </a:pPr>
             <a:r>
-              <a:rPr sz="1200" b="0" lang="zh-TW">
+              <a:rPr sz="1200" b="0" lang="zh-HK">
                 <a:solidFill>
                   <a:srgbClr val="6A513D"/>
                 </a:solidFill>
@@ -9087,7 +9087,7 @@
                 <a:ea typeface="Microsoft JhengHei"/>
                 <a:hlinkClick r:id="rId2"/>
               </a:rPr>
-              <a:t>歷史記述 ≠ 證實鬼魂存在｜參考：HISTORY，History of Halloween</a:t>
+              <a:t>歷史記述 ≠ 證實鬼魂存在｜參考：歷史資料，萬聖節歷史簡介</a:t>
             </a:r>
           </a:p>
         </p:txBody>
@@ -9120,7 +9120,7 @@
       <p:grpSpPr/>
       <p:sp>
         <p:nvSpPr>
-          <p:cNvPr id="2" name="Text: LIGHT PARTY  /  青少年團契"/>
+          <p:cNvPr id="2" name="Text: 光明派對  /  青少年團契"/>
           <p:cNvSpPr txBox="1"/>
           <p:nvPr/>
         </p:nvSpPr>
@@ -9152,14 +9152,14 @@
               </a:spcAft>
             </a:pPr>
             <a:r>
-              <a:rPr sz="1100" b="0" lang="zh-TW">
+              <a:rPr sz="1100" b="0" lang="zh-HK">
                 <a:solidFill>
                   <a:srgbClr val="CFC0A9"/>
                 </a:solidFill>
                 <a:latin typeface="Microsoft JhengHei"/>
                 <a:ea typeface="Microsoft JhengHei"/>
               </a:rPr>
-              <a:t>LIGHT PARTY  /  青少年團契</a:t>
+              <a:t>光明派對  /  青少年團契</a:t>
             </a:r>
           </a:p>
         </p:txBody>
@@ -9198,7 +9198,7 @@
               </a:spcAft>
             </a:pPr>
             <a:r>
-              <a:rPr sz="1100" b="0" lang="zh-TW">
+              <a:rPr sz="1100" b="0" lang="zh-HK">
                 <a:solidFill>
                   <a:srgbClr val="CFC0A9"/>
                 </a:solidFill>
@@ -9314,7 +9314,7 @@
               </a:spcAft>
             </a:pPr>
             <a:r>
-              <a:rPr sz="1000" b="0" lang="zh-TW">
+              <a:rPr sz="1000" b="0" lang="zh-HK">
                 <a:solidFill>
                   <a:srgbClr val="CFC0A9"/>
                 </a:solidFill>
@@ -9328,7 +9328,7 @@
       </p:sp>
       <p:sp>
         <p:nvSpPr>
-          <p:cNvPr id="7" name="Text: 分辨活動，不標籤人"/>
+          <p:cNvPr id="7" name="Text: 分辨活動，唔標籤人"/>
           <p:cNvSpPr txBox="1"/>
           <p:nvPr/>
         </p:nvSpPr>
@@ -9360,14 +9360,14 @@
               </a:spcAft>
             </a:pPr>
             <a:r>
-              <a:rPr sz="1500" b="1" lang="zh-TW">
+              <a:rPr sz="1500" b="1" lang="zh-HK">
                 <a:solidFill>
                   <a:srgbClr val="D8B78F"/>
                 </a:solidFill>
                 <a:latin typeface="Microsoft JhengHei"/>
                 <a:ea typeface="Microsoft JhengHei"/>
               </a:rPr>
-              <a:t>分辨活動，不標籤人</a:t>
+              <a:t>分辨活動，唔標籤人</a:t>
             </a:r>
           </a:p>
         </p:txBody>
@@ -9406,7 +9406,7 @@
               </a:spcAft>
             </a:pPr>
             <a:r>
-              <a:rPr sz="3600" b="1" lang="zh-TW">
+              <a:rPr sz="3600" b="1" lang="zh-HK">
                 <a:solidFill>
                   <a:srgbClr val="EEDFC7"/>
                 </a:solidFill>
@@ -9487,7 +9487,7 @@
               </a:spcAft>
             </a:pPr>
             <a:r>
-              <a:rPr sz="1500" b="1" lang="zh-TW">
+              <a:rPr sz="1500" b="1" lang="zh-HK">
                 <a:solidFill>
                   <a:srgbClr val="D8B78F"/>
                 </a:solidFill>
@@ -9501,7 +9501,7 @@
       </p:sp>
       <p:sp>
         <p:nvSpPr>
-          <p:cNvPr id="11" name="Text: 歷史怎樣形成？"/>
+          <p:cNvPr id="11" name="Text: 歷史點樣形成？"/>
           <p:cNvSpPr txBox="1"/>
           <p:nvPr/>
         </p:nvSpPr>
@@ -9533,21 +9533,21 @@
               </a:spcAft>
             </a:pPr>
             <a:r>
-              <a:rPr sz="2200" b="1" lang="zh-TW">
+              <a:rPr sz="2200" b="1" lang="zh-HK">
                 <a:solidFill>
                   <a:srgbClr val="EEDFC7"/>
                 </a:solidFill>
                 <a:latin typeface="PMingLiU"/>
                 <a:ea typeface="PMingLiU"/>
               </a:rPr>
-              <a:t>歷史怎樣形成？</a:t>
-            </a:r>
-          </a:p>
-        </p:txBody>
-      </p:sp>
-      <p:sp>
-        <p:nvSpPr>
-          <p:cNvPr id="12" name="Text: 古代背景不等於今天&#10;每位參加者的動機。"/>
+              <a:t>歷史點樣形成？</a:t>
+            </a:r>
+          </a:p>
+        </p:txBody>
+      </p:sp>
+      <p:sp>
+        <p:nvSpPr>
+          <p:cNvPr id="12" name="Text: 古代背景唔等於今日&#10;每位參加者嘅動機。"/>
           <p:cNvSpPr txBox="1"/>
           <p:nvPr/>
         </p:nvSpPr>
@@ -9579,14 +9579,14 @@
               </a:spcAft>
             </a:pPr>
             <a:r>
-              <a:rPr sz="1800" b="0" lang="zh-TW">
+              <a:rPr sz="1800" b="0" lang="zh-HK">
                 <a:solidFill>
                   <a:srgbClr val="CFC0A9"/>
                 </a:solidFill>
                 <a:latin typeface="Microsoft JhengHei"/>
                 <a:ea typeface="Microsoft JhengHei"/>
               </a:rPr>
-              <a:t>古代背景不等於今天</a:t>
+              <a:t>古代背景唔等於今日</a:t>
             </a:r>
           </a:p>
           <a:p>
@@ -9602,14 +9602,14 @@
               </a:spcAft>
             </a:pPr>
             <a:r>
-              <a:rPr sz="1800" b="0" lang="zh-TW">
+              <a:rPr sz="1800" b="0" lang="zh-HK">
                 <a:solidFill>
                   <a:srgbClr val="CFC0A9"/>
                 </a:solidFill>
                 <a:latin typeface="Microsoft JhengHei"/>
                 <a:ea typeface="Microsoft JhengHei"/>
               </a:rPr>
-              <a:t>每位參加者的動機。</a:t>
+              <a:t>每位參加者嘅動機。</a:t>
             </a:r>
           </a:p>
         </p:txBody>
@@ -9683,7 +9683,7 @@
               </a:spcAft>
             </a:pPr>
             <a:r>
-              <a:rPr sz="1500" b="1" lang="zh-TW">
+              <a:rPr sz="1500" b="1" lang="zh-HK">
                 <a:solidFill>
                   <a:srgbClr val="D8B78F"/>
                 </a:solidFill>
@@ -9697,7 +9697,7 @@
       </p:sp>
       <p:sp>
         <p:nvSpPr>
-          <p:cNvPr id="15" name="Text: 這次活動做甚麼？"/>
+          <p:cNvPr id="15" name="Text: 今次活動做乜嘢？"/>
           <p:cNvSpPr txBox="1"/>
           <p:nvPr/>
         </p:nvSpPr>
@@ -9729,21 +9729,21 @@
               </a:spcAft>
             </a:pPr>
             <a:r>
-              <a:rPr sz="2200" b="1" lang="zh-TW">
+              <a:rPr sz="2200" b="1" lang="zh-HK">
                 <a:solidFill>
                   <a:srgbClr val="EEDFC7"/>
                 </a:solidFill>
                 <a:latin typeface="PMingLiU"/>
                 <a:ea typeface="PMingLiU"/>
               </a:rPr>
-              <a:t>這次活動做甚麼？</a:t>
-            </a:r>
-          </a:p>
-        </p:txBody>
-      </p:sp>
-      <p:sp>
-        <p:nvSpPr>
-          <p:cNvPr id="16" name="Text: 留意招魂、占卜、驚嚇，&#10;以及安全與身心需要。"/>
+              <a:t>今次活動做乜嘢？</a:t>
+            </a:r>
+          </a:p>
+        </p:txBody>
+      </p:sp>
+      <p:sp>
+        <p:nvSpPr>
+          <p:cNvPr id="16" name="Text: 留意招魂、占卜、驚嚇，&#10;同埋安全同身心需要。"/>
           <p:cNvSpPr txBox="1"/>
           <p:nvPr/>
         </p:nvSpPr>
@@ -9775,7 +9775,7 @@
               </a:spcAft>
             </a:pPr>
             <a:r>
-              <a:rPr sz="1800" b="0" lang="zh-TW">
+              <a:rPr sz="1800" b="0" lang="zh-HK">
                 <a:solidFill>
                   <a:srgbClr val="CFC0A9"/>
                 </a:solidFill>
@@ -9798,14 +9798,14 @@
               </a:spcAft>
             </a:pPr>
             <a:r>
-              <a:rPr sz="1800" b="0" lang="zh-TW">
+              <a:rPr sz="1800" b="0" lang="zh-HK">
                 <a:solidFill>
                   <a:srgbClr val="CFC0A9"/>
                 </a:solidFill>
                 <a:latin typeface="Microsoft JhengHei"/>
                 <a:ea typeface="Microsoft JhengHei"/>
               </a:rPr>
-              <a:t>以及安全與身心需要。</a:t>
+              <a:t>同埋安全同身心需要。</a:t>
             </a:r>
           </a:p>
         </p:txBody>
@@ -9847,7 +9847,7 @@
       </p:cxnSp>
       <p:sp>
         <p:nvSpPr>
-          <p:cNvPr id="18" name="Text: 信仰與良心"/>
+          <p:cNvPr id="18" name="Text: 信仰同良心"/>
           <p:cNvSpPr txBox="1"/>
           <p:nvPr/>
         </p:nvSpPr>
@@ -9879,21 +9879,21 @@
               </a:spcAft>
             </a:pPr>
             <a:r>
-              <a:rPr sz="1500" b="1" lang="zh-TW">
+              <a:rPr sz="1500" b="1" lang="zh-HK">
                 <a:solidFill>
                   <a:srgbClr val="D8B78F"/>
                 </a:solidFill>
                 <a:latin typeface="Microsoft JhengHei"/>
                 <a:ea typeface="Microsoft JhengHei"/>
               </a:rPr>
-              <a:t>信仰與良心</a:t>
-            </a:r>
-          </a:p>
-        </p:txBody>
-      </p:sp>
-      <p:sp>
-        <p:nvSpPr>
-          <p:cNvPr id="19" name="Text: 我怎樣作選擇？"/>
+              <a:t>信仰同良心</a:t>
+            </a:r>
+          </a:p>
+        </p:txBody>
+      </p:sp>
+      <p:sp>
+        <p:nvSpPr>
+          <p:cNvPr id="19" name="Text: 我點樣揀？"/>
           <p:cNvSpPr txBox="1"/>
           <p:nvPr/>
         </p:nvSpPr>
@@ -9925,21 +9925,21 @@
               </a:spcAft>
             </a:pPr>
             <a:r>
-              <a:rPr sz="2200" b="1" lang="zh-TW">
+              <a:rPr sz="2200" b="1" lang="zh-HK">
                 <a:solidFill>
                   <a:srgbClr val="EEDFC7"/>
                 </a:solidFill>
                 <a:latin typeface="PMingLiU"/>
                 <a:ea typeface="PMingLiU"/>
               </a:rPr>
-              <a:t>我怎樣作選擇？</a:t>
-            </a:r>
-          </a:p>
-        </p:txBody>
-      </p:sp>
-      <p:sp>
-        <p:nvSpPr>
-          <p:cNvPr id="20" name="Text: 不同教會立場不盡相同。&#10;可與家長、導師商量。"/>
+              <a:t>我點樣揀？</a:t>
+            </a:r>
+          </a:p>
+        </p:txBody>
+      </p:sp>
+      <p:sp>
+        <p:nvSpPr>
+          <p:cNvPr id="20" name="Text: 唔同教會立場唔盡相同。&#10;可同家長、導師商量。"/>
           <p:cNvSpPr txBox="1"/>
           <p:nvPr/>
         </p:nvSpPr>
@@ -9971,14 +9971,14 @@
               </a:spcAft>
             </a:pPr>
             <a:r>
-              <a:rPr sz="1800" b="0" lang="zh-TW">
+              <a:rPr sz="1800" b="0" lang="zh-HK">
                 <a:solidFill>
                   <a:srgbClr val="CFC0A9"/>
                 </a:solidFill>
                 <a:latin typeface="Microsoft JhengHei"/>
                 <a:ea typeface="Microsoft JhengHei"/>
               </a:rPr>
-              <a:t>不同教會立場不盡相同。</a:t>
+              <a:t>唔同教會立場唔盡相同。</a:t>
             </a:r>
           </a:p>
           <a:p>
@@ -9994,21 +9994,21 @@
               </a:spcAft>
             </a:pPr>
             <a:r>
-              <a:rPr sz="1800" b="0" lang="zh-TW">
+              <a:rPr sz="1800" b="0" lang="zh-HK">
                 <a:solidFill>
                   <a:srgbClr val="CFC0A9"/>
                 </a:solidFill>
                 <a:latin typeface="Microsoft JhengHei"/>
                 <a:ea typeface="Microsoft JhengHei"/>
               </a:rPr>
-              <a:t>可與家長、導師商量。</a:t>
-            </a:r>
-          </a:p>
-        </p:txBody>
-      </p:sp>
-      <p:sp>
-        <p:nvSpPr>
-          <p:cNvPr id="21" name="Text: 本次聚會方向：不參與招魂、占卜與恐怖主題活動，改以光明派對回應。"/>
+              <a:t>可同家長、導師商量。</a:t>
+            </a:r>
+          </a:p>
+        </p:txBody>
+      </p:sp>
+      <p:sp>
+        <p:nvSpPr>
+          <p:cNvPr id="21" name="Text: 本次聚會方向：唔參加招魂、占卜同恐怖主題活動，改以光明派對回應。"/>
           <p:cNvSpPr txBox="1"/>
           <p:nvPr/>
         </p:nvSpPr>
@@ -10040,14 +10040,14 @@
               </a:spcAft>
             </a:pPr>
             <a:r>
-              <a:rPr sz="1600" b="0" lang="zh-TW">
+              <a:rPr sz="1600" b="0" lang="zh-HK">
                 <a:solidFill>
                   <a:srgbClr val="D8B78F"/>
                 </a:solidFill>
                 <a:latin typeface="Microsoft JhengHei"/>
                 <a:ea typeface="Microsoft JhengHei"/>
               </a:rPr>
-              <a:t>本次聚會方向：不參與招魂、占卜與恐怖主題活動，改以光明派對回應。</a:t>
+              <a:t>本次聚會方向：唔參加招魂、占卜同恐怖主題活動，改以光明派對回應。</a:t>
             </a:r>
           </a:p>
         </p:txBody>
@@ -10080,7 +10080,7 @@
       <p:grpSpPr/>
       <p:sp>
         <p:nvSpPr>
-          <p:cNvPr id="2" name="Text: LIGHT PARTY  /  青少年團契"/>
+          <p:cNvPr id="2" name="Text: 光明派對  /  青少年團契"/>
           <p:cNvSpPr txBox="1"/>
           <p:nvPr/>
         </p:nvSpPr>
@@ -10112,14 +10112,14 @@
               </a:spcAft>
             </a:pPr>
             <a:r>
-              <a:rPr sz="1100" b="0" lang="zh-TW">
+              <a:rPr sz="1100" b="0" lang="zh-HK">
                 <a:solidFill>
                   <a:srgbClr val="CFC0A9"/>
                 </a:solidFill>
                 <a:latin typeface="Microsoft JhengHei"/>
                 <a:ea typeface="Microsoft JhengHei"/>
               </a:rPr>
-              <a:t>LIGHT PARTY  /  青少年團契</a:t>
+              <a:t>光明派對  /  青少年團契</a:t>
             </a:r>
           </a:p>
         </p:txBody>
@@ -10158,7 +10158,7 @@
               </a:spcAft>
             </a:pPr>
             <a:r>
-              <a:rPr sz="1100" b="0" lang="zh-TW">
+              <a:rPr sz="1100" b="0" lang="zh-HK">
                 <a:solidFill>
                   <a:srgbClr val="CFC0A9"/>
                 </a:solidFill>
@@ -10274,7 +10274,7 @@
               </a:spcAft>
             </a:pPr>
             <a:r>
-              <a:rPr sz="1000" b="0" lang="zh-TW">
+              <a:rPr sz="1000" b="0" lang="zh-HK">
                 <a:solidFill>
                   <a:srgbClr val="CFC0A9"/>
                 </a:solidFill>
@@ -10320,7 +10320,7 @@
               </a:spcAft>
             </a:pPr>
             <a:r>
-              <a:rPr sz="1700" b="1" lang="zh-TW">
+              <a:rPr sz="1700" b="1" lang="zh-HK">
                 <a:solidFill>
                   <a:srgbClr val="D8B78F"/>
                 </a:solidFill>
@@ -10334,7 +10334,7 @@
       </p:sp>
       <p:sp>
         <p:nvSpPr>
-          <p:cNvPr id="8" name="Text: 我們追求光，活出生命"/>
+          <p:cNvPr id="8" name="Text: 我哋追求光，活出生命"/>
           <p:cNvSpPr txBox="1"/>
           <p:nvPr/>
         </p:nvSpPr>
@@ -10366,14 +10366,14 @@
               </a:spcAft>
             </a:pPr>
             <a:r>
-              <a:rPr sz="3400" b="1" lang="zh-TW">
+              <a:rPr sz="3400" b="1" lang="zh-HK">
                 <a:solidFill>
                   <a:srgbClr val="EEDFC7"/>
                 </a:solidFill>
                 <a:latin typeface="PMingLiU"/>
                 <a:ea typeface="PMingLiU"/>
               </a:rPr>
-              <a:t>我們追求光，活出生命</a:t>
+              <a:t>我哋追求光，活出生命</a:t>
             </a:r>
           </a:p>
         </p:txBody>
@@ -10412,7 +10412,7 @@
               </a:spcAft>
             </a:pPr>
             <a:r>
-              <a:rPr sz="3100" b="0" lang="zh-TW">
+              <a:rPr sz="3100" b="0" lang="zh-HK">
                 <a:solidFill>
                   <a:srgbClr val="EEDFC7"/>
                 </a:solidFill>
@@ -10435,7 +10435,7 @@
               </a:spcAft>
             </a:pPr>
             <a:r>
-              <a:rPr sz="3100" b="0" lang="zh-TW">
+              <a:rPr sz="3100" b="0" lang="zh-HK">
                 <a:solidFill>
                   <a:srgbClr val="EEDFC7"/>
                 </a:solidFill>
@@ -10458,7 +10458,7 @@
               </a:spcAft>
             </a:pPr>
             <a:r>
-              <a:rPr sz="3100" b="0" lang="zh-TW">
+              <a:rPr sz="3100" b="0" lang="zh-HK">
                 <a:solidFill>
                   <a:srgbClr val="EEDFC7"/>
                 </a:solidFill>
@@ -10504,7 +10504,7 @@
               </a:spcAft>
             </a:pPr>
             <a:r>
-              <a:rPr sz="1400" b="0" lang="zh-TW">
+              <a:rPr sz="1400" b="0" lang="zh-HK">
                 <a:solidFill>
                   <a:srgbClr val="CFC0A9"/>
                 </a:solidFill>
@@ -10585,7 +10585,7 @@
               </a:spcAft>
             </a:pPr>
             <a:r>
-              <a:rPr sz="1700" b="1" lang="zh-TW">
+              <a:rPr sz="1700" b="1" lang="zh-HK">
                 <a:solidFill>
                   <a:srgbClr val="D8B78F"/>
                 </a:solidFill>
@@ -10631,7 +10631,7 @@
               </a:spcAft>
             </a:pPr>
             <a:r>
-              <a:rPr sz="2100" b="0" lang="zh-TW">
+              <a:rPr sz="2100" b="0" lang="zh-HK">
                 <a:solidFill>
                   <a:srgbClr val="EEDFC7"/>
                 </a:solidFill>
@@ -10680,7 +10680,7 @@
       </p:cxnSp>
       <p:sp>
         <p:nvSpPr>
-          <p:cNvPr id="15" name="Text: 不以恐怖作招徠"/>
+          <p:cNvPr id="15" name="Text: 唔以恐怖作招徠"/>
           <p:cNvSpPr txBox="1"/>
           <p:nvPr/>
         </p:nvSpPr>
@@ -10712,21 +10712,21 @@
               </a:spcAft>
             </a:pPr>
             <a:r>
-              <a:rPr sz="1700" b="1" lang="zh-TW">
+              <a:rPr sz="1700" b="1" lang="zh-HK">
                 <a:solidFill>
                   <a:srgbClr val="D8B78F"/>
                 </a:solidFill>
                 <a:latin typeface="Microsoft JhengHei"/>
                 <a:ea typeface="Microsoft JhengHei"/>
               </a:rPr>
-              <a:t>不以恐怖作招徠</a:t>
-            </a:r>
-          </a:p>
-        </p:txBody>
-      </p:sp>
-      <p:sp>
-        <p:nvSpPr>
-          <p:cNvPr id="16" name="Text: 不以標籤傷害別人"/>
+              <a:t>唔以恐怖作招徠</a:t>
+            </a:r>
+          </a:p>
+        </p:txBody>
+      </p:sp>
+      <p:sp>
+        <p:nvSpPr>
+          <p:cNvPr id="16" name="Text: 唔以標籤傷害別人"/>
           <p:cNvSpPr txBox="1"/>
           <p:nvPr/>
         </p:nvSpPr>
@@ -10758,14 +10758,14 @@
               </a:spcAft>
             </a:pPr>
             <a:r>
-              <a:rPr sz="2100" b="0" lang="zh-TW">
+              <a:rPr sz="2100" b="0" lang="zh-HK">
                 <a:solidFill>
                   <a:srgbClr val="EEDFC7"/>
                 </a:solidFill>
                 <a:latin typeface="Microsoft JhengHei"/>
                 <a:ea typeface="Microsoft JhengHei"/>
               </a:rPr>
-              <a:t>不以標籤傷害別人</a:t>
+              <a:t>唔以標籤傷害別人</a:t>
             </a:r>
           </a:p>
         </p:txBody>
@@ -10798,7 +10798,7 @@
       <p:grpSpPr/>
       <p:sp>
         <p:nvSpPr>
-          <p:cNvPr id="2" name="Text: LIGHT PARTY  /  青少年團契"/>
+          <p:cNvPr id="2" name="Text: 光明派對  /  青少年團契"/>
           <p:cNvSpPr txBox="1"/>
           <p:nvPr/>
         </p:nvSpPr>
@@ -10830,14 +10830,14 @@
               </a:spcAft>
             </a:pPr>
             <a:r>
-              <a:rPr sz="1100" b="0" lang="zh-TW">
+              <a:rPr sz="1100" b="0" lang="zh-HK">
                 <a:solidFill>
                   <a:srgbClr val="6A513D"/>
                 </a:solidFill>
                 <a:latin typeface="Microsoft JhengHei"/>
                 <a:ea typeface="Microsoft JhengHei"/>
               </a:rPr>
-              <a:t>LIGHT PARTY  /  青少年團契</a:t>
+              <a:t>光明派對  /  青少年團契</a:t>
             </a:r>
           </a:p>
         </p:txBody>
@@ -10876,7 +10876,7 @@
               </a:spcAft>
             </a:pPr>
             <a:r>
-              <a:rPr sz="1100" b="0" lang="zh-TW">
+              <a:rPr sz="1100" b="0" lang="zh-HK">
                 <a:solidFill>
                   <a:srgbClr val="6A513D"/>
                 </a:solidFill>
@@ -10992,7 +10992,7 @@
               </a:spcAft>
             </a:pPr>
             <a:r>
-              <a:rPr sz="1000" b="0" lang="zh-TW">
+              <a:rPr sz="1000" b="0" lang="zh-HK">
                 <a:solidFill>
                   <a:srgbClr val="6A513D"/>
                 </a:solidFill>
@@ -11038,7 +11038,7 @@
               </a:spcAft>
             </a:pPr>
             <a:r>
-              <a:rPr sz="1700" b="1" lang="zh-TW">
+              <a:rPr sz="1700" b="1" lang="zh-HK">
                 <a:solidFill>
                   <a:srgbClr val="804212"/>
                 </a:solidFill>
@@ -11084,7 +11084,7 @@
               </a:spcAft>
             </a:pPr>
             <a:r>
-              <a:rPr sz="3400" b="1" lang="zh-TW">
+              <a:rPr sz="3400" b="1" lang="zh-HK">
                 <a:solidFill>
                   <a:srgbClr val="2A1E13"/>
                 </a:solidFill>
@@ -11130,7 +11130,7 @@
               </a:spcAft>
             </a:pPr>
             <a:r>
-              <a:rPr sz="2500" b="0" lang="zh-TW">
+              <a:rPr sz="2500" b="0" lang="zh-HK">
                 <a:solidFill>
                   <a:srgbClr val="2A1E13"/>
                 </a:solidFill>
@@ -11153,7 +11153,7 @@
               </a:spcAft>
             </a:pPr>
             <a:r>
-              <a:rPr sz="2500" b="0" lang="zh-TW">
+              <a:rPr sz="2500" b="0" lang="zh-HK">
                 <a:solidFill>
                   <a:srgbClr val="2A1E13"/>
                 </a:solidFill>
@@ -11176,7 +11176,7 @@
               </a:spcAft>
             </a:pPr>
             <a:r>
-              <a:rPr sz="2500" b="0" lang="zh-TW">
+              <a:rPr sz="2500" b="0" lang="zh-HK">
                 <a:solidFill>
                   <a:srgbClr val="2A1E13"/>
                 </a:solidFill>
@@ -11199,7 +11199,7 @@
               </a:spcAft>
             </a:pPr>
             <a:r>
-              <a:rPr sz="2500" b="0" lang="zh-TW">
+              <a:rPr sz="2500" b="0" lang="zh-HK">
                 <a:solidFill>
                   <a:srgbClr val="2A1E13"/>
                 </a:solidFill>
@@ -11245,7 +11245,7 @@
               </a:spcAft>
             </a:pPr>
             <a:r>
-              <a:rPr sz="1400" b="0" lang="zh-TW">
+              <a:rPr sz="1400" b="0" lang="zh-HK">
                 <a:solidFill>
                   <a:srgbClr val="6A513D"/>
                 </a:solidFill>
@@ -11294,7 +11294,7 @@
       </p:cxnSp>
       <p:sp>
         <p:nvSpPr>
-          <p:cNvPr id="12" name="Text: 看清內容"/>
+          <p:cNvPr id="12" name="Text: 睇清楚內容"/>
           <p:cNvSpPr txBox="1"/>
           <p:nvPr/>
         </p:nvSpPr>
@@ -11326,21 +11326,21 @@
               </a:spcAft>
             </a:pPr>
             <a:r>
-              <a:rPr sz="1700" b="1" lang="zh-TW">
+              <a:rPr sz="1700" b="1" lang="zh-HK">
                 <a:solidFill>
                   <a:srgbClr val="804212"/>
                 </a:solidFill>
                 <a:latin typeface="Microsoft JhengHei"/>
                 <a:ea typeface="Microsoft JhengHei"/>
               </a:rPr>
-              <a:t>看清內容</a:t>
-            </a:r>
-          </a:p>
-        </p:txBody>
-      </p:sp>
-      <p:sp>
-        <p:nvSpPr>
-          <p:cNvPr id="13" name="Text: 這活動是否合宜、安全？"/>
+              <a:t>睇清楚內容</a:t>
+            </a:r>
+          </a:p>
+        </p:txBody>
+      </p:sp>
+      <p:sp>
+        <p:nvSpPr>
+          <p:cNvPr id="13" name="Text: 呢活動係咪合宜、安全？"/>
           <p:cNvSpPr txBox="1"/>
           <p:nvPr/>
         </p:nvSpPr>
@@ -11372,14 +11372,14 @@
               </a:spcAft>
             </a:pPr>
             <a:r>
-              <a:rPr sz="2100" b="0" lang="zh-TW">
+              <a:rPr sz="2100" b="0" lang="zh-HK">
                 <a:solidFill>
                   <a:srgbClr val="2A1E13"/>
                 </a:solidFill>
                 <a:latin typeface="Microsoft JhengHei"/>
                 <a:ea typeface="Microsoft JhengHei"/>
               </a:rPr>
-              <a:t>這活動是否合宜、安全？</a:t>
+              <a:t>呢活動係咪合宜、安全？</a:t>
             </a:r>
           </a:p>
         </p:txBody>
@@ -11421,7 +11421,7 @@
       </p:cxnSp>
       <p:sp>
         <p:nvSpPr>
-          <p:cNvPr id="15" name="Text: 看清動機"/>
+          <p:cNvPr id="15" name="Text: 睇清楚動機"/>
           <p:cNvSpPr txBox="1"/>
           <p:nvPr/>
         </p:nvSpPr>
@@ -11453,21 +11453,21 @@
               </a:spcAft>
             </a:pPr>
             <a:r>
-              <a:rPr sz="1700" b="1" lang="zh-TW">
+              <a:rPr sz="1700" b="1" lang="zh-HK">
                 <a:solidFill>
                   <a:srgbClr val="804212"/>
                 </a:solidFill>
                 <a:latin typeface="Microsoft JhengHei"/>
                 <a:ea typeface="Microsoft JhengHei"/>
               </a:rPr>
-              <a:t>看清動機</a:t>
-            </a:r>
-          </a:p>
-        </p:txBody>
-      </p:sp>
-      <p:sp>
-        <p:nvSpPr>
-          <p:cNvPr id="16" name="Text: 我是願意，還是怕被排斥？"/>
+              <a:t>睇清楚動機</a:t>
+            </a:r>
+          </a:p>
+        </p:txBody>
+      </p:sp>
+      <p:sp>
+        <p:nvSpPr>
+          <p:cNvPr id="16" name="Text: 我係願意，仲係怕被排斥？"/>
           <p:cNvSpPr txBox="1"/>
           <p:nvPr/>
         </p:nvSpPr>
@@ -11499,14 +11499,14 @@
               </a:spcAft>
             </a:pPr>
             <a:r>
-              <a:rPr sz="2100" b="0" lang="zh-TW">
+              <a:rPr sz="2100" b="0" lang="zh-HK">
                 <a:solidFill>
                   <a:srgbClr val="2A1E13"/>
                 </a:solidFill>
                 <a:latin typeface="Microsoft JhengHei"/>
                 <a:ea typeface="Microsoft JhengHei"/>
               </a:rPr>
-              <a:t>我是願意，還是怕被排斥？</a:t>
+              <a:t>我係願意，仲係怕被排斥？</a:t>
             </a:r>
           </a:p>
         </p:txBody>
@@ -11539,7 +11539,7 @@
       <p:grpSpPr/>
       <p:sp>
         <p:nvSpPr>
-          <p:cNvPr id="2" name="Text: LIGHT PARTY  /  青少年團契"/>
+          <p:cNvPr id="2" name="Text: 光明派對  /  青少年團契"/>
           <p:cNvSpPr txBox="1"/>
           <p:nvPr/>
         </p:nvSpPr>
@@ -11571,14 +11571,14 @@
               </a:spcAft>
             </a:pPr>
             <a:r>
-              <a:rPr sz="1100" b="0" lang="zh-TW">
+              <a:rPr sz="1100" b="0" lang="zh-HK">
                 <a:solidFill>
                   <a:srgbClr val="CFC0A9"/>
                 </a:solidFill>
                 <a:latin typeface="Microsoft JhengHei"/>
                 <a:ea typeface="Microsoft JhengHei"/>
               </a:rPr>
-              <a:t>LIGHT PARTY  /  青少年團契</a:t>
+              <a:t>光明派對  /  青少年團契</a:t>
             </a:r>
           </a:p>
         </p:txBody>
@@ -11617,7 +11617,7 @@
               </a:spcAft>
             </a:pPr>
             <a:r>
-              <a:rPr sz="1100" b="0" lang="zh-TW">
+              <a:rPr sz="1100" b="0" lang="zh-HK">
                 <a:solidFill>
                   <a:srgbClr val="CFC0A9"/>
                 </a:solidFill>
@@ -11733,7 +11733,7 @@
               </a:spcAft>
             </a:pPr>
             <a:r>
-              <a:rPr sz="1000" b="0" lang="zh-TW">
+              <a:rPr sz="1000" b="0" lang="zh-HK">
                 <a:solidFill>
                   <a:srgbClr val="CFC0A9"/>
                 </a:solidFill>
@@ -11779,7 +11779,7 @@
               </a:spcAft>
             </a:pPr>
             <a:r>
-              <a:rPr sz="1700" b="1" lang="zh-TW">
+              <a:rPr sz="1700" b="1" lang="zh-HK">
                 <a:solidFill>
                   <a:srgbClr val="D8B78F"/>
                 </a:solidFill>
@@ -11825,7 +11825,7 @@
               </a:spcAft>
             </a:pPr>
             <a:r>
-              <a:rPr sz="3400" b="1" lang="zh-TW">
+              <a:rPr sz="3400" b="1" lang="zh-HK">
                 <a:solidFill>
                   <a:srgbClr val="EEDFC7"/>
                 </a:solidFill>
@@ -11871,7 +11871,7 @@
               </a:spcAft>
             </a:pPr>
             <a:r>
-              <a:rPr sz="3100" b="0" lang="zh-TW">
+              <a:rPr sz="3100" b="0" lang="zh-HK">
                 <a:solidFill>
                   <a:srgbClr val="EEDFC7"/>
                 </a:solidFill>
@@ -11894,7 +11894,7 @@
               </a:spcAft>
             </a:pPr>
             <a:r>
-              <a:rPr sz="3100" b="0" lang="zh-TW">
+              <a:rPr sz="3100" b="0" lang="zh-HK">
                 <a:solidFill>
                   <a:srgbClr val="EEDFC7"/>
                 </a:solidFill>
@@ -11917,7 +11917,7 @@
               </a:spcAft>
             </a:pPr>
             <a:r>
-              <a:rPr sz="3100" b="0" lang="zh-TW">
+              <a:rPr sz="3100" b="0" lang="zh-HK">
                 <a:solidFill>
                   <a:srgbClr val="EEDFC7"/>
                 </a:solidFill>
@@ -11963,7 +11963,7 @@
               </a:spcAft>
             </a:pPr>
             <a:r>
-              <a:rPr sz="1400" b="0" lang="zh-TW">
+              <a:rPr sz="1400" b="0" lang="zh-HK">
                 <a:solidFill>
                   <a:srgbClr val="CFC0A9"/>
                 </a:solidFill>
@@ -12044,7 +12044,7 @@
               </a:spcAft>
             </a:pPr>
             <a:r>
-              <a:rPr sz="1700" b="1" lang="zh-TW">
+              <a:rPr sz="1700" b="1" lang="zh-HK">
                 <a:solidFill>
                   <a:srgbClr val="D8B78F"/>
                 </a:solidFill>
@@ -12058,7 +12058,7 @@
       </p:sp>
       <p:sp>
         <p:nvSpPr>
-          <p:cNvPr id="13" name="Text: 溫柔表明自己的界線"/>
+          <p:cNvPr id="13" name="Text: 溫柔表明自己嘅界線"/>
           <p:cNvSpPr txBox="1"/>
           <p:nvPr/>
         </p:nvSpPr>
@@ -12090,14 +12090,14 @@
               </a:spcAft>
             </a:pPr>
             <a:r>
-              <a:rPr sz="2100" b="0" lang="zh-TW">
+              <a:rPr sz="2100" b="0" lang="zh-HK">
                 <a:solidFill>
                   <a:srgbClr val="EEDFC7"/>
                 </a:solidFill>
                 <a:latin typeface="Microsoft JhengHei"/>
                 <a:ea typeface="Microsoft JhengHei"/>
               </a:rPr>
-              <a:t>溫柔表明自己的界線</a:t>
+              <a:t>溫柔表明自己嘅界線</a:t>
             </a:r>
           </a:p>
         </p:txBody>
@@ -12171,7 +12171,7 @@
               </a:spcAft>
             </a:pPr>
             <a:r>
-              <a:rPr sz="1700" b="1" lang="zh-TW">
+              <a:rPr sz="1700" b="1" lang="zh-HK">
                 <a:solidFill>
                   <a:srgbClr val="D8B78F"/>
                 </a:solidFill>
@@ -12185,7 +12185,7 @@
       </p:sp>
       <p:sp>
         <p:nvSpPr>
-          <p:cNvPr id="16" name="Text: 尊重朋友，也照顧安全"/>
+          <p:cNvPr id="16" name="Text: 尊重朋友，都照顧安全"/>
           <p:cNvSpPr txBox="1"/>
           <p:nvPr/>
         </p:nvSpPr>
@@ -12217,14 +12217,14 @@
               </a:spcAft>
             </a:pPr>
             <a:r>
-              <a:rPr sz="2100" b="0" lang="zh-TW">
+              <a:rPr sz="2100" b="0" lang="zh-HK">
                 <a:solidFill>
                   <a:srgbClr val="EEDFC7"/>
                 </a:solidFill>
                 <a:latin typeface="Microsoft JhengHei"/>
                 <a:ea typeface="Microsoft JhengHei"/>
               </a:rPr>
-              <a:t>尊重朋友，也照顧安全</a:t>
+              <a:t>尊重朋友，都照顧安全</a:t>
             </a:r>
           </a:p>
         </p:txBody>
@@ -12257,7 +12257,7 @@
       <p:grpSpPr/>
       <p:sp>
         <p:nvSpPr>
-          <p:cNvPr id="2" name="Text: LIGHT PARTY  /  青少年團契"/>
+          <p:cNvPr id="2" name="Text: 光明派對  /  青少年團契"/>
           <p:cNvSpPr txBox="1"/>
           <p:nvPr/>
         </p:nvSpPr>
@@ -12289,14 +12289,14 @@
               </a:spcAft>
             </a:pPr>
             <a:r>
-              <a:rPr sz="1100" b="0" lang="zh-TW">
+              <a:rPr sz="1100" b="0" lang="zh-HK">
                 <a:solidFill>
                   <a:srgbClr val="6A513D"/>
                 </a:solidFill>
                 <a:latin typeface="Microsoft JhengHei"/>
                 <a:ea typeface="Microsoft JhengHei"/>
               </a:rPr>
-              <a:t>LIGHT PARTY  /  青少年團契</a:t>
+              <a:t>光明派對  /  青少年團契</a:t>
             </a:r>
           </a:p>
         </p:txBody>
@@ -12335,7 +12335,7 @@
               </a:spcAft>
             </a:pPr>
             <a:r>
-              <a:rPr sz="1100" b="0" lang="zh-TW">
+              <a:rPr sz="1100" b="0" lang="zh-HK">
                 <a:solidFill>
                   <a:srgbClr val="6A513D"/>
                 </a:solidFill>
@@ -12451,7 +12451,7 @@
               </a:spcAft>
             </a:pPr>
             <a:r>
-              <a:rPr sz="1000" b="0" lang="zh-TW">
+              <a:rPr sz="1000" b="0" lang="zh-HK">
                 <a:solidFill>
                   <a:srgbClr val="6A513D"/>
                 </a:solidFill>
@@ -12497,7 +12497,7 @@
               </a:spcAft>
             </a:pPr>
             <a:r>
-              <a:rPr sz="1500" b="1" lang="zh-TW">
+              <a:rPr sz="1500" b="1" lang="zh-HK">
                 <a:solidFill>
                   <a:srgbClr val="804212"/>
                 </a:solidFill>
@@ -12543,7 +12543,7 @@
               </a:spcAft>
             </a:pPr>
             <a:r>
-              <a:rPr sz="3600" b="1" lang="zh-TW">
+              <a:rPr sz="3600" b="1" lang="zh-HK">
                 <a:solidFill>
                   <a:srgbClr val="2A1E13"/>
                 </a:solidFill>
@@ -12624,7 +12624,7 @@
               </a:spcAft>
             </a:pPr>
             <a:r>
-              <a:rPr sz="1500" b="1" lang="zh-TW">
+              <a:rPr sz="1500" b="1" lang="zh-HK">
                 <a:solidFill>
                   <a:srgbClr val="804212"/>
                 </a:solidFill>
@@ -12638,7 +12638,7 @@
       </p:sp>
       <p:sp>
         <p:nvSpPr>
-          <p:cNvPr id="11" name="Text: 這活動做甚麼？"/>
+          <p:cNvPr id="11" name="Text: 呢活動做乜嘢？"/>
           <p:cNvSpPr txBox="1"/>
           <p:nvPr/>
         </p:nvSpPr>
@@ -12670,21 +12670,21 @@
               </a:spcAft>
             </a:pPr>
             <a:r>
-              <a:rPr sz="2200" b="1" lang="zh-TW">
+              <a:rPr sz="2200" b="1" lang="zh-HK">
                 <a:solidFill>
                   <a:srgbClr val="2A1E13"/>
                 </a:solidFill>
                 <a:latin typeface="PMingLiU"/>
                 <a:ea typeface="PMingLiU"/>
               </a:rPr>
-              <a:t>這活動做甚麼？</a:t>
-            </a:r>
-          </a:p>
-        </p:txBody>
-      </p:sp>
-      <p:sp>
-        <p:nvSpPr>
-          <p:cNvPr id="12" name="Text: 是否涉及招魂、占卜，&#10;或令我不安的驚嚇？"/>
+              <a:t>呢活動做乜嘢？</a:t>
+            </a:r>
+          </a:p>
+        </p:txBody>
+      </p:sp>
+      <p:sp>
+        <p:nvSpPr>
+          <p:cNvPr id="12" name="Text: 係咪涉及招魂、占卜，&#10;或令我唔安嘅驚嚇？"/>
           <p:cNvSpPr txBox="1"/>
           <p:nvPr/>
         </p:nvSpPr>
@@ -12716,14 +12716,14 @@
               </a:spcAft>
             </a:pPr>
             <a:r>
-              <a:rPr sz="1800" b="0" lang="zh-TW">
+              <a:rPr sz="1800" b="0" lang="zh-HK">
                 <a:solidFill>
                   <a:srgbClr val="6A513D"/>
                 </a:solidFill>
                 <a:latin typeface="Microsoft JhengHei"/>
                 <a:ea typeface="Microsoft JhengHei"/>
               </a:rPr>
-              <a:t>是否涉及招魂、占卜，</a:t>
+              <a:t>係咪涉及招魂、占卜，</a:t>
             </a:r>
           </a:p>
           <a:p>
@@ -12739,14 +12739,14 @@
               </a:spcAft>
             </a:pPr>
             <a:r>
-              <a:rPr sz="1800" b="0" lang="zh-TW">
+              <a:rPr sz="1800" b="0" lang="zh-HK">
                 <a:solidFill>
                   <a:srgbClr val="6A513D"/>
                 </a:solidFill>
                 <a:latin typeface="Microsoft JhengHei"/>
                 <a:ea typeface="Microsoft JhengHei"/>
               </a:rPr>
-              <a:t>或令我不安的驚嚇？</a:t>
+              <a:t>或令我唔安嘅驚嚇？</a:t>
             </a:r>
           </a:p>
         </p:txBody>
@@ -12820,7 +12820,7 @@
               </a:spcAft>
             </a:pPr>
             <a:r>
-              <a:rPr sz="1500" b="1" lang="zh-TW">
+              <a:rPr sz="1500" b="1" lang="zh-HK">
                 <a:solidFill>
                   <a:srgbClr val="804212"/>
                 </a:solidFill>
@@ -12834,7 +12834,7 @@
       </p:sp>
       <p:sp>
         <p:nvSpPr>
-          <p:cNvPr id="15" name="Text: 我為甚麼想去？"/>
+          <p:cNvPr id="15" name="Text: 我點解想去？"/>
           <p:cNvSpPr txBox="1"/>
           <p:nvPr/>
         </p:nvSpPr>
@@ -12866,21 +12866,21 @@
               </a:spcAft>
             </a:pPr>
             <a:r>
-              <a:rPr sz="2200" b="1" lang="zh-TW">
+              <a:rPr sz="2200" b="1" lang="zh-HK">
                 <a:solidFill>
                   <a:srgbClr val="2A1E13"/>
                 </a:solidFill>
                 <a:latin typeface="PMingLiU"/>
                 <a:ea typeface="PMingLiU"/>
               </a:rPr>
-              <a:t>我為甚麼想去？</a:t>
-            </a:r>
-          </a:p>
-        </p:txBody>
-      </p:sp>
-      <p:sp>
-        <p:nvSpPr>
-          <p:cNvPr id="16" name="Text: 是真心願意，&#10;還是怕被排斥？"/>
+              <a:t>我點解想去？</a:t>
+            </a:r>
+          </a:p>
+        </p:txBody>
+      </p:sp>
+      <p:sp>
+        <p:nvSpPr>
+          <p:cNvPr id="16" name="Text: 係真心願意，&#10;仲係怕被排斥？"/>
           <p:cNvSpPr txBox="1"/>
           <p:nvPr/>
         </p:nvSpPr>
@@ -12912,14 +12912,14 @@
               </a:spcAft>
             </a:pPr>
             <a:r>
-              <a:rPr sz="1800" b="0" lang="zh-TW">
+              <a:rPr sz="1800" b="0" lang="zh-HK">
                 <a:solidFill>
                   <a:srgbClr val="6A513D"/>
                 </a:solidFill>
                 <a:latin typeface="Microsoft JhengHei"/>
                 <a:ea typeface="Microsoft JhengHei"/>
               </a:rPr>
-              <a:t>是真心願意，</a:t>
+              <a:t>係真心願意，</a:t>
             </a:r>
           </a:p>
           <a:p>
@@ -12935,14 +12935,14 @@
               </a:spcAft>
             </a:pPr>
             <a:r>
-              <a:rPr sz="1800" b="0" lang="zh-TW">
+              <a:rPr sz="1800" b="0" lang="zh-HK">
                 <a:solidFill>
                   <a:srgbClr val="6A513D"/>
                 </a:solidFill>
                 <a:latin typeface="Microsoft JhengHei"/>
                 <a:ea typeface="Microsoft JhengHei"/>
               </a:rPr>
-              <a:t>還是怕被排斥？</a:t>
+              <a:t>仲係怕被排斥？</a:t>
             </a:r>
           </a:p>
         </p:txBody>
@@ -12984,7 +12984,7 @@
       </p:cxnSp>
       <p:sp>
         <p:nvSpPr>
-          <p:cNvPr id="18" name="Text: 找替代"/>
+          <p:cNvPr id="18" name="Text: 搵替代"/>
           <p:cNvSpPr txBox="1"/>
           <p:nvPr/>
         </p:nvSpPr>
@@ -13016,21 +13016,21 @@
               </a:spcAft>
             </a:pPr>
             <a:r>
-              <a:rPr sz="1500" b="1" lang="zh-TW">
+              <a:rPr sz="1500" b="1" lang="zh-HK">
                 <a:solidFill>
                   <a:srgbClr val="804212"/>
                 </a:solidFill>
                 <a:latin typeface="Microsoft JhengHei"/>
                 <a:ea typeface="Microsoft JhengHei"/>
               </a:rPr>
-              <a:t>找替代</a:t>
-            </a:r>
-          </a:p>
-        </p:txBody>
-      </p:sp>
-      <p:sp>
-        <p:nvSpPr>
-          <p:cNvPr id="19" name="Text: 有別的方法嗎？"/>
+              <a:t>搵替代</a:t>
+            </a:r>
+          </a:p>
+        </p:txBody>
+      </p:sp>
+      <p:sp>
+        <p:nvSpPr>
+          <p:cNvPr id="19" name="Text: 有別嘅方法嗎？"/>
           <p:cNvSpPr txBox="1"/>
           <p:nvPr/>
         </p:nvSpPr>
@@ -13062,21 +13062,21 @@
               </a:spcAft>
             </a:pPr>
             <a:r>
-              <a:rPr sz="2200" b="1" lang="zh-TW">
+              <a:rPr sz="2200" b="1" lang="zh-HK">
                 <a:solidFill>
                   <a:srgbClr val="2A1E13"/>
                 </a:solidFill>
                 <a:latin typeface="PMingLiU"/>
                 <a:ea typeface="PMingLiU"/>
               </a:rPr>
-              <a:t>有別的方法嗎？</a:t>
-            </a:r>
-          </a:p>
-        </p:txBody>
-      </p:sp>
-      <p:sp>
-        <p:nvSpPr>
-          <p:cNvPr id="20" name="Text: 可以保留友誼與喜樂，&#10;一起做合宜的活動。"/>
+              <a:t>有別嘅方法嗎？</a:t>
+            </a:r>
+          </a:p>
+        </p:txBody>
+      </p:sp>
+      <p:sp>
+        <p:nvSpPr>
+          <p:cNvPr id="20" name="Text: 可以保留友誼同喜樂，&#10;一起做合宜嘅活動。"/>
           <p:cNvSpPr txBox="1"/>
           <p:nvPr/>
         </p:nvSpPr>
@@ -13108,14 +13108,14 @@
               </a:spcAft>
             </a:pPr>
             <a:r>
-              <a:rPr sz="1800" b="0" lang="zh-TW">
+              <a:rPr sz="1800" b="0" lang="zh-HK">
                 <a:solidFill>
                   <a:srgbClr val="6A513D"/>
                 </a:solidFill>
                 <a:latin typeface="Microsoft JhengHei"/>
                 <a:ea typeface="Microsoft JhengHei"/>
               </a:rPr>
-              <a:t>可以保留友誼與喜樂，</a:t>
+              <a:t>可以保留友誼同喜樂，</a:t>
             </a:r>
           </a:p>
           <a:p>
@@ -13131,21 +13131,21 @@
               </a:spcAft>
             </a:pPr>
             <a:r>
-              <a:rPr sz="1800" b="0" lang="zh-TW">
+              <a:rPr sz="1800" b="0" lang="zh-HK">
                 <a:solidFill>
                   <a:srgbClr val="6A513D"/>
                 </a:solidFill>
                 <a:latin typeface="Microsoft JhengHei"/>
                 <a:ea typeface="Microsoft JhengHei"/>
               </a:rPr>
-              <a:t>一起做合宜的活動。</a:t>
-            </a:r>
-          </a:p>
-        </p:txBody>
-      </p:sp>
-      <p:sp>
-        <p:nvSpPr>
-          <p:cNvPr id="21" name="Text: 我們選擇光明派對：點心、鼓勵、祝福，而不是恐怖。"/>
+              <a:t>一起做合宜嘅活動。</a:t>
+            </a:r>
+          </a:p>
+        </p:txBody>
+      </p:sp>
+      <p:sp>
+        <p:nvSpPr>
+          <p:cNvPr id="21" name="Text: 我哋選擇光明派對：點心、鼓勵、祝福，而唔係恐怖。"/>
           <p:cNvSpPr txBox="1"/>
           <p:nvPr/>
         </p:nvSpPr>
@@ -13177,14 +13177,14 @@
               </a:spcAft>
             </a:pPr>
             <a:r>
-              <a:rPr sz="1900" b="0" lang="zh-TW">
+              <a:rPr sz="1900" b="0" lang="zh-HK">
                 <a:solidFill>
                   <a:srgbClr val="804212"/>
                 </a:solidFill>
                 <a:latin typeface="Microsoft JhengHei"/>
                 <a:ea typeface="Microsoft JhengHei"/>
               </a:rPr>
-              <a:t>我們選擇光明派對：點心、鼓勵、祝福，而不是恐怖。</a:t>
+              <a:t>我哋選擇光明派對：點心、鼓勵、祝福，而唔係恐怖。</a:t>
             </a:r>
           </a:p>
         </p:txBody>
@@ -13217,7 +13217,7 @@
       <p:grpSpPr/>
       <p:sp>
         <p:nvSpPr>
-          <p:cNvPr id="2" name="Text: LIGHT PARTY  /  青少年團契"/>
+          <p:cNvPr id="2" name="Text: 光明派對  /  青少年團契"/>
           <p:cNvSpPr txBox="1"/>
           <p:nvPr/>
         </p:nvSpPr>
@@ -13249,14 +13249,14 @@
               </a:spcAft>
             </a:pPr>
             <a:r>
-              <a:rPr sz="1100" b="0" lang="zh-TW">
+              <a:rPr sz="1100" b="0" lang="zh-HK">
                 <a:solidFill>
                   <a:srgbClr val="CFC0A9"/>
                 </a:solidFill>
                 <a:latin typeface="Microsoft JhengHei"/>
                 <a:ea typeface="Microsoft JhengHei"/>
               </a:rPr>
-              <a:t>LIGHT PARTY  /  青少年團契</a:t>
+              <a:t>光明派對  /  青少年團契</a:t>
             </a:r>
           </a:p>
         </p:txBody>
@@ -13295,7 +13295,7 @@
               </a:spcAft>
             </a:pPr>
             <a:r>
-              <a:rPr sz="1100" b="0" lang="zh-TW">
+              <a:rPr sz="1100" b="0" lang="zh-HK">
                 <a:solidFill>
                   <a:srgbClr val="CFC0A9"/>
                 </a:solidFill>
@@ -13411,7 +13411,7 @@
               </a:spcAft>
             </a:pPr>
             <a:r>
-              <a:rPr sz="1000" b="0" lang="zh-TW">
+              <a:rPr sz="1000" b="0" lang="zh-HK">
                 <a:solidFill>
                   <a:srgbClr val="CFC0A9"/>
                 </a:solidFill>
@@ -13425,7 +13425,7 @@
       </p:sp>
       <p:sp>
         <p:nvSpPr>
-          <p:cNvPr id="7" name="Text: 可以分享，也可以先聆聽"/>
+          <p:cNvPr id="7" name="Text: 可以分享，都可以先聆聽"/>
           <p:cNvSpPr txBox="1"/>
           <p:nvPr/>
         </p:nvSpPr>
@@ -13457,21 +13457,21 @@
               </a:spcAft>
             </a:pPr>
             <a:r>
-              <a:rPr sz="1500" b="1" lang="zh-TW">
+              <a:rPr sz="1500" b="1" lang="zh-HK">
                 <a:solidFill>
                   <a:srgbClr val="D8B78F"/>
                 </a:solidFill>
                 <a:latin typeface="Microsoft JhengHei"/>
                 <a:ea typeface="Microsoft JhengHei"/>
               </a:rPr>
-              <a:t>可以分享，也可以先聆聽</a:t>
-            </a:r>
-          </a:p>
-        </p:txBody>
-      </p:sp>
-      <p:sp>
-        <p:nvSpPr>
-          <p:cNvPr id="8" name="Text: 真實說，也好好聽"/>
+              <a:t>可以分享，都可以先聆聽</a:t>
+            </a:r>
+          </a:p>
+        </p:txBody>
+      </p:sp>
+      <p:sp>
+        <p:nvSpPr>
+          <p:cNvPr id="8" name="Text: 真實講，都好好聽"/>
           <p:cNvSpPr txBox="1"/>
           <p:nvPr/>
         </p:nvSpPr>
@@ -13503,14 +13503,14 @@
               </a:spcAft>
             </a:pPr>
             <a:r>
-              <a:rPr sz="3600" b="1" lang="zh-TW">
+              <a:rPr sz="3600" b="1" lang="zh-HK">
                 <a:solidFill>
                   <a:srgbClr val="EEDFC7"/>
                 </a:solidFill>
                 <a:latin typeface="PMingLiU"/>
                 <a:ea typeface="PMingLiU"/>
               </a:rPr>
-              <a:t>真實說，也好好聽</a:t>
+              <a:t>真實講，都好好聽</a:t>
             </a:r>
           </a:p>
         </p:txBody>
@@ -13549,7 +13549,7 @@
               </a:spcAft>
             </a:pPr>
             <a:r>
-              <a:rPr sz="9100" b="0" lang="zh-TW">
+              <a:rPr sz="9100" b="0" lang="zh-HK">
                 <a:solidFill>
                   <a:srgbClr val="D8B78F"/>
                 </a:solidFill>
@@ -13595,7 +13595,7 @@
               </a:spcAft>
             </a:pPr>
             <a:r>
-              <a:rPr sz="2100" b="0" lang="zh-TW">
+              <a:rPr sz="2100" b="0" lang="zh-HK">
                 <a:solidFill>
                   <a:srgbClr val="EEDFC7"/>
                 </a:solidFill>
@@ -13644,7 +13644,7 @@
       </p:cxnSp>
       <p:sp>
         <p:nvSpPr>
-          <p:cNvPr id="12" name="Text: 不嘲笑、不打斷，也不急着給答案。"/>
+          <p:cNvPr id="12" name="Text: 唔嘲笑、唔打斷，都唔使急住給答案。"/>
           <p:cNvSpPr txBox="1"/>
           <p:nvPr/>
         </p:nvSpPr>
@@ -13676,14 +13676,14 @@
               </a:spcAft>
             </a:pPr>
             <a:r>
-              <a:rPr sz="2300" b="0" lang="zh-TW">
+              <a:rPr sz="2300" b="0" lang="zh-HK">
                 <a:solidFill>
                   <a:srgbClr val="EEDFC7"/>
                 </a:solidFill>
                 <a:latin typeface="Microsoft JhengHei"/>
                 <a:ea typeface="Microsoft JhengHei"/>
               </a:rPr>
-              <a:t>不嘲笑、不打斷，也不急着給答案。</a:t>
+              <a:t>唔嘲笑、唔打斷，都唔使急住給答案。</a:t>
             </a:r>
           </a:p>
         </p:txBody>
@@ -13725,7 +13725,7 @@
       </p:cxnSp>
       <p:sp>
         <p:nvSpPr>
-          <p:cNvPr id="14" name="Text: 不用透露私密經歷；不想說也可以。"/>
+          <p:cNvPr id="14" name="Text: 唔用透露私密經歷；唔想講都可以。"/>
           <p:cNvSpPr txBox="1"/>
           <p:nvPr/>
         </p:nvSpPr>
@@ -13757,14 +13757,14 @@
               </a:spcAft>
             </a:pPr>
             <a:r>
-              <a:rPr sz="2300" b="0" lang="zh-TW">
+              <a:rPr sz="2300" b="0" lang="zh-HK">
                 <a:solidFill>
                   <a:srgbClr val="EEDFC7"/>
                 </a:solidFill>
                 <a:latin typeface="Microsoft JhengHei"/>
                 <a:ea typeface="Microsoft JhengHei"/>
               </a:rPr>
-              <a:t>不用透露私密經歷；不想說也可以。</a:t>
+              <a:t>唔用透露私密經歷；唔想講都可以。</a:t>
             </a:r>
           </a:p>
         </p:txBody>
@@ -13806,7 +13806,7 @@
       </p:cxnSp>
       <p:sp>
         <p:nvSpPr>
-          <p:cNvPr id="16" name="Text: 讓每個人，都有被聆聽的空間。"/>
+          <p:cNvPr id="16" name="Text: 等每個人，都有被聆聽嘅空間。"/>
           <p:cNvSpPr txBox="1"/>
           <p:nvPr/>
         </p:nvSpPr>
@@ -13838,14 +13838,14 @@
               </a:spcAft>
             </a:pPr>
             <a:r>
-              <a:rPr sz="2300" b="0" lang="zh-TW">
+              <a:rPr sz="2300" b="0" lang="zh-HK">
                 <a:solidFill>
                   <a:srgbClr val="EEDFC7"/>
                 </a:solidFill>
                 <a:latin typeface="Microsoft JhengHei"/>
                 <a:ea typeface="Microsoft JhengHei"/>
               </a:rPr>
-              <a:t>讓每個人，都有被聆聽的空間。</a:t>
+              <a:t>等每個人，都有被聆聽嘅空間。</a:t>
             </a:r>
           </a:p>
         </p:txBody>
@@ -13884,7 +13884,7 @@
               </a:spcAft>
             </a:pPr>
             <a:r>
-              <a:rPr sz="1800" b="0" lang="zh-TW">
+              <a:rPr sz="1800" b="0" lang="zh-HK">
                 <a:solidFill>
                   <a:srgbClr val="CFC0A9"/>
                 </a:solidFill>
@@ -13924,7 +13924,7 @@
       <p:grpSpPr/>
       <p:sp>
         <p:nvSpPr>
-          <p:cNvPr id="2" name="Text: LIGHT PARTY  /  青少年團契"/>
+          <p:cNvPr id="2" name="Text: 光明派對  /  青少年團契"/>
           <p:cNvSpPr txBox="1"/>
           <p:nvPr/>
         </p:nvSpPr>
@@ -13956,14 +13956,14 @@
               </a:spcAft>
             </a:pPr>
             <a:r>
-              <a:rPr sz="1100" b="0" lang="zh-TW">
+              <a:rPr sz="1100" b="0" lang="zh-HK">
                 <a:solidFill>
                   <a:srgbClr val="6A513D"/>
                 </a:solidFill>
                 <a:latin typeface="Microsoft JhengHei"/>
                 <a:ea typeface="Microsoft JhengHei"/>
               </a:rPr>
-              <a:t>LIGHT PARTY  /  青少年團契</a:t>
+              <a:t>光明派對  /  青少年團契</a:t>
             </a:r>
           </a:p>
         </p:txBody>
@@ -14002,7 +14002,7 @@
               </a:spcAft>
             </a:pPr>
             <a:r>
-              <a:rPr sz="1100" b="0" lang="zh-TW">
+              <a:rPr sz="1100" b="0" lang="zh-HK">
                 <a:solidFill>
                   <a:srgbClr val="6A513D"/>
                 </a:solidFill>
@@ -14118,7 +14118,7 @@
               </a:spcAft>
             </a:pPr>
             <a:r>
-              <a:rPr sz="1000" b="0" lang="zh-TW">
+              <a:rPr sz="1000" b="0" lang="zh-HK">
                 <a:solidFill>
                   <a:srgbClr val="6A513D"/>
                 </a:solidFill>
@@ -14132,7 +14132,7 @@
       </p:sp>
       <p:sp>
         <p:nvSpPr>
-          <p:cNvPr id="7" name="Text: 沒有標準答案，想聽你的真實想法"/>
+          <p:cNvPr id="7" name="Text: 冇標準答案，想聽你嘅真實想法"/>
           <p:cNvSpPr txBox="1"/>
           <p:nvPr/>
         </p:nvSpPr>
@@ -14164,21 +14164,21 @@
               </a:spcAft>
             </a:pPr>
             <a:r>
-              <a:rPr sz="1500" b="1" lang="zh-TW">
+              <a:rPr sz="1500" b="1" lang="zh-HK">
                 <a:solidFill>
                   <a:srgbClr val="804212"/>
                 </a:solidFill>
                 <a:latin typeface="Microsoft JhengHei"/>
                 <a:ea typeface="Microsoft JhengHei"/>
               </a:rPr>
-              <a:t>沒有標準答案，想聽你的真實想法</a:t>
-            </a:r>
-          </a:p>
-        </p:txBody>
-      </p:sp>
-      <p:sp>
-        <p:nvSpPr>
-          <p:cNvPr id="8" name="Text: 你會怎樣選擇？"/>
+              <a:t>冇標準答案，想聽你嘅真實想法</a:t>
+            </a:r>
+          </a:p>
+        </p:txBody>
+      </p:sp>
+      <p:sp>
+        <p:nvSpPr>
+          <p:cNvPr id="8" name="Text: 你會點樣選擇？"/>
           <p:cNvSpPr txBox="1"/>
           <p:nvPr/>
         </p:nvSpPr>
@@ -14210,14 +14210,14 @@
               </a:spcAft>
             </a:pPr>
             <a:r>
-              <a:rPr sz="3600" b="1" lang="zh-TW">
+              <a:rPr sz="3600" b="1" lang="zh-HK">
                 <a:solidFill>
                   <a:srgbClr val="2A1E13"/>
                 </a:solidFill>
                 <a:latin typeface="PMingLiU"/>
                 <a:ea typeface="PMingLiU"/>
               </a:rPr>
-              <a:t>你會怎樣選擇？</a:t>
+              <a:t>你會點樣選擇？</a:t>
             </a:r>
           </a:p>
         </p:txBody>
@@ -14291,7 +14291,7 @@
               </a:spcAft>
             </a:pPr>
             <a:r>
-              <a:rPr sz="1500" b="1" lang="zh-TW">
+              <a:rPr sz="1500" b="1" lang="zh-HK">
                 <a:solidFill>
                   <a:srgbClr val="804212"/>
                 </a:solidFill>
@@ -14305,7 +14305,7 @@
       </p:sp>
       <p:sp>
         <p:nvSpPr>
-          <p:cNvPr id="11" name="Text: 朋友邀請你扮鬼，&#10;你會怎樣回應？"/>
+          <p:cNvPr id="11" name="Text: 朋友邀請你扮鬼，&#10;你會點樣回應？"/>
           <p:cNvSpPr txBox="1"/>
           <p:nvPr/>
         </p:nvSpPr>
@@ -14337,7 +14337,7 @@
               </a:spcAft>
             </a:pPr>
             <a:r>
-              <a:rPr sz="2400" b="1" lang="zh-TW">
+              <a:rPr sz="2400" b="1" lang="zh-HK">
                 <a:solidFill>
                   <a:srgbClr val="2A1E13"/>
                 </a:solidFill>
@@ -14360,21 +14360,21 @@
               </a:spcAft>
             </a:pPr>
             <a:r>
-              <a:rPr sz="2400" b="1" lang="zh-TW">
+              <a:rPr sz="2400" b="1" lang="zh-HK">
                 <a:solidFill>
                   <a:srgbClr val="2A1E13"/>
                 </a:solidFill>
                 <a:latin typeface="PMingLiU"/>
                 <a:ea typeface="PMingLiU"/>
               </a:rPr>
-              <a:t>你會怎樣回應？</a:t>
-            </a:r>
-          </a:p>
-        </p:txBody>
-      </p:sp>
-      <p:sp>
-        <p:nvSpPr>
-          <p:cNvPr id="12" name="Text: 最擔心被取笑、被排斥，&#10;還是不知道怎樣說不？"/>
+              <a:t>你會點樣回應？</a:t>
+            </a:r>
+          </a:p>
+        </p:txBody>
+      </p:sp>
+      <p:sp>
+        <p:nvSpPr>
+          <p:cNvPr id="12" name="Text: 最擔心被取笑、被排斥，&#10;仲係唔知道點樣講唔？"/>
           <p:cNvSpPr txBox="1"/>
           <p:nvPr/>
         </p:nvSpPr>
@@ -14406,7 +14406,7 @@
               </a:spcAft>
             </a:pPr>
             <a:r>
-              <a:rPr sz="1800" b="0" lang="zh-TW">
+              <a:rPr sz="1800" b="0" lang="zh-HK">
                 <a:solidFill>
                   <a:srgbClr val="6A513D"/>
                 </a:solidFill>
@@ -14429,14 +14429,14 @@
               </a:spcAft>
             </a:pPr>
             <a:r>
-              <a:rPr sz="1800" b="0" lang="zh-TW">
+              <a:rPr sz="1800" b="0" lang="zh-HK">
                 <a:solidFill>
                   <a:srgbClr val="6A513D"/>
                 </a:solidFill>
                 <a:latin typeface="Microsoft JhengHei"/>
                 <a:ea typeface="Microsoft JhengHei"/>
               </a:rPr>
-              <a:t>還是不知道怎樣說不？</a:t>
+              <a:t>仲係唔知道點樣講唔？</a:t>
             </a:r>
           </a:p>
         </p:txBody>
@@ -14510,7 +14510,7 @@
               </a:spcAft>
             </a:pPr>
             <a:r>
-              <a:rPr sz="1500" b="1" lang="zh-TW">
+              <a:rPr sz="1500" b="1" lang="zh-HK">
                 <a:solidFill>
                   <a:srgbClr val="804212"/>
                 </a:solidFill>
@@ -14556,7 +14556,7 @@
               </a:spcAft>
             </a:pPr>
             <a:r>
-              <a:rPr sz="2400" b="1" lang="zh-TW">
+              <a:rPr sz="2400" b="1" lang="zh-HK">
                 <a:solidFill>
                   <a:srgbClr val="2A1E13"/>
                 </a:solidFill>
@@ -14579,7 +14579,7 @@
               </a:spcAft>
             </a:pPr>
             <a:r>
-              <a:rPr sz="2400" b="1" lang="zh-TW">
+              <a:rPr sz="2400" b="1" lang="zh-HK">
                 <a:solidFill>
                   <a:srgbClr val="2A1E13"/>
                 </a:solidFill>
@@ -14593,7 +14593,7 @@
       </p:sp>
       <p:sp>
         <p:nvSpPr>
-          <p:cNvPr id="16" name="Text: 商家怎樣包裝節日？&#10;哪些有趣，哪些讓你不安？"/>
+          <p:cNvPr id="16" name="Text: 商家點樣包裝節日？&#10;哪些有趣，哪些等你唔安？"/>
           <p:cNvSpPr txBox="1"/>
           <p:nvPr/>
         </p:nvSpPr>
@@ -14625,14 +14625,14 @@
               </a:spcAft>
             </a:pPr>
             <a:r>
-              <a:rPr sz="1800" b="0" lang="zh-TW">
+              <a:rPr sz="1800" b="0" lang="zh-HK">
                 <a:solidFill>
                   <a:srgbClr val="6A513D"/>
                 </a:solidFill>
                 <a:latin typeface="Microsoft JhengHei"/>
                 <a:ea typeface="Microsoft JhengHei"/>
               </a:rPr>
-              <a:t>商家怎樣包裝節日？</a:t>
+              <a:t>商家點樣包裝節日？</a:t>
             </a:r>
           </a:p>
           <a:p>
@@ -14648,14 +14648,14 @@
               </a:spcAft>
             </a:pPr>
             <a:r>
-              <a:rPr sz="1800" b="0" lang="zh-TW">
+              <a:rPr sz="1800" b="0" lang="zh-HK">
                 <a:solidFill>
                   <a:srgbClr val="6A513D"/>
                 </a:solidFill>
                 <a:latin typeface="Microsoft JhengHei"/>
                 <a:ea typeface="Microsoft JhengHei"/>
               </a:rPr>
-              <a:t>哪些有趣，哪些讓你不安？</a:t>
+              <a:t>哪些有趣，哪些等你唔安？</a:t>
             </a:r>
           </a:p>
         </p:txBody>
@@ -14729,7 +14729,7 @@
               </a:spcAft>
             </a:pPr>
             <a:r>
-              <a:rPr sz="1500" b="1" lang="zh-TW">
+              <a:rPr sz="1500" b="1" lang="zh-HK">
                 <a:solidFill>
                   <a:srgbClr val="804212"/>
                 </a:solidFill>
@@ -14743,7 +14743,7 @@
       </p:sp>
       <p:sp>
         <p:nvSpPr>
-          <p:cNvPr id="19" name="Text: 如果不扮鬼，&#10;可以一起做甚麼？"/>
+          <p:cNvPr id="19" name="Text: 如果唔扮鬼，&#10;可以一起做乜嘢？"/>
           <p:cNvSpPr txBox="1"/>
           <p:nvPr/>
         </p:nvSpPr>
@@ -14775,14 +14775,14 @@
               </a:spcAft>
             </a:pPr>
             <a:r>
-              <a:rPr sz="2400" b="1" lang="zh-TW">
+              <a:rPr sz="2400" b="1" lang="zh-HK">
                 <a:solidFill>
                   <a:srgbClr val="2A1E13"/>
                 </a:solidFill>
                 <a:latin typeface="PMingLiU"/>
                 <a:ea typeface="PMingLiU"/>
               </a:rPr>
-              <a:t>如果不扮鬼，</a:t>
+              <a:t>如果唔扮鬼，</a:t>
             </a:r>
           </a:p>
           <a:p>
@@ -14798,21 +14798,21 @@
               </a:spcAft>
             </a:pPr>
             <a:r>
-              <a:rPr sz="2400" b="1" lang="zh-TW">
+              <a:rPr sz="2400" b="1" lang="zh-HK">
                 <a:solidFill>
                   <a:srgbClr val="2A1E13"/>
                 </a:solidFill>
                 <a:latin typeface="PMingLiU"/>
                 <a:ea typeface="PMingLiU"/>
               </a:rPr>
-              <a:t>可以一起做甚麼？</a:t>
-            </a:r>
-          </a:p>
-        </p:txBody>
-      </p:sp>
-      <p:sp>
-        <p:nvSpPr>
-          <p:cNvPr id="20" name="Text: 想一個有意義、又好玩的&#10;替代活動。"/>
+              <a:t>可以一起做乜嘢？</a:t>
+            </a:r>
+          </a:p>
+        </p:txBody>
+      </p:sp>
+      <p:sp>
+        <p:nvSpPr>
+          <p:cNvPr id="20" name="Text: 想一個有意義、又好玩嘅&#10;替代活動。"/>
           <p:cNvSpPr txBox="1"/>
           <p:nvPr/>
         </p:nvSpPr>
@@ -14844,14 +14844,14 @@
               </a:spcAft>
             </a:pPr>
             <a:r>
-              <a:rPr sz="1800" b="0" lang="zh-TW">
+              <a:rPr sz="1800" b="0" lang="zh-HK">
                 <a:solidFill>
                   <a:srgbClr val="6A513D"/>
                 </a:solidFill>
                 <a:latin typeface="Microsoft JhengHei"/>
                 <a:ea typeface="Microsoft JhengHei"/>
               </a:rPr>
-              <a:t>想一個有意義、又好玩的</a:t>
+              <a:t>想一個有意義、又好玩嘅</a:t>
             </a:r>
           </a:p>
           <a:p>
@@ -14867,7 +14867,7 @@
               </a:spcAft>
             </a:pPr>
             <a:r>
-              <a:rPr sz="1800" b="0" lang="zh-TW">
+              <a:rPr sz="1800" b="0" lang="zh-HK">
                 <a:solidFill>
                   <a:srgbClr val="6A513D"/>
                 </a:solidFill>
@@ -14881,7 +14881,7 @@
       </p:sp>
       <p:sp>
         <p:nvSpPr>
-          <p:cNvPr id="21" name="Text: 每人都有機會說；一起找可行的選擇，不急着下判斷。"/>
+          <p:cNvPr id="21" name="Text: 每人都有機會講；一起搵可行嘅選擇，唔使急住下判斷。"/>
           <p:cNvSpPr txBox="1"/>
           <p:nvPr/>
         </p:nvSpPr>
@@ -14913,14 +14913,14 @@
               </a:spcAft>
             </a:pPr>
             <a:r>
-              <a:rPr sz="1600" b="0" lang="zh-TW">
+              <a:rPr sz="1600" b="0" lang="zh-HK">
                 <a:solidFill>
                   <a:srgbClr val="6A513D"/>
                 </a:solidFill>
                 <a:latin typeface="Microsoft JhengHei"/>
                 <a:ea typeface="Microsoft JhengHei"/>
               </a:rPr>
-              <a:t>每人都有機會說；一起找可行的選擇，不急着下判斷。</a:t>
+              <a:t>每人都有機會講；一起搵可行嘅選擇，唔使急住下判斷。</a:t>
             </a:r>
           </a:p>
         </p:txBody>
@@ -14953,7 +14953,7 @@
       <p:grpSpPr/>
       <p:sp>
         <p:nvSpPr>
-          <p:cNvPr id="2" name="Text: LIGHT PARTY  /  青少年團契"/>
+          <p:cNvPr id="2" name="Text: 光明派對  /  青少年團契"/>
           <p:cNvSpPr txBox="1"/>
           <p:nvPr/>
         </p:nvSpPr>
@@ -14985,14 +14985,14 @@
               </a:spcAft>
             </a:pPr>
             <a:r>
-              <a:rPr sz="1100" b="0" lang="zh-TW">
+              <a:rPr sz="1100" b="0" lang="zh-HK">
                 <a:solidFill>
                   <a:srgbClr val="CFC0A9"/>
                 </a:solidFill>
                 <a:latin typeface="Microsoft JhengHei"/>
                 <a:ea typeface="Microsoft JhengHei"/>
               </a:rPr>
-              <a:t>LIGHT PARTY  /  青少年團契</a:t>
+              <a:t>光明派對  /  青少年團契</a:t>
             </a:r>
           </a:p>
         </p:txBody>
@@ -15031,7 +15031,7 @@
               </a:spcAft>
             </a:pPr>
             <a:r>
-              <a:rPr sz="1100" b="0" lang="zh-TW">
+              <a:rPr sz="1100" b="0" lang="zh-HK">
                 <a:solidFill>
                   <a:srgbClr val="CFC0A9"/>
                 </a:solidFill>
@@ -15147,7 +15147,7 @@
               </a:spcAft>
             </a:pPr>
             <a:r>
-              <a:rPr sz="1000" b="0" lang="zh-TW">
+              <a:rPr sz="1000" b="0" lang="zh-HK">
                 <a:solidFill>
                   <a:srgbClr val="CFC0A9"/>
                 </a:solidFill>
@@ -15193,7 +15193,7 @@
               </a:spcAft>
             </a:pPr>
             <a:r>
-              <a:rPr sz="1800" b="0" lang="zh-TW">
+              <a:rPr sz="1800" b="0" lang="zh-HK">
                 <a:solidFill>
                   <a:srgbClr val="D8B78F"/>
                 </a:solidFill>
@@ -15239,7 +15239,7 @@
               </a:spcAft>
             </a:pPr>
             <a:r>
-              <a:rPr sz="3500" b="0" lang="zh-TW">
+              <a:rPr sz="3500" b="0" lang="zh-HK">
                 <a:solidFill>
                   <a:srgbClr val="EEDFC7"/>
                 </a:solidFill>
@@ -15262,7 +15262,7 @@
               </a:spcAft>
             </a:pPr>
             <a:r>
-              <a:rPr sz="3500" b="0" lang="zh-TW">
+              <a:rPr sz="3500" b="0" lang="zh-HK">
                 <a:solidFill>
                   <a:srgbClr val="EEDFC7"/>
                 </a:solidFill>
@@ -15285,7 +15285,7 @@
               </a:spcAft>
             </a:pPr>
             <a:r>
-              <a:rPr sz="3500" b="0" lang="zh-TW">
+              <a:rPr sz="3500" b="0" lang="zh-HK">
                 <a:solidFill>
                   <a:srgbClr val="EEDFC7"/>
                 </a:solidFill>
@@ -15308,7 +15308,7 @@
               </a:spcAft>
             </a:pPr>
             <a:r>
-              <a:rPr sz="3500" b="0" lang="zh-TW">
+              <a:rPr sz="3500" b="0" lang="zh-HK">
                 <a:solidFill>
                   <a:srgbClr val="EEDFC7"/>
                 </a:solidFill>
@@ -15322,7 +15322,7 @@
       </p:sp>
       <p:sp>
         <p:nvSpPr>
-          <p:cNvPr id="9" name="Text: 兩人一組練習，再交換角色。可以改成自己的說話方式。"/>
+          <p:cNvPr id="9" name="Text: 兩人一組練習，再交換角色。可以改成自己嘅講嘢方式。"/>
           <p:cNvSpPr txBox="1"/>
           <p:nvPr/>
         </p:nvSpPr>
@@ -15354,14 +15354,14 @@
               </a:spcAft>
             </a:pPr>
             <a:r>
-              <a:rPr sz="2100" b="0" lang="zh-TW">
+              <a:rPr sz="2100" b="0" lang="zh-HK">
                 <a:solidFill>
                   <a:srgbClr val="CFC0A9"/>
                 </a:solidFill>
                 <a:latin typeface="Microsoft JhengHei"/>
                 <a:ea typeface="Microsoft JhengHei"/>
               </a:rPr>
-              <a:t>兩人一組練習，再交換角色。可以改成自己的說話方式。</a:t>
+              <a:t>兩人一組練習，再交換角色。可以改成自己嘅講嘢方式。</a:t>
             </a:r>
           </a:p>
         </p:txBody>
@@ -15394,7 +15394,7 @@
       <p:grpSpPr/>
       <p:sp>
         <p:nvSpPr>
-          <p:cNvPr id="2" name="Text: LIGHT PARTY  /  青少年團契"/>
+          <p:cNvPr id="2" name="Text: 光明派對  /  青少年團契"/>
           <p:cNvSpPr txBox="1"/>
           <p:nvPr/>
         </p:nvSpPr>
@@ -15426,14 +15426,14 @@
               </a:spcAft>
             </a:pPr>
             <a:r>
-              <a:rPr sz="1100" b="0" lang="zh-TW">
+              <a:rPr sz="1100" b="0" lang="zh-HK">
                 <a:solidFill>
                   <a:srgbClr val="6A513D"/>
                 </a:solidFill>
                 <a:latin typeface="Microsoft JhengHei"/>
                 <a:ea typeface="Microsoft JhengHei"/>
               </a:rPr>
-              <a:t>LIGHT PARTY  /  青少年團契</a:t>
+              <a:t>光明派對  /  青少年團契</a:t>
             </a:r>
           </a:p>
         </p:txBody>
@@ -15472,7 +15472,7 @@
               </a:spcAft>
             </a:pPr>
             <a:r>
-              <a:rPr sz="1100" b="0" lang="zh-TW">
+              <a:rPr sz="1100" b="0" lang="zh-HK">
                 <a:solidFill>
                   <a:srgbClr val="6A513D"/>
                 </a:solidFill>
@@ -15588,7 +15588,7 @@
               </a:spcAft>
             </a:pPr>
             <a:r>
-              <a:rPr sz="1000" b="0" lang="zh-TW">
+              <a:rPr sz="1000" b="0" lang="zh-HK">
                 <a:solidFill>
                   <a:srgbClr val="6A513D"/>
                 </a:solidFill>
@@ -15602,7 +15602,7 @@
       </p:sp>
       <p:sp>
         <p:nvSpPr>
-          <p:cNvPr id="7" name="Text: TODAY'S ROUTE"/>
+          <p:cNvPr id="7" name="Text: 今日流程"/>
           <p:cNvSpPr txBox="1"/>
           <p:nvPr/>
         </p:nvSpPr>
@@ -15634,14 +15634,14 @@
               </a:spcAft>
             </a:pPr>
             <a:r>
-              <a:rPr sz="1500" b="1" lang="zh-TW">
+              <a:rPr sz="1500" b="1" lang="zh-HK">
                 <a:solidFill>
                   <a:srgbClr val="804212"/>
                 </a:solidFill>
                 <a:latin typeface="Microsoft JhengHei"/>
                 <a:ea typeface="Microsoft JhengHei"/>
               </a:rPr>
-              <a:t>TODAY'S ROUTE</a:t>
+              <a:t>今日流程</a:t>
             </a:r>
           </a:p>
         </p:txBody>
@@ -15680,7 +15680,7 @@
               </a:spcAft>
             </a:pPr>
             <a:r>
-              <a:rPr sz="3600" b="1" lang="zh-TW">
+              <a:rPr sz="3600" b="1" lang="zh-HK">
                 <a:solidFill>
                   <a:srgbClr val="2A1E13"/>
                 </a:solidFill>
@@ -15761,7 +15761,7 @@
               </a:spcAft>
             </a:pPr>
             <a:r>
-              <a:rPr sz="2100" b="1" lang="zh-TW">
+              <a:rPr sz="2100" b="1" lang="zh-HK">
                 <a:solidFill>
                   <a:srgbClr val="804212"/>
                 </a:solidFill>
@@ -15807,7 +15807,7 @@
               </a:spcAft>
             </a:pPr>
             <a:r>
-              <a:rPr sz="2100" b="1" lang="zh-TW">
+              <a:rPr sz="2100" b="1" lang="zh-HK">
                 <a:solidFill>
                   <a:srgbClr val="2A1E13"/>
                 </a:solidFill>
@@ -15853,7 +15853,7 @@
               </a:spcAft>
             </a:pPr>
             <a:r>
-              <a:rPr sz="1900" b="0" lang="zh-TW">
+              <a:rPr sz="1900" b="0" lang="zh-HK">
                 <a:solidFill>
                   <a:srgbClr val="6A513D"/>
                 </a:solidFill>
@@ -15934,7 +15934,7 @@
               </a:spcAft>
             </a:pPr>
             <a:r>
-              <a:rPr sz="2100" b="1" lang="zh-TW">
+              <a:rPr sz="2100" b="1" lang="zh-HK">
                 <a:solidFill>
                   <a:srgbClr val="804212"/>
                 </a:solidFill>
@@ -15980,7 +15980,7 @@
               </a:spcAft>
             </a:pPr>
             <a:r>
-              <a:rPr sz="2100" b="1" lang="zh-TW">
+              <a:rPr sz="2100" b="1" lang="zh-HK">
                 <a:solidFill>
                   <a:srgbClr val="2A1E13"/>
                 </a:solidFill>
@@ -15994,7 +15994,7 @@
       </p:sp>
       <p:sp>
         <p:nvSpPr>
-          <p:cNvPr id="16" name="Text: 歷史背景與三個信仰視角"/>
+          <p:cNvPr id="16" name="Text: 歷史背景同三個信仰視角"/>
           <p:cNvSpPr txBox="1"/>
           <p:nvPr/>
         </p:nvSpPr>
@@ -16026,14 +16026,14 @@
               </a:spcAft>
             </a:pPr>
             <a:r>
-              <a:rPr sz="1900" b="0" lang="zh-TW">
+              <a:rPr sz="1900" b="0" lang="zh-HK">
                 <a:solidFill>
                   <a:srgbClr val="6A513D"/>
                 </a:solidFill>
                 <a:latin typeface="Microsoft JhengHei"/>
                 <a:ea typeface="Microsoft JhengHei"/>
               </a:rPr>
-              <a:t>歷史背景與三個信仰視角</a:t>
+              <a:t>歷史背景同三個信仰視角</a:t>
             </a:r>
           </a:p>
         </p:txBody>
@@ -16107,7 +16107,7 @@
               </a:spcAft>
             </a:pPr>
             <a:r>
-              <a:rPr sz="2100" b="1" lang="zh-TW">
+              <a:rPr sz="2100" b="1" lang="zh-HK">
                 <a:solidFill>
                   <a:srgbClr val="804212"/>
                 </a:solidFill>
@@ -16153,7 +16153,7 @@
               </a:spcAft>
             </a:pPr>
             <a:r>
-              <a:rPr sz="2100" b="1" lang="zh-TW">
+              <a:rPr sz="2100" b="1" lang="zh-HK">
                 <a:solidFill>
                   <a:srgbClr val="2A1E13"/>
                 </a:solidFill>
@@ -16167,7 +16167,7 @@
       </p:sp>
       <p:sp>
         <p:nvSpPr>
-          <p:cNvPr id="20" name="Text: 同儕壓力、文化與選擇"/>
+          <p:cNvPr id="20" name="Text: 同儕壓力、文化同選擇"/>
           <p:cNvSpPr txBox="1"/>
           <p:nvPr/>
         </p:nvSpPr>
@@ -16199,14 +16199,14 @@
               </a:spcAft>
             </a:pPr>
             <a:r>
-              <a:rPr sz="1900" b="0" lang="zh-TW">
+              <a:rPr sz="1900" b="0" lang="zh-HK">
                 <a:solidFill>
                   <a:srgbClr val="6A513D"/>
                 </a:solidFill>
                 <a:latin typeface="Microsoft JhengHei"/>
                 <a:ea typeface="Microsoft JhengHei"/>
               </a:rPr>
-              <a:t>同儕壓力、文化與選擇</a:t>
+              <a:t>同儕壓力、文化同選擇</a:t>
             </a:r>
           </a:p>
         </p:txBody>
@@ -16280,7 +16280,7 @@
               </a:spcAft>
             </a:pPr>
             <a:r>
-              <a:rPr sz="2100" b="1" lang="zh-TW">
+              <a:rPr sz="2100" b="1" lang="zh-HK">
                 <a:solidFill>
                   <a:srgbClr val="804212"/>
                 </a:solidFill>
@@ -16294,7 +16294,7 @@
       </p:sp>
       <p:sp>
         <p:nvSpPr>
-          <p:cNvPr id="23" name="Text: 回應與禱告"/>
+          <p:cNvPr id="23" name="Text: 回應同禱告"/>
           <p:cNvSpPr txBox="1"/>
           <p:nvPr/>
         </p:nvSpPr>
@@ -16326,21 +16326,21 @@
               </a:spcAft>
             </a:pPr>
             <a:r>
-              <a:rPr sz="2100" b="1" lang="zh-TW">
+              <a:rPr sz="2100" b="1" lang="zh-HK">
                 <a:solidFill>
                   <a:srgbClr val="2A1E13"/>
                 </a:solidFill>
                 <a:latin typeface="PMingLiU"/>
                 <a:ea typeface="PMingLiU"/>
               </a:rPr>
-              <a:t>回應與禱告</a:t>
-            </a:r>
-          </a:p>
-        </p:txBody>
-      </p:sp>
-      <p:sp>
-        <p:nvSpPr>
-          <p:cNvPr id="24" name="Text: 經文總結、默想與彼此代禱"/>
+              <a:t>回應同禱告</a:t>
+            </a:r>
+          </a:p>
+        </p:txBody>
+      </p:sp>
+      <p:sp>
+        <p:nvSpPr>
+          <p:cNvPr id="24" name="Text: 經文總結、默想同彼此代禱"/>
           <p:cNvSpPr txBox="1"/>
           <p:nvPr/>
         </p:nvSpPr>
@@ -16372,14 +16372,14 @@
               </a:spcAft>
             </a:pPr>
             <a:r>
-              <a:rPr sz="1900" b="0" lang="zh-TW">
+              <a:rPr sz="1900" b="0" lang="zh-HK">
                 <a:solidFill>
                   <a:srgbClr val="6A513D"/>
                 </a:solidFill>
                 <a:latin typeface="Microsoft JhengHei"/>
                 <a:ea typeface="Microsoft JhengHei"/>
               </a:rPr>
-              <a:t>經文總結、默想與彼此代禱</a:t>
+              <a:t>經文總結、默想同彼此代禱</a:t>
             </a:r>
           </a:p>
         </p:txBody>
@@ -16453,7 +16453,7 @@
               </a:spcAft>
             </a:pPr>
             <a:r>
-              <a:rPr sz="2100" b="1" lang="zh-TW">
+              <a:rPr sz="2100" b="1" lang="zh-HK">
                 <a:solidFill>
                   <a:srgbClr val="804212"/>
                 </a:solidFill>
@@ -16499,7 +16499,7 @@
               </a:spcAft>
             </a:pPr>
             <a:r>
-              <a:rPr sz="2100" b="1" lang="zh-TW">
+              <a:rPr sz="2100" b="1" lang="zh-HK">
                 <a:solidFill>
                   <a:srgbClr val="2A1E13"/>
                 </a:solidFill>
@@ -16513,7 +16513,7 @@
       </p:sp>
       <p:sp>
         <p:nvSpPr>
-          <p:cNvPr id="28" name="Text: 點心交流、光明禮包與祝福卡"/>
+          <p:cNvPr id="28" name="Text: 點心交流、光明禮包同祝福卡"/>
           <p:cNvSpPr txBox="1"/>
           <p:nvPr/>
         </p:nvSpPr>
@@ -16545,21 +16545,21 @@
               </a:spcAft>
             </a:pPr>
             <a:r>
-              <a:rPr sz="1900" b="0" lang="zh-TW">
+              <a:rPr sz="1900" b="0" lang="zh-HK">
                 <a:solidFill>
                   <a:srgbClr val="6A513D"/>
                 </a:solidFill>
                 <a:latin typeface="Microsoft JhengHei"/>
                 <a:ea typeface="Microsoft JhengHei"/>
               </a:rPr>
-              <a:t>點心交流、光明禮包與祝福卡</a:t>
-            </a:r>
-          </a:p>
-        </p:txBody>
-      </p:sp>
-      <p:sp>
-        <p:nvSpPr>
-          <p:cNvPr id="29" name="Text: 現場 60 分鐘｜逐頁計畫 54 分鐘＋6 分鐘彈性"/>
+              <a:t>點心交流、光明禮包同祝福卡</a:t>
+            </a:r>
+          </a:p>
+        </p:txBody>
+      </p:sp>
+      <p:sp>
+        <p:nvSpPr>
+          <p:cNvPr id="29" name="Text: 現場 60 分鐘｜逐頁安排 54 分鐘＋6 分鐘彈性"/>
           <p:cNvSpPr txBox="1"/>
           <p:nvPr/>
         </p:nvSpPr>
@@ -16591,14 +16591,14 @@
               </a:spcAft>
             </a:pPr>
             <a:r>
-              <a:rPr sz="1400" b="0" lang="zh-TW">
+              <a:rPr sz="1400" b="0" lang="zh-HK">
                 <a:solidFill>
                   <a:srgbClr val="6A513D"/>
                 </a:solidFill>
                 <a:latin typeface="Microsoft JhengHei"/>
                 <a:ea typeface="Microsoft JhengHei"/>
               </a:rPr>
-              <a:t>現場 60 分鐘｜逐頁計畫 54 分鐘＋6 分鐘彈性</a:t>
+              <a:t>現場 60 分鐘｜逐頁安排 54 分鐘＋6 分鐘彈性</a:t>
             </a:r>
           </a:p>
         </p:txBody>
@@ -16631,7 +16631,7 @@
       <p:grpSpPr/>
       <p:sp>
         <p:nvSpPr>
-          <p:cNvPr id="2" name="Text: LIGHT PARTY  /  青少年團契"/>
+          <p:cNvPr id="2" name="Text: 光明派對  /  青少年團契"/>
           <p:cNvSpPr txBox="1"/>
           <p:nvPr/>
         </p:nvSpPr>
@@ -16663,14 +16663,14 @@
               </a:spcAft>
             </a:pPr>
             <a:r>
-              <a:rPr sz="1100" b="0" lang="zh-TW">
+              <a:rPr sz="1100" b="0" lang="zh-HK">
                 <a:solidFill>
                   <a:srgbClr val="6A513D"/>
                 </a:solidFill>
                 <a:latin typeface="Microsoft JhengHei"/>
                 <a:ea typeface="Microsoft JhengHei"/>
               </a:rPr>
-              <a:t>LIGHT PARTY  /  青少年團契</a:t>
+              <a:t>光明派對  /  青少年團契</a:t>
             </a:r>
           </a:p>
         </p:txBody>
@@ -16709,7 +16709,7 @@
               </a:spcAft>
             </a:pPr>
             <a:r>
-              <a:rPr sz="1100" b="0" lang="zh-TW">
+              <a:rPr sz="1100" b="0" lang="zh-HK">
                 <a:solidFill>
                   <a:srgbClr val="6A513D"/>
                 </a:solidFill>
@@ -16793,7 +16793,7 @@
       </p:cxnSp>
       <p:sp>
         <p:nvSpPr>
-          <p:cNvPr id="6" name="Text: 回應與禱告｜40–50 分鐘"/>
+          <p:cNvPr id="6" name="Text: 回應同禱告｜40–50 分鐘"/>
           <p:cNvSpPr txBox="1"/>
           <p:nvPr/>
         </p:nvSpPr>
@@ -16825,21 +16825,21 @@
               </a:spcAft>
             </a:pPr>
             <a:r>
-              <a:rPr sz="1000" b="0" lang="zh-TW">
+              <a:rPr sz="1000" b="0" lang="zh-HK">
                 <a:solidFill>
                   <a:srgbClr val="6A513D"/>
                 </a:solidFill>
                 <a:latin typeface="Microsoft JhengHei"/>
                 <a:ea typeface="Microsoft JhengHei"/>
               </a:rPr>
-              <a:t>回應與禱告｜40–50 分鐘</a:t>
-            </a:r>
-          </a:p>
-        </p:txBody>
-      </p:sp>
-      <p:sp>
-        <p:nvSpPr>
-          <p:cNvPr id="7" name="Text: 我們可以作出正面的選擇。"/>
+              <a:t>回應同禱告｜40–50 分鐘</a:t>
+            </a:r>
+          </a:p>
+        </p:txBody>
+      </p:sp>
+      <p:sp>
+        <p:nvSpPr>
+          <p:cNvPr id="7" name="Text: 我哋可以做出正面嘅選擇。"/>
           <p:cNvSpPr txBox="1"/>
           <p:nvPr/>
         </p:nvSpPr>
@@ -16871,21 +16871,21 @@
               </a:spcAft>
             </a:pPr>
             <a:r>
-              <a:rPr sz="1900" b="0" lang="zh-TW">
+              <a:rPr sz="1900" b="0" lang="zh-HK">
                 <a:solidFill>
                   <a:srgbClr val="804212"/>
                 </a:solidFill>
                 <a:latin typeface="Microsoft JhengHei"/>
                 <a:ea typeface="Microsoft JhengHei"/>
               </a:rPr>
-              <a:t>我們可以作出正面的選擇。</a:t>
-            </a:r>
-          </a:p>
-        </p:txBody>
-      </p:sp>
-      <p:sp>
-        <p:nvSpPr>
-          <p:cNvPr id="8" name="Text: 不是少一點樂趣，&#10;是多一點光。"/>
+              <a:t>我哋可以做出正面嘅選擇。</a:t>
+            </a:r>
+          </a:p>
+        </p:txBody>
+      </p:sp>
+      <p:sp>
+        <p:nvSpPr>
+          <p:cNvPr id="8" name="Text: 唔係少一點樂趣，&#10;係多一點光。"/>
           <p:cNvSpPr txBox="1"/>
           <p:nvPr/>
         </p:nvSpPr>
@@ -16917,14 +16917,14 @@
               </a:spcAft>
             </a:pPr>
             <a:r>
-              <a:rPr sz="5500" b="1" lang="zh-TW">
+              <a:rPr sz="5500" b="1" lang="zh-HK">
                 <a:solidFill>
                   <a:srgbClr val="2A1E13"/>
                 </a:solidFill>
                 <a:latin typeface="PMingLiU"/>
                 <a:ea typeface="PMingLiU"/>
               </a:rPr>
-              <a:t>不是少一點樂趣，</a:t>
+              <a:t>唔係少一點樂趣，</a:t>
             </a:r>
           </a:p>
           <a:p>
@@ -16940,21 +16940,21 @@
               </a:spcAft>
             </a:pPr>
             <a:r>
-              <a:rPr sz="5500" b="1" lang="zh-TW">
+              <a:rPr sz="5500" b="1" lang="zh-HK">
                 <a:solidFill>
                   <a:srgbClr val="2A1E13"/>
                 </a:solidFill>
                 <a:latin typeface="PMingLiU"/>
                 <a:ea typeface="PMingLiU"/>
               </a:rPr>
-              <a:t>是多一點光。</a:t>
-            </a:r>
-          </a:p>
-        </p:txBody>
-      </p:sp>
-      <p:sp>
-        <p:nvSpPr>
-          <p:cNvPr id="9" name="Text: 慶祝生命與和平，讓朋友感到被愛。"/>
+              <a:t>係多一點光。</a:t>
+            </a:r>
+          </a:p>
+        </p:txBody>
+      </p:sp>
+      <p:sp>
+        <p:nvSpPr>
+          <p:cNvPr id="9" name="Text: 慶祝生命同和平，等朋友感到被愛。"/>
           <p:cNvSpPr txBox="1"/>
           <p:nvPr/>
         </p:nvSpPr>
@@ -16986,14 +16986,14 @@
               </a:spcAft>
             </a:pPr>
             <a:r>
-              <a:rPr sz="2700" b="0" lang="zh-TW">
+              <a:rPr sz="2700" b="0" lang="zh-HK">
                 <a:solidFill>
                   <a:srgbClr val="6A513D"/>
                 </a:solidFill>
                 <a:latin typeface="Microsoft JhengHei"/>
                 <a:ea typeface="Microsoft JhengHei"/>
               </a:rPr>
-              <a:t>慶祝生命與和平，讓朋友感到被愛。</a:t>
+              <a:t>慶祝生命同和平，等朋友感到被愛。</a:t>
             </a:r>
           </a:p>
         </p:txBody>
@@ -17026,7 +17026,7 @@
       <p:grpSpPr/>
       <p:sp>
         <p:nvSpPr>
-          <p:cNvPr id="2" name="Text: LIGHT PARTY  /  青少年團契"/>
+          <p:cNvPr id="2" name="Text: 光明派對  /  青少年團契"/>
           <p:cNvSpPr txBox="1"/>
           <p:nvPr/>
         </p:nvSpPr>
@@ -17058,14 +17058,14 @@
               </a:spcAft>
             </a:pPr>
             <a:r>
-              <a:rPr sz="1100" b="0" lang="zh-TW">
+              <a:rPr sz="1100" b="0" lang="zh-HK">
                 <a:solidFill>
                   <a:srgbClr val="CFC0A9"/>
                 </a:solidFill>
                 <a:latin typeface="Microsoft JhengHei"/>
                 <a:ea typeface="Microsoft JhengHei"/>
               </a:rPr>
-              <a:t>LIGHT PARTY  /  青少年團契</a:t>
+              <a:t>光明派對  /  青少年團契</a:t>
             </a:r>
           </a:p>
         </p:txBody>
@@ -17104,7 +17104,7 @@
               </a:spcAft>
             </a:pPr>
             <a:r>
-              <a:rPr sz="1100" b="0" lang="zh-TW">
+              <a:rPr sz="1100" b="0" lang="zh-HK">
                 <a:solidFill>
                   <a:srgbClr val="CFC0A9"/>
                 </a:solidFill>
@@ -17188,7 +17188,7 @@
       </p:cxnSp>
       <p:sp>
         <p:nvSpPr>
-          <p:cNvPr id="6" name="Text: 回應與禱告｜40–50 分鐘"/>
+          <p:cNvPr id="6" name="Text: 回應同禱告｜40–50 分鐘"/>
           <p:cNvSpPr txBox="1"/>
           <p:nvPr/>
         </p:nvSpPr>
@@ -17220,14 +17220,14 @@
               </a:spcAft>
             </a:pPr>
             <a:r>
-              <a:rPr sz="1000" b="0" lang="zh-TW">
+              <a:rPr sz="1000" b="0" lang="zh-HK">
                 <a:solidFill>
                   <a:srgbClr val="CFC0A9"/>
                 </a:solidFill>
                 <a:latin typeface="Microsoft JhengHei"/>
                 <a:ea typeface="Microsoft JhengHei"/>
               </a:rPr>
-              <a:t>回應與禱告｜40–50 分鐘</a:t>
+              <a:t>回應同禱告｜40–50 分鐘</a:t>
             </a:r>
           </a:p>
         </p:txBody>
@@ -17266,7 +17266,7 @@
               </a:spcAft>
             </a:pPr>
             <a:r>
-              <a:rPr sz="1500" b="1" lang="zh-TW">
+              <a:rPr sz="1500" b="1" lang="zh-HK">
                 <a:solidFill>
                   <a:srgbClr val="D8B78F"/>
                 </a:solidFill>
@@ -17312,7 +17312,7 @@
               </a:spcAft>
             </a:pPr>
             <a:r>
-              <a:rPr sz="3600" b="1" lang="zh-TW">
+              <a:rPr sz="3600" b="1" lang="zh-HK">
                 <a:solidFill>
                   <a:srgbClr val="EEDFC7"/>
                 </a:solidFill>
@@ -17393,7 +17393,7 @@
               </a:spcAft>
             </a:pPr>
             <a:r>
-              <a:rPr sz="1500" b="1" lang="zh-TW">
+              <a:rPr sz="1500" b="1" lang="zh-HK">
                 <a:solidFill>
                   <a:srgbClr val="D8B78F"/>
                 </a:solidFill>
@@ -17439,7 +17439,7 @@
               </a:spcAft>
             </a:pPr>
             <a:r>
-              <a:rPr sz="2300" b="1" lang="zh-TW">
+              <a:rPr sz="2300" b="1" lang="zh-HK">
                 <a:solidFill>
                   <a:srgbClr val="EEDFC7"/>
                 </a:solidFill>
@@ -17453,7 +17453,7 @@
       </p:sp>
       <p:sp>
         <p:nvSpPr>
-          <p:cNvPr id="12" name="Text: 帶出生命的光，&#10;讓人看見希望。"/>
+          <p:cNvPr id="12" name="Text: 帶出生命嘅光，&#10;等人看見希望。"/>
           <p:cNvSpPr txBox="1"/>
           <p:nvPr/>
         </p:nvSpPr>
@@ -17485,14 +17485,14 @@
               </a:spcAft>
             </a:pPr>
             <a:r>
-              <a:rPr sz="1800" b="0" lang="zh-TW">
+              <a:rPr sz="1800" b="0" lang="zh-HK">
                 <a:solidFill>
                   <a:srgbClr val="CFC0A9"/>
                 </a:solidFill>
                 <a:latin typeface="Microsoft JhengHei"/>
                 <a:ea typeface="Microsoft JhengHei"/>
               </a:rPr>
-              <a:t>帶出生命的光，</a:t>
+              <a:t>帶出生命嘅光，</a:t>
             </a:r>
           </a:p>
           <a:p>
@@ -17508,14 +17508,14 @@
               </a:spcAft>
             </a:pPr>
             <a:r>
-              <a:rPr sz="1800" b="0" lang="zh-TW">
+              <a:rPr sz="1800" b="0" lang="zh-HK">
                 <a:solidFill>
                   <a:srgbClr val="CFC0A9"/>
                 </a:solidFill>
                 <a:latin typeface="Microsoft JhengHei"/>
                 <a:ea typeface="Microsoft JhengHei"/>
               </a:rPr>
-              <a:t>讓人看見希望。</a:t>
+              <a:t>等人看見希望。</a:t>
             </a:r>
           </a:p>
         </p:txBody>
@@ -17589,7 +17589,7 @@
               </a:spcAft>
             </a:pPr>
             <a:r>
-              <a:rPr sz="1500" b="1" lang="zh-TW">
+              <a:rPr sz="1500" b="1" lang="zh-HK">
                 <a:solidFill>
                   <a:srgbClr val="D8B78F"/>
                 </a:solidFill>
@@ -17635,7 +17635,7 @@
               </a:spcAft>
             </a:pPr>
             <a:r>
-              <a:rPr sz="2300" b="1" lang="zh-TW">
+              <a:rPr sz="2300" b="1" lang="zh-HK">
                 <a:solidFill>
                   <a:srgbClr val="EEDFC7"/>
                 </a:solidFill>
@@ -17649,7 +17649,7 @@
       </p:sp>
       <p:sp>
         <p:nvSpPr>
-          <p:cNvPr id="16" name="Text: 不只跟隨潮流，&#10;學習察驗合宜的選擇。"/>
+          <p:cNvPr id="16" name="Text: 唔只跟隨潮流，&#10;學習察驗合宜嘅選擇。"/>
           <p:cNvSpPr txBox="1"/>
           <p:nvPr/>
         </p:nvSpPr>
@@ -17681,14 +17681,14 @@
               </a:spcAft>
             </a:pPr>
             <a:r>
-              <a:rPr sz="1800" b="0" lang="zh-TW">
+              <a:rPr sz="1800" b="0" lang="zh-HK">
                 <a:solidFill>
                   <a:srgbClr val="CFC0A9"/>
                 </a:solidFill>
                 <a:latin typeface="Microsoft JhengHei"/>
                 <a:ea typeface="Microsoft JhengHei"/>
               </a:rPr>
-              <a:t>不只跟隨潮流，</a:t>
+              <a:t>唔只跟隨潮流，</a:t>
             </a:r>
           </a:p>
           <a:p>
@@ -17704,14 +17704,14 @@
               </a:spcAft>
             </a:pPr>
             <a:r>
-              <a:rPr sz="1800" b="0" lang="zh-TW">
+              <a:rPr sz="1800" b="0" lang="zh-HK">
                 <a:solidFill>
                   <a:srgbClr val="CFC0A9"/>
                 </a:solidFill>
                 <a:latin typeface="Microsoft JhengHei"/>
                 <a:ea typeface="Microsoft JhengHei"/>
               </a:rPr>
-              <a:t>學習察驗合宜的選擇。</a:t>
+              <a:t>學習察驗合宜嘅選擇。</a:t>
             </a:r>
           </a:p>
         </p:txBody>
@@ -17785,7 +17785,7 @@
               </a:spcAft>
             </a:pPr>
             <a:r>
-              <a:rPr sz="1500" b="1" lang="zh-TW">
+              <a:rPr sz="1500" b="1" lang="zh-HK">
                 <a:solidFill>
                   <a:srgbClr val="D8B78F"/>
                 </a:solidFill>
@@ -17831,7 +17831,7 @@
               </a:spcAft>
             </a:pPr>
             <a:r>
-              <a:rPr sz="2300" b="1" lang="zh-TW">
+              <a:rPr sz="2300" b="1" lang="zh-HK">
                 <a:solidFill>
                   <a:srgbClr val="EEDFC7"/>
                 </a:solidFill>
@@ -17845,7 +17845,7 @@
       </p:sp>
       <p:sp>
         <p:nvSpPr>
-          <p:cNvPr id="20" name="Text: 不以恐懼作決定，&#10;也不用敵意回應朋友。"/>
+          <p:cNvPr id="20" name="Text: 唔以恐懼作決定，&#10;都唔用敵意回應朋友。"/>
           <p:cNvSpPr txBox="1"/>
           <p:nvPr/>
         </p:nvSpPr>
@@ -17877,14 +17877,14 @@
               </a:spcAft>
             </a:pPr>
             <a:r>
-              <a:rPr sz="1800" b="0" lang="zh-TW">
+              <a:rPr sz="1800" b="0" lang="zh-HK">
                 <a:solidFill>
                   <a:srgbClr val="CFC0A9"/>
                 </a:solidFill>
                 <a:latin typeface="Microsoft JhengHei"/>
                 <a:ea typeface="Microsoft JhengHei"/>
               </a:rPr>
-              <a:t>不以恐懼作決定，</a:t>
+              <a:t>唔以恐懼作決定，</a:t>
             </a:r>
           </a:p>
           <a:p>
@@ -17900,21 +17900,21 @@
               </a:spcAft>
             </a:pPr>
             <a:r>
-              <a:rPr sz="1800" b="0" lang="zh-TW">
+              <a:rPr sz="1800" b="0" lang="zh-HK">
                 <a:solidFill>
                   <a:srgbClr val="CFC0A9"/>
                 </a:solidFill>
                 <a:latin typeface="Microsoft JhengHei"/>
                 <a:ea typeface="Microsoft JhengHei"/>
               </a:rPr>
-              <a:t>也不用敵意回應朋友。</a:t>
-            </a:r>
-          </a:p>
-        </p:txBody>
-      </p:sp>
-      <p:sp>
-        <p:nvSpPr>
-          <p:cNvPr id="21" name="Text: 今天，我最想實踐哪一句？"/>
+              <a:t>都唔用敵意回應朋友。</a:t>
+            </a:r>
+          </a:p>
+        </p:txBody>
+      </p:sp>
+      <p:sp>
+        <p:nvSpPr>
+          <p:cNvPr id="21" name="Text: 今日，我最想實踐哪一句？"/>
           <p:cNvSpPr txBox="1"/>
           <p:nvPr/>
         </p:nvSpPr>
@@ -17946,14 +17946,14 @@
               </a:spcAft>
             </a:pPr>
             <a:r>
-              <a:rPr sz="2800" b="0" lang="zh-TW">
+              <a:rPr sz="2800" b="0" lang="zh-HK">
                 <a:solidFill>
                   <a:srgbClr val="D8B78F"/>
                 </a:solidFill>
                 <a:latin typeface="PMingLiU"/>
                 <a:ea typeface="PMingLiU"/>
               </a:rPr>
-              <a:t>今天，我最想實踐哪一句？</a:t>
+              <a:t>今日，我最想實踐哪一句？</a:t>
             </a:r>
           </a:p>
         </p:txBody>
@@ -17986,7 +17986,7 @@
       <p:grpSpPr/>
       <p:sp>
         <p:nvSpPr>
-          <p:cNvPr id="2" name="Text: LIGHT PARTY  /  青少年團契"/>
+          <p:cNvPr id="2" name="Text: 光明派對  /  青少年團契"/>
           <p:cNvSpPr txBox="1"/>
           <p:nvPr/>
         </p:nvSpPr>
@@ -18018,14 +18018,14 @@
               </a:spcAft>
             </a:pPr>
             <a:r>
-              <a:rPr sz="1100" b="0" lang="zh-TW">
+              <a:rPr sz="1100" b="0" lang="zh-HK">
                 <a:solidFill>
                   <a:srgbClr val="6A513D"/>
                 </a:solidFill>
                 <a:latin typeface="Microsoft JhengHei"/>
                 <a:ea typeface="Microsoft JhengHei"/>
               </a:rPr>
-              <a:t>LIGHT PARTY  /  青少年團契</a:t>
+              <a:t>光明派對  /  青少年團契</a:t>
             </a:r>
           </a:p>
         </p:txBody>
@@ -18064,7 +18064,7 @@
               </a:spcAft>
             </a:pPr>
             <a:r>
-              <a:rPr sz="1100" b="0" lang="zh-TW">
+              <a:rPr sz="1100" b="0" lang="zh-HK">
                 <a:solidFill>
                   <a:srgbClr val="6A513D"/>
                 </a:solidFill>
@@ -18148,7 +18148,7 @@
       </p:cxnSp>
       <p:sp>
         <p:nvSpPr>
-          <p:cNvPr id="6" name="Text: 回應與禱告｜40–50 分鐘"/>
+          <p:cNvPr id="6" name="Text: 回應同禱告｜40–50 分鐘"/>
           <p:cNvSpPr txBox="1"/>
           <p:nvPr/>
         </p:nvSpPr>
@@ -18180,21 +18180,21 @@
               </a:spcAft>
             </a:pPr>
             <a:r>
-              <a:rPr sz="1000" b="0" lang="zh-TW">
+              <a:rPr sz="1000" b="0" lang="zh-HK">
                 <a:solidFill>
                   <a:srgbClr val="6A513D"/>
                 </a:solidFill>
                 <a:latin typeface="Microsoft JhengHei"/>
                 <a:ea typeface="Microsoft JhengHei"/>
               </a:rPr>
-              <a:t>回應與禱告｜40–50 分鐘</a:t>
-            </a:r>
-          </a:p>
-        </p:txBody>
-      </p:sp>
-      <p:sp>
-        <p:nvSpPr>
-          <p:cNvPr id="7" name="Text: 可以一起禱告，也可以安靜聆聽"/>
+              <a:t>回應同禱告｜40–50 分鐘</a:t>
+            </a:r>
+          </a:p>
+        </p:txBody>
+      </p:sp>
+      <p:sp>
+        <p:nvSpPr>
+          <p:cNvPr id="7" name="Text: 可以一起禱告，都可以安靜聆聽"/>
           <p:cNvSpPr txBox="1"/>
           <p:nvPr/>
         </p:nvSpPr>
@@ -18226,21 +18226,21 @@
               </a:spcAft>
             </a:pPr>
             <a:r>
-              <a:rPr sz="1500" b="1" lang="zh-TW">
+              <a:rPr sz="1500" b="1" lang="zh-HK">
                 <a:solidFill>
                   <a:srgbClr val="804212"/>
                 </a:solidFill>
                 <a:latin typeface="Microsoft JhengHei"/>
                 <a:ea typeface="Microsoft JhengHei"/>
               </a:rPr>
-              <a:t>可以一起禱告，也可以安靜聆聽</a:t>
-            </a:r>
-          </a:p>
-        </p:txBody>
-      </p:sp>
-      <p:sp>
-        <p:nvSpPr>
-          <p:cNvPr id="8" name="Text: 求祢讓我們，成為祝福"/>
+              <a:t>可以一起禱告，都可以安靜聆聽</a:t>
+            </a:r>
+          </a:p>
+        </p:txBody>
+      </p:sp>
+      <p:sp>
+        <p:nvSpPr>
+          <p:cNvPr id="8" name="Text: 求祢等我哋，成為祝福"/>
           <p:cNvSpPr txBox="1"/>
           <p:nvPr/>
         </p:nvSpPr>
@@ -18272,21 +18272,21 @@
               </a:spcAft>
             </a:pPr>
             <a:r>
-              <a:rPr sz="3600" b="1" lang="zh-TW">
+              <a:rPr sz="3600" b="1" lang="zh-HK">
                 <a:solidFill>
                   <a:srgbClr val="2A1E13"/>
                 </a:solidFill>
                 <a:latin typeface="PMingLiU"/>
                 <a:ea typeface="PMingLiU"/>
               </a:rPr>
-              <a:t>求祢讓我們，成為祝福</a:t>
-            </a:r>
-          </a:p>
-        </p:txBody>
-      </p:sp>
-      <p:sp>
-        <p:nvSpPr>
-          <p:cNvPr id="9" name="Text: 親愛的天父，謝謝祢召喚我們成為光明的兒女。&#10;求祢賜給我們智慧去分"/>
+              <a:t>求祢等我哋，成為祝福</a:t>
+            </a:r>
+          </a:p>
+        </p:txBody>
+      </p:sp>
+      <p:sp>
+        <p:nvSpPr>
+          <p:cNvPr id="9" name="Text: 親愛嘅天父，謝謝祢召喚我哋成為光明嘅兒女。&#10;求祢賜給我哋智慧去分"/>
           <p:cNvSpPr txBox="1"/>
           <p:nvPr/>
         </p:nvSpPr>
@@ -18318,14 +18318,14 @@
               </a:spcAft>
             </a:pPr>
             <a:r>
-              <a:rPr sz="2300" b="0" lang="zh-TW">
+              <a:rPr sz="2300" b="0" lang="zh-HK">
                 <a:solidFill>
                   <a:srgbClr val="2A1E13"/>
                 </a:solidFill>
                 <a:latin typeface="PMingLiU"/>
                 <a:ea typeface="PMingLiU"/>
               </a:rPr>
-              <a:t>親愛的天父，謝謝祢召喚我們成為光明的兒女。</a:t>
+              <a:t>親愛嘅天父，謝謝祢召喚我哋成為光明嘅兒女。</a:t>
             </a:r>
           </a:p>
           <a:p>
@@ -18341,14 +18341,14 @@
               </a:spcAft>
             </a:pPr>
             <a:r>
-              <a:rPr sz="2300" b="0" lang="zh-TW">
+              <a:rPr sz="2300" b="0" lang="zh-HK">
                 <a:solidFill>
                   <a:srgbClr val="2A1E13"/>
                 </a:solidFill>
                 <a:latin typeface="PMingLiU"/>
                 <a:ea typeface="PMingLiU"/>
               </a:rPr>
-              <a:t>求祢賜給我們智慧去分辨，勇氣去堅持合宜的選擇，</a:t>
+              <a:t>求祢賜給我哋智慧去分辨，勇氣去堅持合宜嘅選擇，</a:t>
             </a:r>
           </a:p>
           <a:p>
@@ -18364,14 +18364,14 @@
               </a:spcAft>
             </a:pPr>
             <a:r>
-              <a:rPr sz="2300" b="0" lang="zh-TW">
+              <a:rPr sz="2300" b="0" lang="zh-HK">
                 <a:solidFill>
                   <a:srgbClr val="2A1E13"/>
                 </a:solidFill>
                 <a:latin typeface="PMingLiU"/>
                 <a:ea typeface="PMingLiU"/>
               </a:rPr>
-              <a:t>也賜給我們愛心去尊重身邊的人。</a:t>
+              <a:t>都賜給我哋愛心去尊重身邊嘅人。</a:t>
             </a:r>
           </a:p>
           <a:p>
@@ -18387,14 +18387,14 @@
               </a:spcAft>
             </a:pPr>
             <a:r>
-              <a:rPr sz="2300" b="0" lang="zh-TW">
+              <a:rPr sz="2300" b="0" lang="zh-HK">
                 <a:solidFill>
                   <a:srgbClr val="2A1E13"/>
                 </a:solidFill>
                 <a:latin typeface="PMingLiU"/>
                 <a:ea typeface="PMingLiU"/>
               </a:rPr>
-              <a:t>面對同儕壓力或心裏不安時，</a:t>
+              <a:t>面對同儕壓力或心裏唔安時，</a:t>
             </a:r>
           </a:p>
           <a:p>
@@ -18410,14 +18410,14 @@
               </a:spcAft>
             </a:pPr>
             <a:r>
-              <a:rPr sz="2300" b="0" lang="zh-TW">
+              <a:rPr sz="2300" b="0" lang="zh-HK">
                 <a:solidFill>
                   <a:srgbClr val="2A1E13"/>
                 </a:solidFill>
                 <a:latin typeface="PMingLiU"/>
                 <a:ea typeface="PMingLiU"/>
               </a:rPr>
-              <a:t>讓我們記得祢所賜的，是剛強、仁愛、謹守的心。</a:t>
+              <a:t>等我哋記住祢所賜嘅，係剛強、仁愛、謹守嘅心。</a:t>
             </a:r>
           </a:p>
           <a:p>
@@ -18433,14 +18433,14 @@
               </a:spcAft>
             </a:pPr>
             <a:r>
-              <a:rPr sz="2300" b="0" lang="zh-TW">
+              <a:rPr sz="2300" b="0" lang="zh-HK">
                 <a:solidFill>
                   <a:srgbClr val="2A1E13"/>
                 </a:solidFill>
                 <a:latin typeface="PMingLiU"/>
                 <a:ea typeface="PMingLiU"/>
               </a:rPr>
-              <a:t>讓我們用祢的愛與喜樂，成為朋友的祝福。</a:t>
+              <a:t>等我哋用祢嘅愛同喜樂，成為朋友嘅祝福。</a:t>
             </a:r>
           </a:p>
           <a:p>
@@ -18456,14 +18456,14 @@
               </a:spcAft>
             </a:pPr>
             <a:r>
-              <a:rPr sz="2300" b="0" lang="zh-TW">
+              <a:rPr sz="2300" b="0" lang="zh-HK">
                 <a:solidFill>
                   <a:srgbClr val="2A1E13"/>
                 </a:solidFill>
                 <a:latin typeface="PMingLiU"/>
                 <a:ea typeface="PMingLiU"/>
               </a:rPr>
-              <a:t>禱告奉耶穌基督的名求，阿門。</a:t>
+              <a:t>禱告奉耶穌基督嘅名求，阿門。</a:t>
             </a:r>
           </a:p>
         </p:txBody>
@@ -18496,7 +18496,7 @@
       <p:grpSpPr/>
       <p:sp>
         <p:nvSpPr>
-          <p:cNvPr id="2" name="Text: LIGHT PARTY  /  青少年團契"/>
+          <p:cNvPr id="2" name="Text: 光明派對  /  青少年團契"/>
           <p:cNvSpPr txBox="1"/>
           <p:nvPr/>
         </p:nvSpPr>
@@ -18528,14 +18528,14 @@
               </a:spcAft>
             </a:pPr>
             <a:r>
-              <a:rPr sz="1100" b="0" lang="zh-TW">
+              <a:rPr sz="1100" b="0" lang="zh-HK">
                 <a:solidFill>
                   <a:srgbClr val="CFC0A9"/>
                 </a:solidFill>
                 <a:latin typeface="Microsoft JhengHei"/>
                 <a:ea typeface="Microsoft JhengHei"/>
               </a:rPr>
-              <a:t>LIGHT PARTY  /  青少年團契</a:t>
+              <a:t>光明派對  /  青少年團契</a:t>
             </a:r>
           </a:p>
         </p:txBody>
@@ -18574,7 +18574,7 @@
               </a:spcAft>
             </a:pPr>
             <a:r>
-              <a:rPr sz="1100" b="0" lang="zh-TW">
+              <a:rPr sz="1100" b="0" lang="zh-HK">
                 <a:solidFill>
                   <a:srgbClr val="CFC0A9"/>
                 </a:solidFill>
@@ -18658,7 +18658,7 @@
       </p:cxnSp>
       <p:sp>
         <p:nvSpPr>
-          <p:cNvPr id="6" name="Text: 回應與禱告｜40–50 分鐘"/>
+          <p:cNvPr id="6" name="Text: 回應同禱告｜40–50 分鐘"/>
           <p:cNvSpPr txBox="1"/>
           <p:nvPr/>
         </p:nvSpPr>
@@ -18690,21 +18690,21 @@
               </a:spcAft>
             </a:pPr>
             <a:r>
-              <a:rPr sz="1000" b="0" lang="zh-TW">
+              <a:rPr sz="1000" b="0" lang="zh-HK">
                 <a:solidFill>
                   <a:srgbClr val="CFC0A9"/>
                 </a:solidFill>
                 <a:latin typeface="Microsoft JhengHei"/>
                 <a:ea typeface="Microsoft JhengHei"/>
               </a:rPr>
-              <a:t>回應與禱告｜40–50 分鐘</a:t>
-            </a:r>
-          </a:p>
-        </p:txBody>
-      </p:sp>
-      <p:sp>
-        <p:nvSpPr>
-          <p:cNvPr id="7" name="Text: 自願分享，不必硬撐。"/>
+              <a:t>回應同禱告｜40–50 分鐘</a:t>
+            </a:r>
+          </a:p>
+        </p:txBody>
+      </p:sp>
+      <p:sp>
+        <p:nvSpPr>
+          <p:cNvPr id="7" name="Text: 自願分享，唔使硬撐。"/>
           <p:cNvSpPr txBox="1"/>
           <p:nvPr/>
         </p:nvSpPr>
@@ -18736,21 +18736,21 @@
               </a:spcAft>
             </a:pPr>
             <a:r>
-              <a:rPr sz="2000" b="0" lang="zh-TW">
+              <a:rPr sz="2000" b="0" lang="zh-HK">
                 <a:solidFill>
                   <a:srgbClr val="D8B78F"/>
                 </a:solidFill>
                 <a:latin typeface="Microsoft JhengHei"/>
                 <a:ea typeface="Microsoft JhengHei"/>
               </a:rPr>
-              <a:t>自願分享，不必硬撐。</a:t>
-            </a:r>
-          </a:p>
-        </p:txBody>
-      </p:sp>
-      <p:sp>
-        <p:nvSpPr>
-          <p:cNvPr id="8" name="Text: 你不孤單。"/>
+              <a:t>自願分享，唔使硬撐。</a:t>
+            </a:r>
+          </a:p>
+        </p:txBody>
+      </p:sp>
+      <p:sp>
+        <p:nvSpPr>
+          <p:cNvPr id="8" name="Text: 你唔孤單。"/>
           <p:cNvSpPr txBox="1"/>
           <p:nvPr/>
         </p:nvSpPr>
@@ -18782,14 +18782,14 @@
               </a:spcAft>
             </a:pPr>
             <a:r>
-              <a:rPr sz="7600" b="1" lang="zh-TW">
+              <a:rPr sz="7600" b="1" lang="zh-HK">
                 <a:solidFill>
                   <a:srgbClr val="EEDFC7"/>
                 </a:solidFill>
                 <a:latin typeface="PMingLiU"/>
                 <a:ea typeface="PMingLiU"/>
               </a:rPr>
-              <a:t>你不孤單。</a:t>
+              <a:t>你唔孤單。</a:t>
             </a:r>
           </a:p>
         </p:txBody>
@@ -18863,7 +18863,7 @@
               </a:spcAft>
             </a:pPr>
             <a:r>
-              <a:rPr sz="1500" b="1" lang="zh-TW">
+              <a:rPr sz="1500" b="1" lang="zh-HK">
                 <a:solidFill>
                   <a:srgbClr val="D8B78F"/>
                 </a:solidFill>
@@ -18909,7 +18909,7 @@
               </a:spcAft>
             </a:pPr>
             <a:r>
-              <a:rPr sz="2200" b="1" lang="zh-TW">
+              <a:rPr sz="2200" b="1" lang="zh-HK">
                 <a:solidFill>
                   <a:srgbClr val="EEDFC7"/>
                 </a:solidFill>
@@ -18923,7 +18923,7 @@
       </p:sp>
       <p:sp>
         <p:nvSpPr>
-          <p:cNvPr id="12" name="Text: 同儕壓力、作選擇的困難，&#10;或一件想得到支持的事。"/>
+          <p:cNvPr id="12" name="Text: 同儕壓力、揀嘅困難，&#10;或一件想得到支持嘅事。"/>
           <p:cNvSpPr txBox="1"/>
           <p:nvPr/>
         </p:nvSpPr>
@@ -18955,14 +18955,14 @@
               </a:spcAft>
             </a:pPr>
             <a:r>
-              <a:rPr sz="1800" b="0" lang="zh-TW">
+              <a:rPr sz="1800" b="0" lang="zh-HK">
                 <a:solidFill>
                   <a:srgbClr val="CFC0A9"/>
                 </a:solidFill>
                 <a:latin typeface="Microsoft JhengHei"/>
                 <a:ea typeface="Microsoft JhengHei"/>
               </a:rPr>
-              <a:t>同儕壓力、作選擇的困難，</a:t>
+              <a:t>同儕壓力、揀嘅困難，</a:t>
             </a:r>
           </a:p>
           <a:p>
@@ -18978,14 +18978,14 @@
               </a:spcAft>
             </a:pPr>
             <a:r>
-              <a:rPr sz="1800" b="0" lang="zh-TW">
+              <a:rPr sz="1800" b="0" lang="zh-HK">
                 <a:solidFill>
                   <a:srgbClr val="CFC0A9"/>
                 </a:solidFill>
                 <a:latin typeface="Microsoft JhengHei"/>
                 <a:ea typeface="Microsoft JhengHei"/>
               </a:rPr>
-              <a:t>或一件想得到支持的事。</a:t>
+              <a:t>或一件想得到支持嘅事。</a:t>
             </a:r>
           </a:p>
         </p:txBody>
@@ -19059,7 +19059,7 @@
               </a:spcAft>
             </a:pPr>
             <a:r>
-              <a:rPr sz="1500" b="1" lang="zh-TW">
+              <a:rPr sz="1500" b="1" lang="zh-HK">
                 <a:solidFill>
                   <a:srgbClr val="D8B78F"/>
                 </a:solidFill>
@@ -19073,7 +19073,7 @@
       </p:sp>
       <p:sp>
         <p:nvSpPr>
-          <p:cNvPr id="15" name="Text: 為伙伴代禱"/>
+          <p:cNvPr id="15" name="Text: 為夥伴代禱"/>
           <p:cNvSpPr txBox="1"/>
           <p:nvPr/>
         </p:nvSpPr>
@@ -19105,21 +19105,21 @@
               </a:spcAft>
             </a:pPr>
             <a:r>
-              <a:rPr sz="2200" b="1" lang="zh-TW">
+              <a:rPr sz="2200" b="1" lang="zh-HK">
                 <a:solidFill>
                   <a:srgbClr val="EEDFC7"/>
                 </a:solidFill>
                 <a:latin typeface="PMingLiU"/>
                 <a:ea typeface="PMingLiU"/>
               </a:rPr>
-              <a:t>為伙伴代禱</a:t>
-            </a:r>
-          </a:p>
-        </p:txBody>
-      </p:sp>
-      <p:sp>
-        <p:nvSpPr>
-          <p:cNvPr id="16" name="Text: 簡單說出祝福，&#10;不用給建議或評論。"/>
+              <a:t>為夥伴代禱</a:t>
+            </a:r>
+          </a:p>
+        </p:txBody>
+      </p:sp>
+      <p:sp>
+        <p:nvSpPr>
+          <p:cNvPr id="16" name="Text: 簡單講出祝福，&#10;唔用給建議或評論。"/>
           <p:cNvSpPr txBox="1"/>
           <p:nvPr/>
         </p:nvSpPr>
@@ -19151,14 +19151,14 @@
               </a:spcAft>
             </a:pPr>
             <a:r>
-              <a:rPr sz="1800" b="0" lang="zh-TW">
+              <a:rPr sz="1800" b="0" lang="zh-HK">
                 <a:solidFill>
                   <a:srgbClr val="CFC0A9"/>
                 </a:solidFill>
                 <a:latin typeface="Microsoft JhengHei"/>
                 <a:ea typeface="Microsoft JhengHei"/>
               </a:rPr>
-              <a:t>簡單說出祝福，</a:t>
+              <a:t>簡單講出祝福，</a:t>
             </a:r>
           </a:p>
           <a:p>
@@ -19174,14 +19174,14 @@
               </a:spcAft>
             </a:pPr>
             <a:r>
-              <a:rPr sz="1800" b="0" lang="zh-TW">
+              <a:rPr sz="1800" b="0" lang="zh-HK">
                 <a:solidFill>
                   <a:srgbClr val="CFC0A9"/>
                 </a:solidFill>
                 <a:latin typeface="Microsoft JhengHei"/>
                 <a:ea typeface="Microsoft JhengHei"/>
               </a:rPr>
-              <a:t>不用給建議或評論。</a:t>
+              <a:t>唔用給建議或評論。</a:t>
             </a:r>
           </a:p>
         </p:txBody>
@@ -19223,7 +19223,7 @@
       </p:cxnSp>
       <p:sp>
         <p:nvSpPr>
-          <p:cNvPr id="18" name="Text: 不想分享也可以"/>
+          <p:cNvPr id="18" name="Text: 唔想分享都可以"/>
           <p:cNvSpPr txBox="1"/>
           <p:nvPr/>
         </p:nvSpPr>
@@ -19255,14 +19255,14 @@
               </a:spcAft>
             </a:pPr>
             <a:r>
-              <a:rPr sz="1500" b="1" lang="zh-TW">
+              <a:rPr sz="1500" b="1" lang="zh-HK">
                 <a:solidFill>
                   <a:srgbClr val="D8B78F"/>
                 </a:solidFill>
                 <a:latin typeface="Microsoft JhengHei"/>
                 <a:ea typeface="Microsoft JhengHei"/>
               </a:rPr>
-              <a:t>不想分享也可以</a:t>
+              <a:t>唔想分享都可以</a:t>
             </a:r>
           </a:p>
         </p:txBody>
@@ -19301,7 +19301,7 @@
               </a:spcAft>
             </a:pPr>
             <a:r>
-              <a:rPr sz="2200" b="1" lang="zh-TW">
+              <a:rPr sz="2200" b="1" lang="zh-HK">
                 <a:solidFill>
                   <a:srgbClr val="EEDFC7"/>
                 </a:solidFill>
@@ -19315,7 +19315,7 @@
       </p:sp>
       <p:sp>
         <p:nvSpPr>
-          <p:cNvPr id="20" name="Text: 若有需要，&#10;聚會後找導師談談。"/>
+          <p:cNvPr id="20" name="Text: 如果有需要，&#10;聚會後搵導師談談。"/>
           <p:cNvSpPr txBox="1"/>
           <p:nvPr/>
         </p:nvSpPr>
@@ -19347,14 +19347,14 @@
               </a:spcAft>
             </a:pPr>
             <a:r>
-              <a:rPr sz="1800" b="0" lang="zh-TW">
+              <a:rPr sz="1800" b="0" lang="zh-HK">
                 <a:solidFill>
                   <a:srgbClr val="CFC0A9"/>
                 </a:solidFill>
                 <a:latin typeface="Microsoft JhengHei"/>
                 <a:ea typeface="Microsoft JhengHei"/>
               </a:rPr>
-              <a:t>若有需要，</a:t>
+              <a:t>如果有需要，</a:t>
             </a:r>
           </a:p>
           <a:p>
@@ -19370,14 +19370,14 @@
               </a:spcAft>
             </a:pPr>
             <a:r>
-              <a:rPr sz="1800" b="0" lang="zh-TW">
+              <a:rPr sz="1800" b="0" lang="zh-HK">
                 <a:solidFill>
                   <a:srgbClr val="CFC0A9"/>
                 </a:solidFill>
                 <a:latin typeface="Microsoft JhengHei"/>
                 <a:ea typeface="Microsoft JhengHei"/>
               </a:rPr>
-              <a:t>聚會後找導師談談。</a:t>
+              <a:t>聚會後搵導師談談。</a:t>
             </a:r>
           </a:p>
         </p:txBody>
@@ -19410,7 +19410,7 @@
       <p:grpSpPr/>
       <p:sp>
         <p:nvSpPr>
-          <p:cNvPr id="2" name="Text: LIGHT PARTY  /  青少年團契"/>
+          <p:cNvPr id="2" name="Text: 光明派對  /  青少年團契"/>
           <p:cNvSpPr txBox="1"/>
           <p:nvPr/>
         </p:nvSpPr>
@@ -19442,14 +19442,14 @@
               </a:spcAft>
             </a:pPr>
             <a:r>
-              <a:rPr sz="1100" b="0" lang="zh-TW">
+              <a:rPr sz="1100" b="0" lang="zh-HK">
                 <a:solidFill>
                   <a:srgbClr val="6A513D"/>
                 </a:solidFill>
                 <a:latin typeface="Microsoft JhengHei"/>
                 <a:ea typeface="Microsoft JhengHei"/>
               </a:rPr>
-              <a:t>LIGHT PARTY  /  青少年團契</a:t>
+              <a:t>光明派對  /  青少年團契</a:t>
             </a:r>
           </a:p>
         </p:txBody>
@@ -19488,7 +19488,7 @@
               </a:spcAft>
             </a:pPr>
             <a:r>
-              <a:rPr sz="1100" b="0" lang="zh-TW">
+              <a:rPr sz="1100" b="0" lang="zh-HK">
                 <a:solidFill>
                   <a:srgbClr val="6A513D"/>
                 </a:solidFill>
@@ -19604,7 +19604,7 @@
               </a:spcAft>
             </a:pPr>
             <a:r>
-              <a:rPr sz="1000" b="0" lang="zh-TW">
+              <a:rPr sz="1000" b="0" lang="zh-HK">
                 <a:solidFill>
                   <a:srgbClr val="6A513D"/>
                 </a:solidFill>
@@ -19618,7 +19618,7 @@
       </p:sp>
       <p:sp>
         <p:nvSpPr>
-          <p:cNvPr id="7" name="Text: 我們的替代選擇"/>
+          <p:cNvPr id="7" name="Text: 我哋嘅替代選擇"/>
           <p:cNvSpPr txBox="1"/>
           <p:nvPr/>
         </p:nvSpPr>
@@ -19650,14 +19650,14 @@
               </a:spcAft>
             </a:pPr>
             <a:r>
-              <a:rPr sz="1800" b="0" lang="zh-TW">
+              <a:rPr sz="1800" b="0" lang="zh-HK">
                 <a:solidFill>
                   <a:srgbClr val="804212"/>
                 </a:solidFill>
                 <a:latin typeface="Microsoft JhengHei"/>
                 <a:ea typeface="Microsoft JhengHei"/>
               </a:rPr>
-              <a:t>我們的替代選擇</a:t>
+              <a:t>我哋嘅替代選擇</a:t>
             </a:r>
           </a:p>
         </p:txBody>
@@ -19696,7 +19696,7 @@
               </a:spcAft>
             </a:pPr>
             <a:r>
-              <a:rPr sz="7300" b="1" lang="zh-TW">
+              <a:rPr sz="7300" b="1" lang="zh-HK">
                 <a:solidFill>
                   <a:srgbClr val="2A1E13"/>
                 </a:solidFill>
@@ -19710,7 +19710,7 @@
       </p:sp>
       <p:sp>
         <p:nvSpPr>
-          <p:cNvPr id="9" name="Text: LIGHT PARTY"/>
+          <p:cNvPr id="9" name="Text: 光明派對"/>
           <p:cNvSpPr txBox="1"/>
           <p:nvPr/>
         </p:nvSpPr>
@@ -19742,14 +19742,14 @@
               </a:spcAft>
             </a:pPr>
             <a:r>
-              <a:rPr sz="3000" b="0" lang="zh-TW">
+              <a:rPr sz="3000" b="0" lang="zh-HK">
                 <a:solidFill>
                   <a:srgbClr val="804212"/>
                 </a:solidFill>
                 <a:latin typeface="PMingLiU"/>
                 <a:ea typeface="PMingLiU"/>
               </a:rPr>
-              <a:t>LIGHT PARTY</a:t>
+              <a:t>光明派對</a:t>
             </a:r>
           </a:p>
         </p:txBody>
@@ -19788,7 +19788,7 @@
               </a:spcAft>
             </a:pPr>
             <a:r>
-              <a:rPr sz="2500" b="0" lang="zh-TW">
+              <a:rPr sz="2500" b="0" lang="zh-HK">
                 <a:solidFill>
                   <a:srgbClr val="2A1E13"/>
                 </a:solidFill>
@@ -19802,7 +19802,7 @@
       </p:sp>
       <p:sp>
         <p:nvSpPr>
-          <p:cNvPr id="11" name="Text: 留意食物過敏；螢光棒不拆開、不咬破；保持走道暢通。"/>
+          <p:cNvPr id="11" name="Text: 留意食物過敏；螢光棒唔拆開、唔咬破；保持走道暢通。"/>
           <p:cNvSpPr txBox="1"/>
           <p:nvPr/>
         </p:nvSpPr>
@@ -19834,14 +19834,14 @@
               </a:spcAft>
             </a:pPr>
             <a:r>
-              <a:rPr sz="1700" b="0" lang="zh-TW">
+              <a:rPr sz="1700" b="0" lang="zh-HK">
                 <a:solidFill>
                   <a:srgbClr val="6A513D"/>
                 </a:solidFill>
                 <a:latin typeface="Microsoft JhengHei"/>
                 <a:ea typeface="Microsoft JhengHei"/>
               </a:rPr>
-              <a:t>留意食物過敏；螢光棒不拆開、不咬破；保持走道暢通。</a:t>
+              <a:t>留意食物過敏；螢光棒唔拆開、唔咬破；保持走道暢通。</a:t>
             </a:r>
           </a:p>
         </p:txBody>
@@ -20326,7 +20326,7 @@
       <p:grpSpPr/>
       <p:sp>
         <p:nvSpPr>
-          <p:cNvPr id="2" name="Text: LIGHT PARTY  /  青少年團契"/>
+          <p:cNvPr id="2" name="Text: 光明派對  /  青少年團契"/>
           <p:cNvSpPr txBox="1"/>
           <p:nvPr/>
         </p:nvSpPr>
@@ -20358,14 +20358,14 @@
               </a:spcAft>
             </a:pPr>
             <a:r>
-              <a:rPr sz="1100" b="0" lang="zh-TW">
+              <a:rPr sz="1100" b="0" lang="zh-HK">
                 <a:solidFill>
                   <a:srgbClr val="6A513D"/>
                 </a:solidFill>
                 <a:latin typeface="Microsoft JhengHei"/>
                 <a:ea typeface="Microsoft JhengHei"/>
               </a:rPr>
-              <a:t>LIGHT PARTY  /  青少年團契</a:t>
+              <a:t>光明派對  /  青少年團契</a:t>
             </a:r>
           </a:p>
         </p:txBody>
@@ -20404,7 +20404,7 @@
               </a:spcAft>
             </a:pPr>
             <a:r>
-              <a:rPr sz="1100" b="0" lang="zh-TW">
+              <a:rPr sz="1100" b="0" lang="zh-HK">
                 <a:solidFill>
                   <a:srgbClr val="6A513D"/>
                 </a:solidFill>
@@ -20520,7 +20520,7 @@
               </a:spcAft>
             </a:pPr>
             <a:r>
-              <a:rPr sz="1000" b="0" lang="zh-TW">
+              <a:rPr sz="1000" b="0" lang="zh-HK">
                 <a:solidFill>
                   <a:srgbClr val="6A513D"/>
                 </a:solidFill>
@@ -20534,7 +20534,7 @@
       </p:sp>
       <p:sp>
         <p:nvSpPr>
-          <p:cNvPr id="7" name="Text: 寫給一位，你想鼓勵的朋友"/>
+          <p:cNvPr id="7" name="Text: 寫給一位，你想鼓勵嘅朋友"/>
           <p:cNvSpPr txBox="1"/>
           <p:nvPr/>
         </p:nvSpPr>
@@ -20566,14 +20566,14 @@
               </a:spcAft>
             </a:pPr>
             <a:r>
-              <a:rPr sz="1500" b="1" lang="zh-TW">
+              <a:rPr sz="1500" b="1" lang="zh-HK">
                 <a:solidFill>
                   <a:srgbClr val="804212"/>
                 </a:solidFill>
                 <a:latin typeface="Microsoft JhengHei"/>
                 <a:ea typeface="Microsoft JhengHei"/>
               </a:rPr>
-              <a:t>寫給一位，你想鼓勵的朋友</a:t>
+              <a:t>寫給一位，你想鼓勵嘅朋友</a:t>
             </a:r>
           </a:p>
         </p:txBody>
@@ -20612,7 +20612,7 @@
               </a:spcAft>
             </a:pPr>
             <a:r>
-              <a:rPr sz="3600" b="1" lang="zh-TW">
+              <a:rPr sz="3600" b="1" lang="zh-HK">
                 <a:solidFill>
                   <a:srgbClr val="2A1E13"/>
                 </a:solidFill>
@@ -20671,7 +20671,7 @@
       </p:sp>
       <p:sp>
         <p:nvSpPr>
-          <p:cNvPr id="10" name="Text: 親愛的 __________________："/>
+          <p:cNvPr id="10" name="Text: 親愛嘅 __________________："/>
           <p:cNvSpPr txBox="1"/>
           <p:nvPr/>
         </p:nvSpPr>
@@ -20703,21 +20703,21 @@
               </a:spcAft>
             </a:pPr>
             <a:r>
-              <a:rPr sz="2200" b="0" lang="zh-TW">
+              <a:rPr sz="2200" b="0" lang="zh-HK">
                 <a:solidFill>
                   <a:srgbClr val="2A1E13"/>
                 </a:solidFill>
                 <a:latin typeface="PMingLiU"/>
                 <a:ea typeface="PMingLiU"/>
               </a:rPr>
-              <a:t>親愛的 __________________：</a:t>
-            </a:r>
-          </a:p>
-        </p:txBody>
-      </p:sp>
-      <p:sp>
-        <p:nvSpPr>
-          <p:cNvPr id="11" name="Text: 多謝你一直陪住我。&#10;願你今天有平安，&#10;也記得你並不孤單。"/>
+              <a:t>親愛嘅 __________________：</a:t>
+            </a:r>
+          </a:p>
+        </p:txBody>
+      </p:sp>
+      <p:sp>
+        <p:nvSpPr>
+          <p:cNvPr id="11" name="Text: 多謝你一直陪住我。&#10;願你今日有平安，&#10;都記住你並唔孤單。"/>
           <p:cNvSpPr txBox="1"/>
           <p:nvPr/>
         </p:nvSpPr>
@@ -20749,7 +20749,7 @@
               </a:spcAft>
             </a:pPr>
             <a:r>
-              <a:rPr sz="2500" b="0" lang="zh-TW">
+              <a:rPr sz="2500" b="0" lang="zh-HK">
                 <a:solidFill>
                   <a:srgbClr val="2A1E13"/>
                 </a:solidFill>
@@ -20772,14 +20772,14 @@
               </a:spcAft>
             </a:pPr>
             <a:r>
-              <a:rPr sz="2500" b="0" lang="zh-TW">
+              <a:rPr sz="2500" b="0" lang="zh-HK">
                 <a:solidFill>
                   <a:srgbClr val="2A1E13"/>
                 </a:solidFill>
                 <a:latin typeface="PMingLiU"/>
                 <a:ea typeface="PMingLiU"/>
               </a:rPr>
-              <a:t>願你今天有平安，</a:t>
+              <a:t>願你今日有平安，</a:t>
             </a:r>
           </a:p>
           <a:p>
@@ -20795,21 +20795,21 @@
               </a:spcAft>
             </a:pPr>
             <a:r>
-              <a:rPr sz="2500" b="0" lang="zh-TW">
+              <a:rPr sz="2500" b="0" lang="zh-HK">
                 <a:solidFill>
                   <a:srgbClr val="2A1E13"/>
                 </a:solidFill>
                 <a:latin typeface="PMingLiU"/>
                 <a:ea typeface="PMingLiU"/>
               </a:rPr>
-              <a:t>也記得你並不孤單。</a:t>
-            </a:r>
-          </a:p>
-        </p:txBody>
-      </p:sp>
-      <p:sp>
-        <p:nvSpPr>
-          <p:cNvPr id="12" name="Text: 你的朋友：__________________"/>
+              <a:t>都記住你並唔孤單。</a:t>
+            </a:r>
+          </a:p>
+        </p:txBody>
+      </p:sp>
+      <p:sp>
+        <p:nvSpPr>
+          <p:cNvPr id="12" name="Text: 你嘅朋友：__________________"/>
           <p:cNvSpPr txBox="1"/>
           <p:nvPr/>
         </p:nvSpPr>
@@ -20841,14 +20841,14 @@
               </a:spcAft>
             </a:pPr>
             <a:r>
-              <a:rPr sz="1700" b="0" lang="zh-TW">
+              <a:rPr sz="1700" b="0" lang="zh-HK">
                 <a:solidFill>
                   <a:srgbClr val="6A513D"/>
                 </a:solidFill>
                 <a:latin typeface="Microsoft JhengHei"/>
                 <a:ea typeface="Microsoft JhengHei"/>
               </a:rPr>
-              <a:t>你的朋友：__________________</a:t>
+              <a:t>你嘅朋友：__________________</a:t>
             </a:r>
           </a:p>
         </p:txBody>
@@ -20887,7 +20887,7 @@
               </a:spcAft>
             </a:pPr>
             <a:r>
-              <a:rPr sz="2500" b="1" lang="zh-TW">
+              <a:rPr sz="2500" b="1" lang="zh-HK">
                 <a:solidFill>
                   <a:srgbClr val="2A1E13"/>
                 </a:solidFill>
@@ -20901,7 +20901,7 @@
       </p:sp>
       <p:sp>
         <p:nvSpPr>
-          <p:cNvPr id="14" name="Text: 一句真誠鼓勵&#10;一項支持行動&#10;一位想祝福的朋友"/>
+          <p:cNvPr id="14" name="Text: 一句真誠鼓勵&#10;一項支持行動&#10;一位想祝福嘅朋友"/>
           <p:cNvSpPr txBox="1"/>
           <p:nvPr/>
         </p:nvSpPr>
@@ -20933,7 +20933,7 @@
               </a:spcAft>
             </a:pPr>
             <a:r>
-              <a:rPr sz="2300" b="0" lang="zh-TW">
+              <a:rPr sz="2300" b="0" lang="zh-HK">
                 <a:solidFill>
                   <a:srgbClr val="2A1E13"/>
                 </a:solidFill>
@@ -20956,7 +20956,7 @@
               </a:spcAft>
             </a:pPr>
             <a:r>
-              <a:rPr sz="2300" b="0" lang="zh-TW">
+              <a:rPr sz="2300" b="0" lang="zh-HK">
                 <a:solidFill>
                   <a:srgbClr val="2A1E13"/>
                 </a:solidFill>
@@ -20979,14 +20979,14 @@
               </a:spcAft>
             </a:pPr>
             <a:r>
-              <a:rPr sz="2300" b="0" lang="zh-TW">
+              <a:rPr sz="2300" b="0" lang="zh-HK">
                 <a:solidFill>
                   <a:srgbClr val="2A1E13"/>
                 </a:solidFill>
                 <a:latin typeface="Microsoft JhengHei"/>
                 <a:ea typeface="Microsoft JhengHei"/>
               </a:rPr>
-              <a:t>一位想祝福的朋友</a:t>
+              <a:t>一位想祝福嘅朋友</a:t>
             </a:r>
           </a:p>
         </p:txBody>
@@ -21025,7 +21025,7 @@
               </a:spcAft>
             </a:pPr>
             <a:r>
-              <a:rPr sz="1500" b="0" lang="zh-TW">
+              <a:rPr sz="1500" b="0" lang="zh-HK">
                 <a:solidFill>
                   <a:srgbClr val="6A513D"/>
                 </a:solidFill>
@@ -21065,7 +21065,7 @@
       <p:grpSpPr/>
       <p:sp>
         <p:nvSpPr>
-          <p:cNvPr id="2" name="Text: LIGHT PARTY  /  青少年團契"/>
+          <p:cNvPr id="2" name="Text: 光明派對  /  青少年團契"/>
           <p:cNvSpPr txBox="1"/>
           <p:nvPr/>
         </p:nvSpPr>
@@ -21097,14 +21097,14 @@
               </a:spcAft>
             </a:pPr>
             <a:r>
-              <a:rPr sz="1100" b="0" lang="zh-TW">
+              <a:rPr sz="1100" b="0" lang="zh-HK">
                 <a:solidFill>
                   <a:srgbClr val="CFC0A9"/>
                 </a:solidFill>
                 <a:latin typeface="Microsoft JhengHei"/>
                 <a:ea typeface="Microsoft JhengHei"/>
               </a:rPr>
-              <a:t>LIGHT PARTY  /  青少年團契</a:t>
+              <a:t>光明派對  /  青少年團契</a:t>
             </a:r>
           </a:p>
         </p:txBody>
@@ -21143,7 +21143,7 @@
               </a:spcAft>
             </a:pPr>
             <a:r>
-              <a:rPr sz="1100" b="0" lang="zh-TW">
+              <a:rPr sz="1100" b="0" lang="zh-HK">
                 <a:solidFill>
                   <a:srgbClr val="CFC0A9"/>
                 </a:solidFill>
@@ -21259,7 +21259,7 @@
               </a:spcAft>
             </a:pPr>
             <a:r>
-              <a:rPr sz="1000" b="0" lang="zh-TW">
+              <a:rPr sz="1000" b="0" lang="zh-HK">
                 <a:solidFill>
                   <a:srgbClr val="CFC0A9"/>
                 </a:solidFill>
@@ -21273,7 +21273,7 @@
       </p:sp>
       <p:sp>
         <p:nvSpPr>
-          <p:cNvPr id="7" name="Text: 讓信仰，成為一個今天就能做的行動。"/>
+          <p:cNvPr id="7" name="Text: 等信仰，成為一個今日就能做嘅行動。"/>
           <p:cNvSpPr txBox="1"/>
           <p:nvPr/>
         </p:nvSpPr>
@@ -21305,21 +21305,21 @@
               </a:spcAft>
             </a:pPr>
             <a:r>
-              <a:rPr sz="1900" b="0" lang="zh-TW">
+              <a:rPr sz="1900" b="0" lang="zh-HK">
                 <a:solidFill>
                   <a:srgbClr val="D8B78F"/>
                 </a:solidFill>
                 <a:latin typeface="Microsoft JhengHei"/>
                 <a:ea typeface="Microsoft JhengHei"/>
               </a:rPr>
-              <a:t>讓信仰，成為一個今天就能做的行動。</a:t>
-            </a:r>
-          </a:p>
-        </p:txBody>
-      </p:sp>
-      <p:sp>
-        <p:nvSpPr>
-          <p:cNvPr id="8" name="Text: 不只避開黑暗，&#10;更要活出光。"/>
+              <a:t>等信仰，成為一個今日就能做嘅行動。</a:t>
+            </a:r>
+          </a:p>
+        </p:txBody>
+      </p:sp>
+      <p:sp>
+        <p:nvSpPr>
+          <p:cNvPr id="8" name="Text: 唔只避開黑暗，&#10;更要活出光。"/>
           <p:cNvSpPr txBox="1"/>
           <p:nvPr/>
         </p:nvSpPr>
@@ -21351,14 +21351,14 @@
               </a:spcAft>
             </a:pPr>
             <a:r>
-              <a:rPr sz="5900" b="1" lang="zh-TW">
+              <a:rPr sz="5900" b="1" lang="zh-HK">
                 <a:solidFill>
                   <a:srgbClr val="EEDFC7"/>
                 </a:solidFill>
                 <a:latin typeface="PMingLiU"/>
                 <a:ea typeface="PMingLiU"/>
               </a:rPr>
-              <a:t>不只避開黑暗，</a:t>
+              <a:t>唔只避開黑暗，</a:t>
             </a:r>
           </a:p>
           <a:p>
@@ -21374,7 +21374,7 @@
               </a:spcAft>
             </a:pPr>
             <a:r>
-              <a:rPr sz="5900" b="1" lang="zh-TW">
+              <a:rPr sz="5900" b="1" lang="zh-HK">
                 <a:solidFill>
                   <a:srgbClr val="EEDFC7"/>
                 </a:solidFill>
@@ -21388,7 +21388,7 @@
       </p:sp>
       <p:sp>
         <p:nvSpPr>
-          <p:cNvPr id="9" name="Text: 溫柔表達界線  /  鼓勵一位朋友  /  把祝福帶出去"/>
+          <p:cNvPr id="9" name="Text: 溫柔講出界線  /  鼓勵一位朋友  /  把祝福帶出去"/>
           <p:cNvSpPr txBox="1"/>
           <p:nvPr/>
         </p:nvSpPr>
@@ -21420,21 +21420,21 @@
               </a:spcAft>
             </a:pPr>
             <a:r>
-              <a:rPr sz="2400" b="0" lang="zh-TW">
+              <a:rPr sz="2400" b="0" lang="zh-HK">
                 <a:solidFill>
                   <a:srgbClr val="CFC0A9"/>
                 </a:solidFill>
                 <a:latin typeface="Microsoft JhengHei"/>
                 <a:ea typeface="Microsoft JhengHei"/>
               </a:rPr>
-              <a:t>溫柔表達界線  /  鼓勵一位朋友  /  把祝福帶出去</a:t>
-            </a:r>
-          </a:p>
-        </p:txBody>
-      </p:sp>
-      <p:sp>
-        <p:nvSpPr>
-          <p:cNvPr id="10" name="Text: 願你帶着平安與喜樂，成為身邊人的祝福。"/>
+              <a:t>溫柔講出界線  /  鼓勵一位朋友  /  把祝福帶出去</a:t>
+            </a:r>
+          </a:p>
+        </p:txBody>
+      </p:sp>
+      <p:sp>
+        <p:nvSpPr>
+          <p:cNvPr id="10" name="Text: 願你帶着平安同喜樂，成為身邊人嘅祝福。"/>
           <p:cNvSpPr txBox="1"/>
           <p:nvPr/>
         </p:nvSpPr>
@@ -21466,14 +21466,14 @@
               </a:spcAft>
             </a:pPr>
             <a:r>
-              <a:rPr sz="1900" b="0" lang="zh-TW">
+              <a:rPr sz="1900" b="0" lang="zh-HK">
                 <a:solidFill>
                   <a:srgbClr val="D8B78F"/>
                 </a:solidFill>
                 <a:latin typeface="Microsoft JhengHei"/>
                 <a:ea typeface="Microsoft JhengHei"/>
               </a:rPr>
-              <a:t>願你帶着平安與喜樂，成為身邊人的祝福。</a:t>
+              <a:t>願你帶着平安同喜樂，成為身邊人嘅祝福。</a:t>
             </a:r>
           </a:p>
         </p:txBody>
@@ -21506,7 +21506,7 @@
       <p:grpSpPr/>
       <p:sp>
         <p:nvSpPr>
-          <p:cNvPr id="2" name="Text: LIGHT PARTY  /  青少年團契"/>
+          <p:cNvPr id="2" name="Text: 光明派對  /  青少年團契"/>
           <p:cNvSpPr txBox="1"/>
           <p:nvPr/>
         </p:nvSpPr>
@@ -21538,14 +21538,14 @@
               </a:spcAft>
             </a:pPr>
             <a:r>
-              <a:rPr sz="1100" b="0" lang="zh-TW">
+              <a:rPr sz="1100" b="0" lang="zh-HK">
                 <a:solidFill>
                   <a:srgbClr val="6A513D"/>
                 </a:solidFill>
                 <a:latin typeface="Microsoft JhengHei"/>
                 <a:ea typeface="Microsoft JhengHei"/>
               </a:rPr>
-              <a:t>LIGHT PARTY  /  青少年團契</a:t>
+              <a:t>光明派對  /  青少年團契</a:t>
             </a:r>
           </a:p>
         </p:txBody>
@@ -21584,7 +21584,7 @@
               </a:spcAft>
             </a:pPr>
             <a:r>
-              <a:rPr sz="1100" b="0" lang="zh-TW">
+              <a:rPr sz="1100" b="0" lang="zh-HK">
                 <a:solidFill>
                   <a:srgbClr val="6A513D"/>
                 </a:solidFill>
@@ -21668,7 +21668,7 @@
       </p:cxnSp>
       <p:sp>
         <p:nvSpPr>
-          <p:cNvPr id="6" name="Text: 附錄｜不需投影"/>
+          <p:cNvPr id="6" name="Text: 附錄｜唔需投影"/>
           <p:cNvSpPr txBox="1"/>
           <p:nvPr/>
         </p:nvSpPr>
@@ -21700,21 +21700,21 @@
               </a:spcAft>
             </a:pPr>
             <a:r>
-              <a:rPr sz="1000" b="0" lang="zh-TW">
+              <a:rPr sz="1000" b="0" lang="zh-HK">
                 <a:solidFill>
                   <a:srgbClr val="6A513D"/>
                 </a:solidFill>
                 <a:latin typeface="Microsoft JhengHei"/>
                 <a:ea typeface="Microsoft JhengHei"/>
               </a:rPr>
-              <a:t>附錄｜不需投影</a:t>
-            </a:r>
-          </a:p>
-        </p:txBody>
-      </p:sp>
-      <p:sp>
-        <p:nvSpPr>
-          <p:cNvPr id="7" name="Text: 導師附錄｜正常聚會不需逐項講解"/>
+              <a:t>附錄｜唔需投影</a:t>
+            </a:r>
+          </a:p>
+        </p:txBody>
+      </p:sp>
+      <p:sp>
+        <p:nvSpPr>
+          <p:cNvPr id="7" name="Text: 導師附錄｜正常聚會唔需逐項講解"/>
           <p:cNvSpPr txBox="1"/>
           <p:nvPr/>
         </p:nvSpPr>
@@ -21746,21 +21746,21 @@
               </a:spcAft>
             </a:pPr>
             <a:r>
-              <a:rPr sz="1500" b="1" lang="zh-TW">
+              <a:rPr sz="1500" b="1" lang="zh-HK">
                 <a:solidFill>
                   <a:srgbClr val="804212"/>
                 </a:solidFill>
                 <a:latin typeface="Microsoft JhengHei"/>
                 <a:ea typeface="Microsoft JhengHei"/>
               </a:rPr>
-              <a:t>導師附錄｜正常聚會不需逐項講解</a:t>
-            </a:r>
-          </a:p>
-        </p:txBody>
-      </p:sp>
-      <p:sp>
-        <p:nvSpPr>
-          <p:cNvPr id="8" name="Text: 參考資料與內容說明"/>
+              <a:t>導師附錄｜正常聚會唔需逐項講解</a:t>
+            </a:r>
+          </a:p>
+        </p:txBody>
+      </p:sp>
+      <p:sp>
+        <p:nvSpPr>
+          <p:cNvPr id="8" name="Text: 參考資料同內容講清楚"/>
           <p:cNvSpPr txBox="1"/>
           <p:nvPr/>
         </p:nvSpPr>
@@ -21792,21 +21792,21 @@
               </a:spcAft>
             </a:pPr>
             <a:r>
-              <a:rPr sz="3600" b="1" lang="zh-TW">
+              <a:rPr sz="3600" b="1" lang="zh-HK">
                 <a:solidFill>
                   <a:srgbClr val="2A1E13"/>
                 </a:solidFill>
                 <a:latin typeface="PMingLiU"/>
                 <a:ea typeface="PMingLiU"/>
               </a:rPr>
-              <a:t>參考資料與內容說明</a:t>
-            </a:r>
-          </a:p>
-        </p:txBody>
-      </p:sp>
-      <p:sp>
-        <p:nvSpPr>
-          <p:cNvPr id="9" name="Text: 歷史與設計來源"/>
+              <a:t>參考資料同內容講清楚</a:t>
+            </a:r>
+          </a:p>
+        </p:txBody>
+      </p:sp>
+      <p:sp>
+        <p:nvSpPr>
+          <p:cNvPr id="9" name="Text: 歷史同設計來源"/>
           <p:cNvSpPr txBox="1"/>
           <p:nvPr/>
         </p:nvSpPr>
@@ -21838,21 +21838,21 @@
               </a:spcAft>
             </a:pPr>
             <a:r>
-              <a:rPr sz="2300" b="1" lang="zh-TW">
+              <a:rPr sz="2300" b="1" lang="zh-HK">
                 <a:solidFill>
                   <a:srgbClr val="2A1E13"/>
                 </a:solidFill>
                 <a:latin typeface="PMingLiU"/>
                 <a:ea typeface="PMingLiU"/>
               </a:rPr>
-              <a:t>歷史與設計來源</a:t>
-            </a:r>
-          </a:p>
-        </p:txBody>
-      </p:sp>
-      <p:sp>
-        <p:nvSpPr>
-          <p:cNvPr id="10" name="Text: HISTORY｜History of Halloween ↗"/>
+              <a:t>歷史同設計來源</a:t>
+            </a:r>
+          </a:p>
+        </p:txBody>
+      </p:sp>
+      <p:sp>
+        <p:nvSpPr>
+          <p:cNvPr id="10" name="Text: 歷史資料｜萬聖節歷史簡介 ↗"/>
           <p:cNvSpPr txBox="1"/>
           <p:nvPr/>
         </p:nvSpPr>
@@ -21884,7 +21884,7 @@
               </a:spcAft>
             </a:pPr>
             <a:r>
-              <a:rPr sz="1700" b="0" lang="zh-TW">
+              <a:rPr sz="1700" b="0" lang="zh-HK">
                 <a:solidFill>
                   <a:srgbClr val="804212"/>
                 </a:solidFill>
@@ -21892,7 +21892,7 @@
                 <a:ea typeface="Microsoft JhengHei"/>
                 <a:hlinkClick r:id="rId2"/>
               </a:rPr>
-              <a:t>HISTORY｜History of Halloween ↗</a:t>
+              <a:t>歷史資料｜萬聖節歷史簡介 ↗</a:t>
             </a:r>
           </a:p>
         </p:txBody>
@@ -21931,7 +21931,7 @@
               </a:spcAft>
             </a:pPr>
             <a:r>
-              <a:rPr sz="1100" b="0" lang="zh-TW">
+              <a:rPr sz="1100" b="0" lang="zh-HK">
                 <a:solidFill>
                   <a:srgbClr val="6A513D"/>
                 </a:solidFill>
@@ -21946,7 +21946,7 @@
       </p:sp>
       <p:sp>
         <p:nvSpPr>
-          <p:cNvPr id="12" name="Text: Guizang PPT Skill｜設計與 HTML 模板 ↗"/>
+          <p:cNvPr id="12" name="Text: 歸藏簡報設計範本｜設計同 HTML 模板 ↗"/>
           <p:cNvSpPr txBox="1"/>
           <p:nvPr/>
         </p:nvSpPr>
@@ -21978,7 +21978,7 @@
               </a:spcAft>
             </a:pPr>
             <a:r>
-              <a:rPr sz="1700" b="0" lang="zh-TW">
+              <a:rPr sz="1700" b="0" lang="zh-HK">
                 <a:solidFill>
                   <a:srgbClr val="804212"/>
                 </a:solidFill>
@@ -21986,7 +21986,7 @@
                 <a:ea typeface="Microsoft JhengHei"/>
                 <a:hlinkClick r:id="rId3"/>
               </a:rPr>
-              <a:t>Guizang PPT Skill｜設計與 HTML 模板 ↗</a:t>
+              <a:t>歸藏簡報設計範本｜設計同 HTML 模板 ↗</a:t>
             </a:r>
           </a:p>
         </p:txBody>
@@ -22025,7 +22025,7 @@
               </a:spcAft>
             </a:pPr>
             <a:r>
-              <a:rPr sz="1100" b="0" lang="zh-TW">
+              <a:rPr sz="1100" b="0" lang="zh-HK">
                 <a:solidFill>
                   <a:srgbClr val="6A513D"/>
                 </a:solidFill>
@@ -22040,7 +22040,7 @@
       </p:sp>
       <p:sp>
         <p:nvSpPr>
-          <p:cNvPr id="14" name="Text: 經文：使用者提供的和合本用語｜約 8:12、羅 12:2、提後 "/>
+          <p:cNvPr id="14" name="Text: 經文：使用者提供嘅和合本用語｜約 8:12、羅 12:2、提後 "/>
           <p:cNvSpPr txBox="1"/>
           <p:nvPr/>
         </p:nvSpPr>
@@ -22072,21 +22072,21 @@
               </a:spcAft>
             </a:pPr>
             <a:r>
-              <a:rPr sz="1700" b="0" lang="zh-TW">
+              <a:rPr sz="1700" b="0" lang="zh-HK">
                 <a:solidFill>
                   <a:srgbClr val="2A1E13"/>
                 </a:solidFill>
                 <a:latin typeface="Microsoft JhengHei"/>
                 <a:ea typeface="Microsoft JhengHei"/>
               </a:rPr>
-              <a:t>經文：使用者提供的和合本用語｜約 8:12、羅 12:2、提後 1:7</a:t>
-            </a:r>
-          </a:p>
-        </p:txBody>
-      </p:sp>
-      <p:sp>
-        <p:nvSpPr>
-          <p:cNvPr id="15" name="Text: 內容說明：薩溫節不是冬至前夕；民俗不是單一起源。&#10;不同教會立場不"/>
+              <a:t>經文：使用者提供嘅和合本用語｜約 8:12、羅 12:2、提後 1:7</a:t>
+            </a:r>
+          </a:p>
+        </p:txBody>
+      </p:sp>
+      <p:sp>
+        <p:nvSpPr>
+          <p:cNvPr id="15" name="Text: 內容講清楚：薩溫節唔係冬至前夕；民俗唔係單一起源。&#10;唔同教會立場"/>
           <p:cNvSpPr txBox="1"/>
           <p:nvPr/>
         </p:nvSpPr>
@@ -22118,14 +22118,14 @@
               </a:spcAft>
             </a:pPr>
             <a:r>
-              <a:rPr sz="1500" b="0" lang="zh-TW">
+              <a:rPr sz="1500" b="0" lang="zh-HK">
                 <a:solidFill>
                   <a:srgbClr val="6A513D"/>
                 </a:solidFill>
                 <a:latin typeface="Microsoft JhengHei"/>
                 <a:ea typeface="Microsoft JhengHei"/>
               </a:rPr>
-              <a:t>內容說明：薩溫節不是冬至前夕；民俗不是單一起源。</a:t>
+              <a:t>內容講清楚：薩溫節唔係冬至前夕；民俗唔係單一起源。</a:t>
             </a:r>
           </a:p>
           <a:p>
@@ -22141,14 +22141,14 @@
               </a:spcAft>
             </a:pPr>
             <a:r>
-              <a:rPr sz="1500" b="0" lang="zh-TW">
+              <a:rPr sz="1500" b="0" lang="zh-HK">
                 <a:solidFill>
                   <a:srgbClr val="6A513D"/>
                 </a:solidFill>
                 <a:latin typeface="Microsoft JhengHei"/>
                 <a:ea typeface="Microsoft JhengHei"/>
               </a:rPr>
-              <a:t>不同教會立場不盡相同；本聚會以光明派對作正面回應。</a:t>
+              <a:t>唔同教會立場唔盡相同；本聚會以光明派對作正面回應。</a:t>
             </a:r>
           </a:p>
           <a:p>
@@ -22164,14 +22164,14 @@
               </a:spcAft>
             </a:pPr>
             <a:r>
-              <a:rPr sz="1500" b="0" lang="zh-TW">
+              <a:rPr sz="1500" b="0" lang="zh-HK">
                 <a:solidFill>
                   <a:srgbClr val="6A513D"/>
                 </a:solidFill>
                 <a:latin typeface="Microsoft JhengHei"/>
                 <a:ea typeface="Microsoft JhengHei"/>
               </a:rPr>
-              <a:t>逐頁計畫共 54 分鐘，現場 60 分鐘；附錄只作導師備查。</a:t>
+              <a:t>逐頁安排共 54 分鐘，現場 60 分鐘；附錄只作導師備查。</a:t>
             </a:r>
           </a:p>
         </p:txBody>
@@ -22204,7 +22204,7 @@
       <p:grpSpPr/>
       <p:sp>
         <p:nvSpPr>
-          <p:cNvPr id="2" name="Text: LIGHT PARTY  /  青少年團契"/>
+          <p:cNvPr id="2" name="Text: 光明派對  /  青少年團契"/>
           <p:cNvSpPr txBox="1"/>
           <p:nvPr/>
         </p:nvSpPr>
@@ -22236,14 +22236,14 @@
               </a:spcAft>
             </a:pPr>
             <a:r>
-              <a:rPr sz="1100" b="0" lang="zh-TW">
+              <a:rPr sz="1100" b="0" lang="zh-HK">
                 <a:solidFill>
                   <a:srgbClr val="CFC0A9"/>
                 </a:solidFill>
                 <a:latin typeface="Microsoft JhengHei"/>
                 <a:ea typeface="Microsoft JhengHei"/>
               </a:rPr>
-              <a:t>LIGHT PARTY  /  青少年團契</a:t>
+              <a:t>光明派對  /  青少年團契</a:t>
             </a:r>
           </a:p>
         </p:txBody>
@@ -22282,7 +22282,7 @@
               </a:spcAft>
             </a:pPr>
             <a:r>
-              <a:rPr sz="1100" b="0" lang="zh-TW">
+              <a:rPr sz="1100" b="0" lang="zh-HK">
                 <a:solidFill>
                   <a:srgbClr val="CFC0A9"/>
                 </a:solidFill>
@@ -22398,7 +22398,7 @@
               </a:spcAft>
             </a:pPr>
             <a:r>
-              <a:rPr sz="1000" b="0" lang="zh-TW">
+              <a:rPr sz="1000" b="0" lang="zh-HK">
                 <a:solidFill>
                   <a:srgbClr val="CFC0A9"/>
                 </a:solidFill>
@@ -22444,7 +22444,7 @@
               </a:spcAft>
             </a:pPr>
             <a:r>
-              <a:rPr sz="1500" b="1" lang="zh-TW">
+              <a:rPr sz="1500" b="1" lang="zh-HK">
                 <a:solidFill>
                   <a:srgbClr val="D8B78F"/>
                 </a:solidFill>
@@ -22490,7 +22490,7 @@
               </a:spcAft>
             </a:pPr>
             <a:r>
-              <a:rPr sz="3600" b="1" lang="zh-TW">
+              <a:rPr sz="3600" b="1" lang="zh-HK">
                 <a:solidFill>
                   <a:srgbClr val="EEDFC7"/>
                 </a:solidFill>
@@ -22571,7 +22571,7 @@
               </a:spcAft>
             </a:pPr>
             <a:r>
-              <a:rPr sz="1500" b="1" lang="zh-TW">
+              <a:rPr sz="1500" b="1" lang="zh-HK">
                 <a:solidFill>
                   <a:srgbClr val="D8B78F"/>
                 </a:solidFill>
@@ -22617,7 +22617,7 @@
               </a:spcAft>
             </a:pPr>
             <a:r>
-              <a:rPr sz="2200" b="1" lang="zh-TW">
+              <a:rPr sz="2200" b="1" lang="zh-HK">
                 <a:solidFill>
                   <a:srgbClr val="EEDFC7"/>
                 </a:solidFill>
@@ -22631,7 +22631,7 @@
       </p:sp>
       <p:sp>
         <p:nvSpPr>
-          <p:cNvPr id="12" name="Text: 兩組正面隊名。&#10;一起商量，不取笑答錯的人。"/>
+          <p:cNvPr id="12" name="Text: 兩組聽落正面嘅隊名。&#10;一起商量，唔取笑答錯嘅人。"/>
           <p:cNvSpPr txBox="1"/>
           <p:nvPr/>
         </p:nvSpPr>
@@ -22663,14 +22663,14 @@
               </a:spcAft>
             </a:pPr>
             <a:r>
-              <a:rPr sz="1800" b="0" lang="zh-TW">
+              <a:rPr sz="1800" b="0" lang="zh-HK">
                 <a:solidFill>
                   <a:srgbClr val="CFC0A9"/>
                 </a:solidFill>
                 <a:latin typeface="Microsoft JhengHei"/>
                 <a:ea typeface="Microsoft JhengHei"/>
               </a:rPr>
-              <a:t>兩組正面隊名。</a:t>
+              <a:t>兩組聽落正面嘅隊名。</a:t>
             </a:r>
           </a:p>
           <a:p>
@@ -22686,14 +22686,14 @@
               </a:spcAft>
             </a:pPr>
             <a:r>
-              <a:rPr sz="1800" b="0" lang="zh-TW">
+              <a:rPr sz="1800" b="0" lang="zh-HK">
                 <a:solidFill>
                   <a:srgbClr val="CFC0A9"/>
                 </a:solidFill>
                 <a:latin typeface="Microsoft JhengHei"/>
                 <a:ea typeface="Microsoft JhengHei"/>
               </a:rPr>
-              <a:t>一起商量，不取笑答錯的人。</a:t>
+              <a:t>一起商量，唔取笑答錯嘅人。</a:t>
             </a:r>
           </a:p>
         </p:txBody>
@@ -22767,7 +22767,7 @@
               </a:spcAft>
             </a:pPr>
             <a:r>
-              <a:rPr sz="1500" b="1" lang="zh-TW">
+              <a:rPr sz="1500" b="1" lang="zh-HK">
                 <a:solidFill>
                   <a:srgbClr val="D8B78F"/>
                 </a:solidFill>
@@ -22813,7 +22813,7 @@
               </a:spcAft>
             </a:pPr>
             <a:r>
-              <a:rPr sz="2200" b="1" lang="zh-TW">
+              <a:rPr sz="2200" b="1" lang="zh-HK">
                 <a:solidFill>
                   <a:srgbClr val="EEDFC7"/>
                 </a:solidFill>
@@ -22859,7 +22859,7 @@
               </a:spcAft>
             </a:pPr>
             <a:r>
-              <a:rPr sz="1800" b="0" lang="zh-TW">
+              <a:rPr sz="1800" b="0" lang="zh-HK">
                 <a:solidFill>
                   <a:srgbClr val="CFC0A9"/>
                 </a:solidFill>
@@ -22882,7 +22882,7 @@
               </a:spcAft>
             </a:pPr>
             <a:r>
-              <a:rPr sz="1800" b="0" lang="zh-TW">
+              <a:rPr sz="1800" b="0" lang="zh-HK">
                 <a:solidFill>
                   <a:srgbClr val="CFC0A9"/>
                 </a:solidFill>
@@ -22963,7 +22963,7 @@
               </a:spcAft>
             </a:pPr>
             <a:r>
-              <a:rPr sz="1500" b="1" lang="zh-TW">
+              <a:rPr sz="1500" b="1" lang="zh-HK">
                 <a:solidFill>
                   <a:srgbClr val="D8B78F"/>
                 </a:solidFill>
@@ -23009,7 +23009,7 @@
               </a:spcAft>
             </a:pPr>
             <a:r>
-              <a:rPr sz="2200" b="1" lang="zh-TW">
+              <a:rPr sz="2200" b="1" lang="zh-HK">
                 <a:solidFill>
                   <a:srgbClr val="EEDFC7"/>
                 </a:solidFill>
@@ -23055,7 +23055,7 @@
               </a:spcAft>
             </a:pPr>
             <a:r>
-              <a:rPr sz="1800" b="0" lang="zh-TW">
+              <a:rPr sz="1800" b="0" lang="zh-HK">
                 <a:solidFill>
                   <a:srgbClr val="CFC0A9"/>
                 </a:solidFill>
@@ -23078,7 +23078,7 @@
               </a:spcAft>
             </a:pPr>
             <a:r>
-              <a:rPr sz="1800" b="0" lang="zh-TW">
+              <a:rPr sz="1800" b="0" lang="zh-HK">
                 <a:solidFill>
                   <a:srgbClr val="CFC0A9"/>
                 </a:solidFill>
@@ -23092,7 +23092,7 @@
       </p:sp>
       <p:sp>
         <p:nvSpPr>
-          <p:cNvPr id="21" name="Text: 重點不是輸贏，而是一起看見：我們還有哪些不知道？"/>
+          <p:cNvPr id="21" name="Text: 重點唔係輸贏，而係一起看見：我哋仲有哪些唔知道？"/>
           <p:cNvSpPr txBox="1"/>
           <p:nvPr/>
         </p:nvSpPr>
@@ -23124,14 +23124,14 @@
               </a:spcAft>
             </a:pPr>
             <a:r>
-              <a:rPr sz="1800" b="0" lang="zh-TW">
+              <a:rPr sz="1800" b="0" lang="zh-HK">
                 <a:solidFill>
                   <a:srgbClr val="CFC0A9"/>
                 </a:solidFill>
                 <a:latin typeface="Microsoft JhengHei"/>
                 <a:ea typeface="Microsoft JhengHei"/>
               </a:rPr>
-              <a:t>重點不是輸贏，而是一起看見：我們還有哪些不知道？</a:t>
+              <a:t>重點唔係輸贏，而係一起看見：我哋仲有哪些唔知道？</a:t>
             </a:r>
           </a:p>
         </p:txBody>
@@ -23164,7 +23164,7 @@
       <p:grpSpPr/>
       <p:sp>
         <p:nvSpPr>
-          <p:cNvPr id="2" name="Text: LIGHT PARTY  /  青少年團契"/>
+          <p:cNvPr id="2" name="Text: 光明派對  /  青少年團契"/>
           <p:cNvSpPr txBox="1"/>
           <p:nvPr/>
         </p:nvSpPr>
@@ -23196,14 +23196,14 @@
               </a:spcAft>
             </a:pPr>
             <a:r>
-              <a:rPr sz="1100" b="0" lang="zh-TW">
+              <a:rPr sz="1100" b="0" lang="zh-HK">
                 <a:solidFill>
                   <a:srgbClr val="6A513D"/>
                 </a:solidFill>
                 <a:latin typeface="Microsoft JhengHei"/>
                 <a:ea typeface="Microsoft JhengHei"/>
               </a:rPr>
-              <a:t>LIGHT PARTY  /  青少年團契</a:t>
+              <a:t>光明派對  /  青少年團契</a:t>
             </a:r>
           </a:p>
         </p:txBody>
@@ -23242,7 +23242,7 @@
               </a:spcAft>
             </a:pPr>
             <a:r>
-              <a:rPr sz="1100" b="0" lang="zh-TW">
+              <a:rPr sz="1100" b="0" lang="zh-HK">
                 <a:solidFill>
                   <a:srgbClr val="6A513D"/>
                 </a:solidFill>
@@ -23358,7 +23358,7 @@
               </a:spcAft>
             </a:pPr>
             <a:r>
-              <a:rPr sz="1000" b="0" lang="zh-TW">
+              <a:rPr sz="1000" b="0" lang="zh-HK">
                 <a:solidFill>
                   <a:srgbClr val="6A513D"/>
                 </a:solidFill>
@@ -23372,7 +23372,7 @@
       </p:sp>
       <p:sp>
         <p:nvSpPr>
-          <p:cNvPr id="7" name="Text: 真假挑戰  /  QUESTION 01"/>
+          <p:cNvPr id="7" name="Text: 真假挑戰  /  問題 01"/>
           <p:cNvSpPr txBox="1"/>
           <p:nvPr/>
         </p:nvSpPr>
@@ -23404,21 +23404,21 @@
               </a:spcAft>
             </a:pPr>
             <a:r>
-              <a:rPr sz="1600" b="0" lang="zh-TW">
+              <a:rPr sz="1600" b="0" lang="zh-HK">
                 <a:solidFill>
                   <a:srgbClr val="804212"/>
                 </a:solidFill>
                 <a:latin typeface="Microsoft JhengHei"/>
                 <a:ea typeface="Microsoft JhengHei"/>
               </a:rPr>
-              <a:t>真假挑戰  /  QUESTION 01</a:t>
-            </a:r>
-          </a:p>
-        </p:txBody>
-      </p:sp>
-      <p:sp>
-        <p:nvSpPr>
-          <p:cNvPr id="8" name="Text: 「Trick or Treat」一開始，&#10;就是為了拿巧克力？"/>
+              <a:t>真假挑戰  /  問題 01</a:t>
+            </a:r>
+          </a:p>
+        </p:txBody>
+      </p:sp>
+      <p:sp>
+        <p:nvSpPr>
+          <p:cNvPr id="8" name="Text: 「唔畀糖，就搞搞震」一開始，&#10;係咪為咗攞朱古力？"/>
           <p:cNvSpPr txBox="1"/>
           <p:nvPr/>
         </p:nvSpPr>
@@ -23450,14 +23450,14 @@
               </a:spcAft>
             </a:pPr>
             <a:r>
-              <a:rPr sz="3900" b="1" lang="zh-TW">
+              <a:rPr sz="3900" b="1" lang="zh-HK">
                 <a:solidFill>
                   <a:srgbClr val="2A1E13"/>
                 </a:solidFill>
                 <a:latin typeface="PMingLiU"/>
                 <a:ea typeface="PMingLiU"/>
               </a:rPr>
-              <a:t>「Trick or Treat」一開始，</a:t>
+              <a:t>「唔畀糖，就搞搞震」一開始，</a:t>
             </a:r>
           </a:p>
           <a:p>
@@ -23473,14 +23473,14 @@
               </a:spcAft>
             </a:pPr>
             <a:r>
-              <a:rPr sz="3900" b="1" lang="zh-TW">
+              <a:rPr sz="3900" b="1" lang="zh-HK">
                 <a:solidFill>
                   <a:srgbClr val="2A1E13"/>
                 </a:solidFill>
                 <a:latin typeface="PMingLiU"/>
                 <a:ea typeface="PMingLiU"/>
               </a:rPr>
-              <a:t>就是為了拿巧克力？</a:t>
+              <a:t>係咪為咗攞朱古力？</a:t>
             </a:r>
           </a:p>
         </p:txBody>
@@ -23522,7 +23522,7 @@
       </p:cxnSp>
       <p:sp>
         <p:nvSpPr>
-          <p:cNvPr id="10" name="Text: 真 TRUE"/>
+          <p:cNvPr id="10" name="Text: 真"/>
           <p:cNvSpPr txBox="1"/>
           <p:nvPr/>
         </p:nvSpPr>
@@ -23554,21 +23554,21 @@
               </a:spcAft>
             </a:pPr>
             <a:r>
-              <a:rPr sz="3600" b="0" lang="zh-TW">
+              <a:rPr sz="3600" b="0" lang="zh-HK">
                 <a:solidFill>
                   <a:srgbClr val="2A1E13"/>
                 </a:solidFill>
                 <a:latin typeface="PMingLiU"/>
                 <a:ea typeface="PMingLiU"/>
               </a:rPr>
-              <a:t>真 TRUE</a:t>
-            </a:r>
-          </a:p>
-        </p:txBody>
-      </p:sp>
-      <p:sp>
-        <p:nvSpPr>
-          <p:cNvPr id="11" name="Text: 還是"/>
+              <a:t>真</a:t>
+            </a:r>
+          </a:p>
+        </p:txBody>
+      </p:sp>
+      <p:sp>
+        <p:nvSpPr>
+          <p:cNvPr id="11" name="Text: 仲係"/>
           <p:cNvSpPr txBox="1"/>
           <p:nvPr/>
         </p:nvSpPr>
@@ -23600,21 +23600,21 @@
               </a:spcAft>
             </a:pPr>
             <a:r>
-              <a:rPr sz="1800" b="0" lang="zh-TW">
+              <a:rPr sz="1800" b="0" lang="zh-HK">
                 <a:solidFill>
                   <a:srgbClr val="6A513D"/>
                 </a:solidFill>
                 <a:latin typeface="Microsoft JhengHei"/>
                 <a:ea typeface="Microsoft JhengHei"/>
               </a:rPr>
-              <a:t>還是</a:t>
-            </a:r>
-          </a:p>
-        </p:txBody>
-      </p:sp>
-      <p:sp>
-        <p:nvSpPr>
-          <p:cNvPr id="12" name="Text: 假 FALSE"/>
+              <a:t>仲係</a:t>
+            </a:r>
+          </a:p>
+        </p:txBody>
+      </p:sp>
+      <p:sp>
+        <p:nvSpPr>
+          <p:cNvPr id="12" name="Text: 假"/>
           <p:cNvSpPr txBox="1"/>
           <p:nvPr/>
         </p:nvSpPr>
@@ -23646,14 +23646,14 @@
               </a:spcAft>
             </a:pPr>
             <a:r>
-              <a:rPr sz="3600" b="0" lang="zh-TW">
+              <a:rPr sz="3600" b="0" lang="zh-HK">
                 <a:solidFill>
                   <a:srgbClr val="2A1E13"/>
                 </a:solidFill>
                 <a:latin typeface="PMingLiU"/>
                 <a:ea typeface="PMingLiU"/>
               </a:rPr>
-              <a:t>假 FALSE</a:t>
+              <a:t>假</a:t>
             </a:r>
           </a:p>
         </p:txBody>
@@ -23692,7 +23692,7 @@
               </a:spcAft>
             </a:pPr>
             <a:r>
-              <a:rPr sz="1700" b="0" lang="zh-TW">
+              <a:rPr sz="1700" b="0" lang="zh-HK">
                 <a:solidFill>
                   <a:srgbClr val="6A513D"/>
                 </a:solidFill>
@@ -23732,7 +23732,7 @@
       <p:grpSpPr/>
       <p:sp>
         <p:nvSpPr>
-          <p:cNvPr id="2" name="Text: LIGHT PARTY  /  青少年團契"/>
+          <p:cNvPr id="2" name="Text: 光明派對  /  青少年團契"/>
           <p:cNvSpPr txBox="1"/>
           <p:nvPr/>
         </p:nvSpPr>
@@ -23764,14 +23764,14 @@
               </a:spcAft>
             </a:pPr>
             <a:r>
-              <a:rPr sz="1100" b="0" lang="zh-TW">
+              <a:rPr sz="1100" b="0" lang="zh-HK">
                 <a:solidFill>
                   <a:srgbClr val="6A513D"/>
                 </a:solidFill>
                 <a:latin typeface="Microsoft JhengHei"/>
                 <a:ea typeface="Microsoft JhengHei"/>
               </a:rPr>
-              <a:t>LIGHT PARTY  /  青少年團契</a:t>
+              <a:t>光明派對  /  青少年團契</a:t>
             </a:r>
           </a:p>
         </p:txBody>
@@ -23810,7 +23810,7 @@
               </a:spcAft>
             </a:pPr>
             <a:r>
-              <a:rPr sz="1100" b="0" lang="zh-TW">
+              <a:rPr sz="1100" b="0" lang="zh-HK">
                 <a:solidFill>
                   <a:srgbClr val="6A513D"/>
                 </a:solidFill>
@@ -23926,7 +23926,7 @@
               </a:spcAft>
             </a:pPr>
             <a:r>
-              <a:rPr sz="1000" b="0" lang="zh-TW">
+              <a:rPr sz="1000" b="0" lang="zh-HK">
                 <a:solidFill>
                   <a:srgbClr val="6A513D"/>
                 </a:solidFill>
@@ -23972,7 +23972,7 @@
               </a:spcAft>
             </a:pPr>
             <a:r>
-              <a:rPr sz="1600" b="0" lang="zh-TW">
+              <a:rPr sz="1600" b="0" lang="zh-HK">
                 <a:solidFill>
                   <a:srgbClr val="804212"/>
                 </a:solidFill>
@@ -24018,7 +24018,7 @@
               </a:spcAft>
             </a:pPr>
             <a:r>
-              <a:rPr sz="14000" b="0" lang="zh-TW">
+              <a:rPr sz="14000" b="0" lang="zh-HK">
                 <a:solidFill>
                   <a:srgbClr val="804212"/>
                 </a:solidFill>
@@ -24032,7 +24032,7 @@
       </p:sp>
       <p:sp>
         <p:nvSpPr>
-          <p:cNvPr id="9" name="Text: 不只巧克力，&#10;也不只一種起源。"/>
+          <p:cNvPr id="9" name="Text: 唔只朱古力，&#10;都唔只一種起源。"/>
           <p:cNvSpPr txBox="1"/>
           <p:nvPr/>
         </p:nvSpPr>
@@ -24064,14 +24064,14 @@
               </a:spcAft>
             </a:pPr>
             <a:r>
-              <a:rPr sz="3900" b="1" lang="zh-TW">
+              <a:rPr sz="3900" b="1" lang="zh-HK">
                 <a:solidFill>
                   <a:srgbClr val="2A1E13"/>
                 </a:solidFill>
                 <a:latin typeface="PMingLiU"/>
                 <a:ea typeface="PMingLiU"/>
               </a:rPr>
-              <a:t>不只巧克力，</a:t>
+              <a:t>唔只朱古力，</a:t>
             </a:r>
           </a:p>
           <a:p>
@@ -24087,21 +24087,21 @@
               </a:spcAft>
             </a:pPr>
             <a:r>
-              <a:rPr sz="3900" b="1" lang="zh-TW">
+              <a:rPr sz="3900" b="1" lang="zh-HK">
                 <a:solidFill>
                   <a:srgbClr val="2A1E13"/>
                 </a:solidFill>
                 <a:latin typeface="PMingLiU"/>
                 <a:ea typeface="PMingLiU"/>
               </a:rPr>
-              <a:t>也不只一種起源。</a:t>
-            </a:r>
-          </a:p>
-        </p:txBody>
-      </p:sp>
-      <p:sp>
-        <p:nvSpPr>
-          <p:cNvPr id="10" name="Text: 相關前身包括祈禱換取「靈魂餅」，&#10;以及裝扮表演換取食物或小禮物。"/>
+              <a:t>都唔只一種起源。</a:t>
+            </a:r>
+          </a:p>
+        </p:txBody>
+      </p:sp>
+      <p:sp>
+        <p:nvSpPr>
+          <p:cNvPr id="10" name="Text: 有啲人會為亡者祈禱，換取「靈魂餅」；&#10;亦有人化裝上門表演，換取食"/>
           <p:cNvSpPr txBox="1"/>
           <p:nvPr/>
         </p:nvSpPr>
@@ -24133,14 +24133,14 @@
               </a:spcAft>
             </a:pPr>
             <a:r>
-              <a:rPr sz="2300" b="0" lang="zh-TW">
+              <a:rPr sz="2300" b="0" lang="zh-HK">
                 <a:solidFill>
                   <a:srgbClr val="6A513D"/>
                 </a:solidFill>
                 <a:latin typeface="Microsoft JhengHei"/>
                 <a:ea typeface="Microsoft JhengHei"/>
               </a:rPr>
-              <a:t>相關前身包括祈禱換取「靈魂餅」，</a:t>
+              <a:t>有啲人會為亡者祈禱，換取「靈魂餅」；</a:t>
             </a:r>
           </a:p>
           <a:p>
@@ -24156,14 +24156,14 @@
               </a:spcAft>
             </a:pPr>
             <a:r>
-              <a:rPr sz="2300" b="0" lang="zh-TW">
+              <a:rPr sz="2300" b="0" lang="zh-HK">
                 <a:solidFill>
                   <a:srgbClr val="6A513D"/>
                 </a:solidFill>
                 <a:latin typeface="Microsoft JhengHei"/>
                 <a:ea typeface="Microsoft JhengHei"/>
               </a:rPr>
-              <a:t>以及裝扮表演換取食物或小禮物。</a:t>
+              <a:t>亦有人化裝上門表演，換取食物或小禮物。</a:t>
             </a:r>
           </a:p>
           <a:p>
@@ -24179,21 +24179,21 @@
               </a:spcAft>
             </a:pPr>
             <a:r>
-              <a:rPr sz="2300" b="0" lang="zh-TW">
+              <a:rPr sz="2300" b="0" lang="zh-HK">
                 <a:solidFill>
                   <a:srgbClr val="6A513D"/>
                 </a:solidFill>
                 <a:latin typeface="Microsoft JhengHei"/>
                 <a:ea typeface="Microsoft JhengHei"/>
               </a:rPr>
-              <a:t>現代討糖果由多種習俗逐步演變。</a:t>
-            </a:r>
-          </a:p>
-        </p:txBody>
-      </p:sp>
-      <p:sp>
-        <p:nvSpPr>
-          <p:cNvPr id="11" name="Text: 歷史參考：HISTORY｜History of Hallowee"/>
+              <a:t>今日嘅討糖果習俗由唔同文化慢慢演變而成。</a:t>
+            </a:r>
+          </a:p>
+        </p:txBody>
+      </p:sp>
+      <p:sp>
+        <p:nvSpPr>
+          <p:cNvPr id="11" name="Text: 歷史參考：歷史資料｜萬聖節歷史簡介"/>
           <p:cNvSpPr txBox="1"/>
           <p:nvPr/>
         </p:nvSpPr>
@@ -24225,14 +24225,14 @@
               </a:spcAft>
             </a:pPr>
             <a:r>
-              <a:rPr sz="1300" b="0" lang="zh-TW">
+              <a:rPr sz="1300" b="0" lang="zh-HK">
                 <a:solidFill>
                   <a:srgbClr val="6A513D"/>
                 </a:solidFill>
                 <a:latin typeface="Microsoft JhengHei"/>
                 <a:ea typeface="Microsoft JhengHei"/>
               </a:rPr>
-              <a:t>歷史參考：HISTORY｜History of Halloween</a:t>
+              <a:t>歷史參考：歷史資料｜萬聖節歷史簡介</a:t>
             </a:r>
           </a:p>
         </p:txBody>
@@ -24265,7 +24265,7 @@
       <p:grpSpPr/>
       <p:sp>
         <p:nvSpPr>
-          <p:cNvPr id="2" name="Text: LIGHT PARTY  /  青少年團契"/>
+          <p:cNvPr id="2" name="Text: 光明派對  /  青少年團契"/>
           <p:cNvSpPr txBox="1"/>
           <p:nvPr/>
         </p:nvSpPr>
@@ -24297,14 +24297,14 @@
               </a:spcAft>
             </a:pPr>
             <a:r>
-              <a:rPr sz="1100" b="0" lang="zh-TW">
+              <a:rPr sz="1100" b="0" lang="zh-HK">
                 <a:solidFill>
                   <a:srgbClr val="CFC0A9"/>
                 </a:solidFill>
                 <a:latin typeface="Microsoft JhengHei"/>
                 <a:ea typeface="Microsoft JhengHei"/>
               </a:rPr>
-              <a:t>LIGHT PARTY  /  青少年團契</a:t>
+              <a:t>光明派對  /  青少年團契</a:t>
             </a:r>
           </a:p>
         </p:txBody>
@@ -24343,7 +24343,7 @@
               </a:spcAft>
             </a:pPr>
             <a:r>
-              <a:rPr sz="1100" b="0" lang="zh-TW">
+              <a:rPr sz="1100" b="0" lang="zh-HK">
                 <a:solidFill>
                   <a:srgbClr val="CFC0A9"/>
                 </a:solidFill>
@@ -24459,7 +24459,7 @@
               </a:spcAft>
             </a:pPr>
             <a:r>
-              <a:rPr sz="1000" b="0" lang="zh-TW">
+              <a:rPr sz="1000" b="0" lang="zh-HK">
                 <a:solidFill>
                   <a:srgbClr val="CFC0A9"/>
                 </a:solidFill>
@@ -24473,7 +24473,7 @@
       </p:sp>
       <p:sp>
         <p:nvSpPr>
-          <p:cNvPr id="7" name="Text: 真假挑戰  /  QUESTION 02"/>
+          <p:cNvPr id="7" name="Text: 真假挑戰  /  問題 02"/>
           <p:cNvSpPr txBox="1"/>
           <p:nvPr/>
         </p:nvSpPr>
@@ -24505,21 +24505,21 @@
               </a:spcAft>
             </a:pPr>
             <a:r>
-              <a:rPr sz="1600" b="0" lang="zh-TW">
+              <a:rPr sz="1600" b="0" lang="zh-HK">
                 <a:solidFill>
                   <a:srgbClr val="D8B78F"/>
                 </a:solidFill>
                 <a:latin typeface="Microsoft JhengHei"/>
                 <a:ea typeface="Microsoft JhengHei"/>
               </a:rPr>
-              <a:t>真假挑戰  /  QUESTION 02</a:t>
-            </a:r>
-          </a:p>
-        </p:txBody>
-      </p:sp>
-      <p:sp>
-        <p:nvSpPr>
-          <p:cNvPr id="8" name="Text: Jack-o'-lantern，&#10;最早就是用南瓜做的？"/>
+              <a:t>真假挑戰  /  問題 02</a:t>
+            </a:r>
+          </a:p>
+        </p:txBody>
+      </p:sp>
+      <p:sp>
+        <p:nvSpPr>
+          <p:cNvPr id="8" name="Text: 傑克燈，&#10;最早係用南瓜做嘅？"/>
           <p:cNvSpPr txBox="1"/>
           <p:nvPr/>
         </p:nvSpPr>
@@ -24551,14 +24551,14 @@
               </a:spcAft>
             </a:pPr>
             <a:r>
-              <a:rPr sz="3900" b="1" lang="zh-TW">
+              <a:rPr sz="3900" b="1" lang="zh-HK">
                 <a:solidFill>
                   <a:srgbClr val="EEDFC7"/>
                 </a:solidFill>
                 <a:latin typeface="PMingLiU"/>
                 <a:ea typeface="PMingLiU"/>
               </a:rPr>
-              <a:t>Jack-o'-lantern，</a:t>
+              <a:t>傑克燈，</a:t>
             </a:r>
           </a:p>
           <a:p>
@@ -24574,14 +24574,14 @@
               </a:spcAft>
             </a:pPr>
             <a:r>
-              <a:rPr sz="3900" b="1" lang="zh-TW">
+              <a:rPr sz="3900" b="1" lang="zh-HK">
                 <a:solidFill>
                   <a:srgbClr val="EEDFC7"/>
                 </a:solidFill>
                 <a:latin typeface="PMingLiU"/>
                 <a:ea typeface="PMingLiU"/>
               </a:rPr>
-              <a:t>最早就是用南瓜做的？</a:t>
+              <a:t>最早係用南瓜做嘅？</a:t>
             </a:r>
           </a:p>
         </p:txBody>
@@ -24623,7 +24623,7 @@
       </p:cxnSp>
       <p:sp>
         <p:nvSpPr>
-          <p:cNvPr id="10" name="Text: 真 TRUE"/>
+          <p:cNvPr id="10" name="Text: 真"/>
           <p:cNvSpPr txBox="1"/>
           <p:nvPr/>
         </p:nvSpPr>
@@ -24655,21 +24655,21 @@
               </a:spcAft>
             </a:pPr>
             <a:r>
-              <a:rPr sz="3600" b="0" lang="zh-TW">
+              <a:rPr sz="3600" b="0" lang="zh-HK">
                 <a:solidFill>
                   <a:srgbClr val="EEDFC7"/>
                 </a:solidFill>
                 <a:latin typeface="PMingLiU"/>
                 <a:ea typeface="PMingLiU"/>
               </a:rPr>
-              <a:t>真 TRUE</a:t>
-            </a:r>
-          </a:p>
-        </p:txBody>
-      </p:sp>
-      <p:sp>
-        <p:nvSpPr>
-          <p:cNvPr id="11" name="Text: 還是"/>
+              <a:t>真</a:t>
+            </a:r>
+          </a:p>
+        </p:txBody>
+      </p:sp>
+      <p:sp>
+        <p:nvSpPr>
+          <p:cNvPr id="11" name="Text: 仲係"/>
           <p:cNvSpPr txBox="1"/>
           <p:nvPr/>
         </p:nvSpPr>
@@ -24701,21 +24701,21 @@
               </a:spcAft>
             </a:pPr>
             <a:r>
-              <a:rPr sz="1800" b="0" lang="zh-TW">
+              <a:rPr sz="1800" b="0" lang="zh-HK">
                 <a:solidFill>
                   <a:srgbClr val="CFC0A9"/>
                 </a:solidFill>
                 <a:latin typeface="Microsoft JhengHei"/>
                 <a:ea typeface="Microsoft JhengHei"/>
               </a:rPr>
-              <a:t>還是</a:t>
-            </a:r>
-          </a:p>
-        </p:txBody>
-      </p:sp>
-      <p:sp>
-        <p:nvSpPr>
-          <p:cNvPr id="12" name="Text: 假 FALSE"/>
+              <a:t>仲係</a:t>
+            </a:r>
+          </a:p>
+        </p:txBody>
+      </p:sp>
+      <p:sp>
+        <p:nvSpPr>
+          <p:cNvPr id="12" name="Text: 假"/>
           <p:cNvSpPr txBox="1"/>
           <p:nvPr/>
         </p:nvSpPr>
@@ -24747,14 +24747,14 @@
               </a:spcAft>
             </a:pPr>
             <a:r>
-              <a:rPr sz="3600" b="0" lang="zh-TW">
+              <a:rPr sz="3600" b="0" lang="zh-HK">
                 <a:solidFill>
                   <a:srgbClr val="EEDFC7"/>
                 </a:solidFill>
                 <a:latin typeface="PMingLiU"/>
                 <a:ea typeface="PMingLiU"/>
               </a:rPr>
-              <a:t>假 FALSE</a:t>
+              <a:t>假</a:t>
             </a:r>
           </a:p>
         </p:txBody>
@@ -24793,7 +24793,7 @@
               </a:spcAft>
             </a:pPr>
             <a:r>
-              <a:rPr sz="1700" b="0" lang="zh-TW">
+              <a:rPr sz="1700" b="0" lang="zh-HK">
                 <a:solidFill>
                   <a:srgbClr val="CFC0A9"/>
                 </a:solidFill>
@@ -24833,7 +24833,7 @@
       <p:grpSpPr/>
       <p:sp>
         <p:nvSpPr>
-          <p:cNvPr id="2" name="Text: LIGHT PARTY  /  青少年團契"/>
+          <p:cNvPr id="2" name="Text: 光明派對  /  青少年團契"/>
           <p:cNvSpPr txBox="1"/>
           <p:nvPr/>
         </p:nvSpPr>
@@ -24865,14 +24865,14 @@
               </a:spcAft>
             </a:pPr>
             <a:r>
-              <a:rPr sz="1100" b="0" lang="zh-TW">
+              <a:rPr sz="1100" b="0" lang="zh-HK">
                 <a:solidFill>
                   <a:srgbClr val="6A513D"/>
                 </a:solidFill>
                 <a:latin typeface="Microsoft JhengHei"/>
                 <a:ea typeface="Microsoft JhengHei"/>
               </a:rPr>
-              <a:t>LIGHT PARTY  /  青少年團契</a:t>
+              <a:t>光明派對  /  青少年團契</a:t>
             </a:r>
           </a:p>
         </p:txBody>
@@ -24911,7 +24911,7 @@
               </a:spcAft>
             </a:pPr>
             <a:r>
-              <a:rPr sz="1100" b="0" lang="zh-TW">
+              <a:rPr sz="1100" b="0" lang="zh-HK">
                 <a:solidFill>
                   <a:srgbClr val="6A513D"/>
                 </a:solidFill>
@@ -25027,7 +25027,7 @@
               </a:spcAft>
             </a:pPr>
             <a:r>
-              <a:rPr sz="1000" b="0" lang="zh-TW">
+              <a:rPr sz="1000" b="0" lang="zh-HK">
                 <a:solidFill>
                   <a:srgbClr val="6A513D"/>
                 </a:solidFill>
@@ -25073,7 +25073,7 @@
               </a:spcAft>
             </a:pPr>
             <a:r>
-              <a:rPr sz="1600" b="0" lang="zh-TW">
+              <a:rPr sz="1600" b="0" lang="zh-HK">
                 <a:solidFill>
                   <a:srgbClr val="804212"/>
                 </a:solidFill>
@@ -25119,7 +25119,7 @@
               </a:spcAft>
             </a:pPr>
             <a:r>
-              <a:rPr sz="14000" b="0" lang="zh-TW">
+              <a:rPr sz="14000" b="0" lang="zh-HK">
                 <a:solidFill>
                   <a:srgbClr val="804212"/>
                 </a:solidFill>
@@ -25165,7 +25165,7 @@
               </a:spcAft>
             </a:pPr>
             <a:r>
-              <a:rPr sz="3900" b="1" lang="zh-TW">
+              <a:rPr sz="3900" b="1" lang="zh-HK">
                 <a:solidFill>
                   <a:srgbClr val="2A1E13"/>
                 </a:solidFill>
@@ -25188,7 +25188,7 @@
               </a:spcAft>
             </a:pPr>
             <a:r>
-              <a:rPr sz="3900" b="1" lang="zh-TW">
+              <a:rPr sz="3900" b="1" lang="zh-HK">
                 <a:solidFill>
                   <a:srgbClr val="2A1E13"/>
                 </a:solidFill>
@@ -25202,7 +25202,7 @@
       </p:sp>
       <p:sp>
         <p:nvSpPr>
-          <p:cNvPr id="10" name="Text: 愛爾蘭等地早期常雕刻蕪菁等根莖。&#10;移民到北美後，南瓜逐漸成為常見"/>
+          <p:cNvPr id="10" name="Text: 愛爾蘭等地早期常雕刻蕪菁等根莖。&#10;移民到北美後，南瓜慢慢成為常見"/>
           <p:cNvSpPr txBox="1"/>
           <p:nvPr/>
         </p:nvSpPr>
@@ -25234,7 +25234,7 @@
               </a:spcAft>
             </a:pPr>
             <a:r>
-              <a:rPr sz="2300" b="0" lang="zh-TW">
+              <a:rPr sz="2300" b="0" lang="zh-HK">
                 <a:solidFill>
                   <a:srgbClr val="6A513D"/>
                 </a:solidFill>
@@ -25257,14 +25257,14 @@
               </a:spcAft>
             </a:pPr>
             <a:r>
-              <a:rPr sz="2300" b="0" lang="zh-TW">
+              <a:rPr sz="2300" b="0" lang="zh-HK">
                 <a:solidFill>
                   <a:srgbClr val="6A513D"/>
                 </a:solidFill>
                 <a:latin typeface="Microsoft JhengHei"/>
                 <a:ea typeface="Microsoft JhengHei"/>
               </a:rPr>
-              <a:t>移民到北美後，南瓜逐漸成為常見材料。</a:t>
+              <a:t>移民到北美後，南瓜慢慢成為常見材料。</a:t>
             </a:r>
           </a:p>
           <a:p>
@@ -25280,14 +25280,14 @@
               </a:spcAft>
             </a:pPr>
             <a:r>
-              <a:rPr sz="2300" b="0" lang="zh-TW">
+              <a:rPr sz="2300" b="0" lang="zh-HK">
                 <a:solidFill>
                   <a:srgbClr val="6A513D"/>
                 </a:solidFill>
                 <a:latin typeface="Microsoft JhengHei"/>
                 <a:ea typeface="Microsoft JhengHei"/>
               </a:rPr>
-              <a:t>同一個符號，也會隨文化而改變。</a:t>
+              <a:t>同一個符號，都會隨文化而改變。</a:t>
             </a:r>
           </a:p>
         </p:txBody>
@@ -25326,7 +25326,7 @@
               </a:spcAft>
             </a:pPr>
             <a:r>
-              <a:rPr sz="1300" b="0" lang="zh-TW">
+              <a:rPr sz="1300" b="0" lang="zh-HK">
                 <a:solidFill>
                   <a:srgbClr val="6A513D"/>
                 </a:solidFill>
@@ -25366,7 +25366,7 @@
       <p:grpSpPr/>
       <p:sp>
         <p:nvSpPr>
-          <p:cNvPr id="2" name="Text: LIGHT PARTY  /  青少年團契"/>
+          <p:cNvPr id="2" name="Text: 光明派對  /  青少年團契"/>
           <p:cNvSpPr txBox="1"/>
           <p:nvPr/>
         </p:nvSpPr>
@@ -25398,14 +25398,14 @@
               </a:spcAft>
             </a:pPr>
             <a:r>
-              <a:rPr sz="1100" b="0" lang="zh-TW">
+              <a:rPr sz="1100" b="0" lang="zh-HK">
                 <a:solidFill>
                   <a:srgbClr val="CFC0A9"/>
                 </a:solidFill>
                 <a:latin typeface="Microsoft JhengHei"/>
                 <a:ea typeface="Microsoft JhengHei"/>
               </a:rPr>
-              <a:t>LIGHT PARTY  /  青少年團契</a:t>
+              <a:t>光明派對  /  青少年團契</a:t>
             </a:r>
           </a:p>
         </p:txBody>
@@ -25444,7 +25444,7 @@
               </a:spcAft>
             </a:pPr>
             <a:r>
-              <a:rPr sz="1100" b="0" lang="zh-TW">
+              <a:rPr sz="1100" b="0" lang="zh-HK">
                 <a:solidFill>
                   <a:srgbClr val="CFC0A9"/>
                 </a:solidFill>
@@ -25560,7 +25560,7 @@
               </a:spcAft>
             </a:pPr>
             <a:r>
-              <a:rPr sz="1000" b="0" lang="zh-TW">
+              <a:rPr sz="1000" b="0" lang="zh-HK">
                 <a:solidFill>
                   <a:srgbClr val="CFC0A9"/>
                 </a:solidFill>
@@ -25574,7 +25574,7 @@
       </p:sp>
       <p:sp>
         <p:nvSpPr>
-          <p:cNvPr id="7" name="Text: 真假挑戰  /  QUESTION 03"/>
+          <p:cNvPr id="7" name="Text: 真假挑戰  /  問題 03"/>
           <p:cNvSpPr txBox="1"/>
           <p:nvPr/>
         </p:nvSpPr>
@@ -25606,21 +25606,21 @@
               </a:spcAft>
             </a:pPr>
             <a:r>
-              <a:rPr sz="1600" b="0" lang="zh-TW">
+              <a:rPr sz="1600" b="0" lang="zh-HK">
                 <a:solidFill>
                   <a:srgbClr val="D8B78F"/>
                 </a:solidFill>
                 <a:latin typeface="Microsoft JhengHei"/>
                 <a:ea typeface="Microsoft JhengHei"/>
               </a:rPr>
-              <a:t>真假挑戰  /  QUESTION 03</a:t>
-            </a:r>
-          </a:p>
-        </p:txBody>
-      </p:sp>
-      <p:sp>
-        <p:nvSpPr>
-          <p:cNvPr id="8" name="Text: 萬聖節的歷史背景，&#10;包括古凱爾特人的薩溫節？"/>
+              <a:t>真假挑戰  /  問題 03</a:t>
+            </a:r>
+          </a:p>
+        </p:txBody>
+      </p:sp>
+      <p:sp>
+        <p:nvSpPr>
+          <p:cNvPr id="8" name="Text: 萬聖節嘅歷史背景，&#10;包括古凱爾特人嘅薩溫節？"/>
           <p:cNvSpPr txBox="1"/>
           <p:nvPr/>
         </p:nvSpPr>
@@ -25652,14 +25652,14 @@
               </a:spcAft>
             </a:pPr>
             <a:r>
-              <a:rPr sz="3900" b="1" lang="zh-TW">
+              <a:rPr sz="3900" b="1" lang="zh-HK">
                 <a:solidFill>
                   <a:srgbClr val="EEDFC7"/>
                 </a:solidFill>
                 <a:latin typeface="PMingLiU"/>
                 <a:ea typeface="PMingLiU"/>
               </a:rPr>
-              <a:t>萬聖節的歷史背景，</a:t>
+              <a:t>萬聖節嘅歷史背景，</a:t>
             </a:r>
           </a:p>
           <a:p>
@@ -25675,14 +25675,14 @@
               </a:spcAft>
             </a:pPr>
             <a:r>
-              <a:rPr sz="3900" b="1" lang="zh-TW">
+              <a:rPr sz="3900" b="1" lang="zh-HK">
                 <a:solidFill>
                   <a:srgbClr val="EEDFC7"/>
                 </a:solidFill>
                 <a:latin typeface="PMingLiU"/>
                 <a:ea typeface="PMingLiU"/>
               </a:rPr>
-              <a:t>包括古凱爾特人的薩溫節？</a:t>
+              <a:t>包括古凱爾特人嘅薩溫節？</a:t>
             </a:r>
           </a:p>
         </p:txBody>
@@ -25724,7 +25724,7 @@
       </p:cxnSp>
       <p:sp>
         <p:nvSpPr>
-          <p:cNvPr id="10" name="Text: 真 TRUE"/>
+          <p:cNvPr id="10" name="Text: 真"/>
           <p:cNvSpPr txBox="1"/>
           <p:nvPr/>
         </p:nvSpPr>
@@ -25756,21 +25756,21 @@
               </a:spcAft>
             </a:pPr>
             <a:r>
-              <a:rPr sz="3600" b="0" lang="zh-TW">
+              <a:rPr sz="3600" b="0" lang="zh-HK">
                 <a:solidFill>
                   <a:srgbClr val="EEDFC7"/>
                 </a:solidFill>
                 <a:latin typeface="PMingLiU"/>
                 <a:ea typeface="PMingLiU"/>
               </a:rPr>
-              <a:t>真 TRUE</a:t>
-            </a:r>
-          </a:p>
-        </p:txBody>
-      </p:sp>
-      <p:sp>
-        <p:nvSpPr>
-          <p:cNvPr id="11" name="Text: 還是"/>
+              <a:t>真</a:t>
+            </a:r>
+          </a:p>
+        </p:txBody>
+      </p:sp>
+      <p:sp>
+        <p:nvSpPr>
+          <p:cNvPr id="11" name="Text: 仲係"/>
           <p:cNvSpPr txBox="1"/>
           <p:nvPr/>
         </p:nvSpPr>
@@ -25802,21 +25802,21 @@
               </a:spcAft>
             </a:pPr>
             <a:r>
-              <a:rPr sz="1800" b="0" lang="zh-TW">
+              <a:rPr sz="1800" b="0" lang="zh-HK">
                 <a:solidFill>
                   <a:srgbClr val="CFC0A9"/>
                 </a:solidFill>
                 <a:latin typeface="Microsoft JhengHei"/>
                 <a:ea typeface="Microsoft JhengHei"/>
               </a:rPr>
-              <a:t>還是</a:t>
-            </a:r>
-          </a:p>
-        </p:txBody>
-      </p:sp>
-      <p:sp>
-        <p:nvSpPr>
-          <p:cNvPr id="12" name="Text: 假 FALSE"/>
+              <a:t>仲係</a:t>
+            </a:r>
+          </a:p>
+        </p:txBody>
+      </p:sp>
+      <p:sp>
+        <p:nvSpPr>
+          <p:cNvPr id="12" name="Text: 假"/>
           <p:cNvSpPr txBox="1"/>
           <p:nvPr/>
         </p:nvSpPr>
@@ -25848,14 +25848,14 @@
               </a:spcAft>
             </a:pPr>
             <a:r>
-              <a:rPr sz="3600" b="0" lang="zh-TW">
+              <a:rPr sz="3600" b="0" lang="zh-HK">
                 <a:solidFill>
                   <a:srgbClr val="EEDFC7"/>
                 </a:solidFill>
                 <a:latin typeface="PMingLiU"/>
                 <a:ea typeface="PMingLiU"/>
               </a:rPr>
-              <a:t>假 FALSE</a:t>
+              <a:t>假</a:t>
             </a:r>
           </a:p>
         </p:txBody>
@@ -25894,7 +25894,7 @@
               </a:spcAft>
             </a:pPr>
             <a:r>
-              <a:rPr sz="1700" b="0" lang="zh-TW">
+              <a:rPr sz="1700" b="0" lang="zh-HK">
                 <a:solidFill>
                   <a:srgbClr val="CFC0A9"/>
                 </a:solidFill>
@@ -25934,7 +25934,7 @@
       <p:grpSpPr/>
       <p:sp>
         <p:nvSpPr>
-          <p:cNvPr id="2" name="Text: LIGHT PARTY  /  青少年團契"/>
+          <p:cNvPr id="2" name="Text: 光明派對  /  青少年團契"/>
           <p:cNvSpPr txBox="1"/>
           <p:nvPr/>
         </p:nvSpPr>
@@ -25966,14 +25966,14 @@
               </a:spcAft>
             </a:pPr>
             <a:r>
-              <a:rPr sz="1100" b="0" lang="zh-TW">
+              <a:rPr sz="1100" b="0" lang="zh-HK">
                 <a:solidFill>
                   <a:srgbClr val="6A513D"/>
                 </a:solidFill>
                 <a:latin typeface="Microsoft JhengHei"/>
                 <a:ea typeface="Microsoft JhengHei"/>
               </a:rPr>
-              <a:t>LIGHT PARTY  /  青少年團契</a:t>
+              <a:t>光明派對  /  青少年團契</a:t>
             </a:r>
           </a:p>
         </p:txBody>
@@ -26012,7 +26012,7 @@
               </a:spcAft>
             </a:pPr>
             <a:r>
-              <a:rPr sz="1100" b="0" lang="zh-TW">
+              <a:rPr sz="1100" b="0" lang="zh-HK">
                 <a:solidFill>
                   <a:srgbClr val="6A513D"/>
                 </a:solidFill>
@@ -26128,7 +26128,7 @@
               </a:spcAft>
             </a:pPr>
             <a:r>
-              <a:rPr sz="1000" b="0" lang="zh-TW">
+              <a:rPr sz="1000" b="0" lang="zh-HK">
                 <a:solidFill>
                   <a:srgbClr val="6A513D"/>
                 </a:solidFill>
@@ -26174,7 +26174,7 @@
               </a:spcAft>
             </a:pPr>
             <a:r>
-              <a:rPr sz="1600" b="0" lang="zh-TW">
+              <a:rPr sz="1600" b="0" lang="zh-HK">
                 <a:solidFill>
                   <a:srgbClr val="804212"/>
                 </a:solidFill>
@@ -26220,7 +26220,7 @@
               </a:spcAft>
             </a:pPr>
             <a:r>
-              <a:rPr sz="14000" b="0" lang="zh-TW">
+              <a:rPr sz="14000" b="0" lang="zh-HK">
                 <a:solidFill>
                   <a:srgbClr val="804212"/>
                 </a:solidFill>
@@ -26266,7 +26266,7 @@
               </a:spcAft>
             </a:pPr>
             <a:r>
-              <a:rPr sz="3900" b="1" lang="zh-TW">
+              <a:rPr sz="3900" b="1" lang="zh-HK">
                 <a:solidFill>
                   <a:srgbClr val="2A1E13"/>
                 </a:solidFill>
@@ -26289,7 +26289,7 @@
               </a:spcAft>
             </a:pPr>
             <a:r>
-              <a:rPr sz="3900" b="1" lang="zh-TW">
+              <a:rPr sz="3900" b="1" lang="zh-HK">
                 <a:solidFill>
                   <a:srgbClr val="2A1E13"/>
                 </a:solidFill>
@@ -26303,7 +26303,7 @@
       </p:sp>
       <p:sp>
         <p:nvSpPr>
-          <p:cNvPr id="10" name="Text: 薩溫節（Samhain）是重要歷史背景之一。&#10;時間約在 10 月"/>
+          <p:cNvPr id="10" name="Text: 薩溫節係重要歷史背景之一。&#10;時間大約係 10 月 31 日至 1"/>
           <p:cNvSpPr txBox="1"/>
           <p:nvPr/>
         </p:nvSpPr>
@@ -26335,14 +26335,14 @@
               </a:spcAft>
             </a:pPr>
             <a:r>
-              <a:rPr sz="2300" b="0" lang="zh-TW">
+              <a:rPr sz="2300" b="0" lang="zh-HK">
                 <a:solidFill>
                   <a:srgbClr val="6A513D"/>
                 </a:solidFill>
                 <a:latin typeface="Microsoft JhengHei"/>
                 <a:ea typeface="Microsoft JhengHei"/>
               </a:rPr>
-              <a:t>薩溫節（Samhain）是重要歷史背景之一。</a:t>
+              <a:t>薩溫節係重要歷史背景之一。</a:t>
             </a:r>
           </a:p>
           <a:p>
@@ -26358,14 +26358,14 @@
               </a:spcAft>
             </a:pPr>
             <a:r>
-              <a:rPr sz="2300" b="0" lang="zh-TW">
+              <a:rPr sz="2300" b="0" lang="zh-HK">
                 <a:solidFill>
                   <a:srgbClr val="6A513D"/>
                 </a:solidFill>
                 <a:latin typeface="Microsoft JhengHei"/>
                 <a:ea typeface="Microsoft JhengHei"/>
               </a:rPr>
-              <a:t>時間約在 10 月 31 日至 11 月 1 日。</a:t>
+              <a:t>時間大約係 10 月 31 日至 11 月 1 日。</a:t>
             </a:r>
           </a:p>
           <a:p>
@@ -26381,14 +26381,14 @@
               </a:spcAft>
             </a:pPr>
             <a:r>
-              <a:rPr sz="2300" b="0" lang="zh-TW">
+              <a:rPr sz="2300" b="0" lang="zh-HK">
                 <a:solidFill>
                   <a:srgbClr val="6A513D"/>
                 </a:solidFill>
                 <a:latin typeface="Microsoft JhengHei"/>
                 <a:ea typeface="Microsoft JhengHei"/>
               </a:rPr>
-              <a:t>不是冬至前夕；也不是萬聖節的唯一來源。</a:t>
+              <a:t>唔係冬至前夕，亦唔係萬聖節唯一嘅來源。</a:t>
             </a:r>
           </a:p>
         </p:txBody>
@@ -26427,7 +26427,7 @@
               </a:spcAft>
             </a:pPr>
             <a:r>
-              <a:rPr sz="1300" b="0" lang="zh-TW">
+              <a:rPr sz="1300" b="0" lang="zh-HK">
                 <a:solidFill>
                   <a:srgbClr val="6A513D"/>
                 </a:solidFill>

--- a/light-party.pptx
+++ b/light-party.pptx
@@ -671,7 +671,7 @@
           </a:p>
           <a:p>
             <a:r>
-              <a:t>1. 大家平時諗起萬聖節，可能就係扮靚、食糖果、同朋友去派對。</a:t>
+              <a:t>1. 大家平時諗起萬聖節，可能就係扮靚、食糖果、同朋友去 Party。</a:t>
             </a:r>
           </a:p>
           <a:p>
@@ -793,7 +793,7 @@
           </a:p>
           <a:p>
             <a:r>
-              <a:t>2. 第二層：西方教會嘅諸聖節係 11 月 1 日；前一晚稱 諸聖節前夕，名稱後來成為 萬聖節。</a:t>
+              <a:t>2. 第二層：西方教會嘅諸聖節係 11 月 1 日；前一晚稱 All Hallows' Eve，名稱後來成為 Halloween。</a:t>
             </a:r>
           </a:p>
           <a:p>
@@ -2853,7 +2853,7 @@
           </a:p>
           <a:p>
             <a:r>
-              <a:t>2. 歷史概述參考 歷史資料 嘅 萬聖節歷史簡介；唔同民俗之間嘅具體關係仲有學者討論，唔會宣稱只有單一起源。</a:t>
+              <a:t>2. 歷史概述參考 HISTORY 嘅 History of Halloween；唔同民俗之間嘅具體關係仲有學者討論，唔會宣稱只有單一起源。</a:t>
             </a:r>
           </a:p>
           <a:p>
@@ -2992,7 +2992,7 @@
           <a:p/>
           <a:p>
             <a:r>
-              <a:t>轉去下一頁：第一題：討糖果最初係咪為咗攞朱古力？</a:t>
+              <a:t>轉去下一頁：第一題：討糖果最初就係為咗攞朱古力嗎？</a:t>
             </a:r>
           </a:p>
           <a:p>
@@ -3199,7 +3199,7 @@
           </a:p>
           <a:p>
             <a:r>
-              <a:t>呢頁重點：用審慎嘅講法交代祈禱換取靈魂餅、化裝表演同現代討糖果習俗之間嘅關係。</a:t>
+              <a:t>呢頁重點：用較審慎嘅講法交代 souling、guising 同現代討糖果嘅關係。</a:t>
             </a:r>
           </a:p>
           <a:p/>
@@ -3215,7 +3215,7 @@
           </a:p>
           <a:p>
             <a:r>
-              <a:t>2. 相關前身之一係為亡者祈禱，換取食物或「靈魂餅」；另一種做法係化裝上門表演，換取食物或小禮物。</a:t>
+              <a:t>2. 相關前身包括 souling：以為亡者祈禱換取食物或「靈魂餅」；同埋 guising：裝扮後表演換取食物或小禮物。</a:t>
             </a:r>
           </a:p>
           <a:p>
@@ -3333,7 +3333,7 @@
           </a:p>
           <a:p>
             <a:r>
-              <a:t>1. 讀題：「傑克燈 最早就係用南瓜做嘅？」</a:t>
+              <a:t>1. 讀題：「Jack-o'-lantern 最早就係用南瓜做嘅？」</a:t>
             </a:r>
           </a:p>
           <a:p>
@@ -6733,7 +6733,7 @@
       <p:grpSpPr/>
       <p:sp>
         <p:nvSpPr>
-          <p:cNvPr id="2" name="Text: 光明派對  /  青少年團契"/>
+          <p:cNvPr id="2" name="Text: LIGHT PARTY  /  青少年團契"/>
           <p:cNvSpPr txBox="1"/>
           <p:nvPr/>
         </p:nvSpPr>
@@ -6772,7 +6772,7 @@
                 <a:latin typeface="Microsoft JhengHei"/>
                 <a:ea typeface="Microsoft JhengHei"/>
               </a:rPr>
-              <a:t>光明派對  /  青少年團契</a:t>
+              <a:t>LIGHT PARTY  /  青少年團契</a:t>
             </a:r>
           </a:p>
         </p:txBody>
@@ -7600,7 +7600,7 @@
       </p:cxnSp>
       <p:sp>
         <p:nvSpPr>
-          <p:cNvPr id="23" name="Text: 光明&#10;派對"/>
+          <p:cNvPr id="23" name="Text: LIGHT&#10;PARTY"/>
           <p:cNvSpPr txBox="1"/>
           <p:nvPr/>
         </p:nvSpPr>
@@ -7639,7 +7639,7 @@
                 <a:latin typeface="PMingLiU"/>
                 <a:ea typeface="PMingLiU"/>
               </a:rPr>
-              <a:t>光明</a:t>
+              <a:t>LIGHT</a:t>
             </a:r>
           </a:p>
           <a:p>
@@ -7662,7 +7662,7 @@
                 <a:latin typeface="PMingLiU"/>
                 <a:ea typeface="PMingLiU"/>
               </a:rPr>
-              <a:t>派對</a:t>
+              <a:t>PARTY</a:t>
             </a:r>
           </a:p>
         </p:txBody>
@@ -7695,7 +7695,7 @@
       <p:grpSpPr/>
       <p:sp>
         <p:nvSpPr>
-          <p:cNvPr id="2" name="Text: 光明派對  /  青少年團契"/>
+          <p:cNvPr id="2" name="Text: LIGHT PARTY  /  青少年團契"/>
           <p:cNvSpPr txBox="1"/>
           <p:nvPr/>
         </p:nvSpPr>
@@ -7734,7 +7734,7 @@
                 <a:latin typeface="Microsoft JhengHei"/>
                 <a:ea typeface="Microsoft JhengHei"/>
               </a:rPr>
-              <a:t>光明派對  /  青少年團契</a:t>
+              <a:t>LIGHT PARTY  /  青少年團契</a:t>
             </a:r>
           </a:p>
         </p:txBody>
@@ -8090,7 +8090,7 @@
       <p:grpSpPr/>
       <p:sp>
         <p:nvSpPr>
-          <p:cNvPr id="2" name="Text: 光明派對  /  青少年團契"/>
+          <p:cNvPr id="2" name="Text: LIGHT PARTY  /  青少年團契"/>
           <p:cNvSpPr txBox="1"/>
           <p:nvPr/>
         </p:nvSpPr>
@@ -8129,7 +8129,7 @@
                 <a:latin typeface="Microsoft JhengHei"/>
                 <a:ea typeface="Microsoft JhengHei"/>
               </a:rPr>
-              <a:t>光明派對  /  青少年團契</a:t>
+              <a:t>LIGHT PARTY  /  青少年團契</a:t>
             </a:r>
           </a:p>
         </p:txBody>
@@ -8471,7 +8471,7 @@
       </p:sp>
       <p:sp>
         <p:nvSpPr>
-          <p:cNvPr id="11" name="Text: 薩溫節 薩溫節"/>
+          <p:cNvPr id="11" name="Text: 薩溫節 Samhain"/>
           <p:cNvSpPr txBox="1"/>
           <p:nvPr/>
         </p:nvSpPr>
@@ -8510,7 +8510,7 @@
                 <a:latin typeface="PMingLiU"/>
                 <a:ea typeface="PMingLiU"/>
               </a:rPr>
-              <a:t>薩溫節 薩溫節</a:t>
+              <a:t>薩溫節 Samhain</a:t>
             </a:r>
           </a:p>
         </p:txBody>
@@ -8736,7 +8736,7 @@
       </p:sp>
       <p:sp>
         <p:nvSpPr>
-          <p:cNvPr id="16" name="Text: 11 月 1 日為諸聖節。&#10;前一晚 諸聖節前夕，&#10;後來成為 萬聖"/>
+          <p:cNvPr id="16" name="Text: 11 月 1 日為諸聖節。&#10;前一晚 All Hallows' E"/>
           <p:cNvSpPr txBox="1"/>
           <p:nvPr/>
         </p:nvSpPr>
@@ -8798,7 +8798,7 @@
                 <a:latin typeface="Microsoft JhengHei"/>
                 <a:ea typeface="Microsoft JhengHei"/>
               </a:rPr>
-              <a:t>前一晚 諸聖節前夕，</a:t>
+              <a:t>前一晚 All Hallows' Eve，</a:t>
             </a:r>
           </a:p>
           <a:p>
@@ -8821,7 +8821,7 @@
                 <a:latin typeface="Microsoft JhengHei"/>
                 <a:ea typeface="Microsoft JhengHei"/>
               </a:rPr>
-              <a:t>後來成為 萬聖節。</a:t>
+              <a:t>後來成為 Halloween。</a:t>
             </a:r>
           </a:p>
         </p:txBody>
@@ -9047,7 +9047,7 @@
       </p:sp>
       <p:sp>
         <p:nvSpPr>
-          <p:cNvPr id="21" name="Text: 歷史記述 ≠ 證實鬼魂存在｜參考：歷史資料，萬聖節歷史簡介"/>
+          <p:cNvPr id="21" name="Text: 歷史記述 ≠ 證實鬼魂存在｜參考：HISTORY，History"/>
           <p:cNvSpPr txBox="1"/>
           <p:nvPr/>
         </p:nvSpPr>
@@ -9087,7 +9087,7 @@
                 <a:ea typeface="Microsoft JhengHei"/>
                 <a:hlinkClick r:id="rId2"/>
               </a:rPr>
-              <a:t>歷史記述 ≠ 證實鬼魂存在｜參考：歷史資料，萬聖節歷史簡介</a:t>
+              <a:t>歷史記述 ≠ 證實鬼魂存在｜參考：HISTORY，History of Halloween</a:t>
             </a:r>
           </a:p>
         </p:txBody>
@@ -9120,7 +9120,7 @@
       <p:grpSpPr/>
       <p:sp>
         <p:nvSpPr>
-          <p:cNvPr id="2" name="Text: 光明派對  /  青少年團契"/>
+          <p:cNvPr id="2" name="Text: LIGHT PARTY  /  青少年團契"/>
           <p:cNvSpPr txBox="1"/>
           <p:nvPr/>
         </p:nvSpPr>
@@ -9159,7 +9159,7 @@
                 <a:latin typeface="Microsoft JhengHei"/>
                 <a:ea typeface="Microsoft JhengHei"/>
               </a:rPr>
-              <a:t>光明派對  /  青少年團契</a:t>
+              <a:t>LIGHT PARTY  /  青少年團契</a:t>
             </a:r>
           </a:p>
         </p:txBody>
@@ -10080,7 +10080,7 @@
       <p:grpSpPr/>
       <p:sp>
         <p:nvSpPr>
-          <p:cNvPr id="2" name="Text: 光明派對  /  青少年團契"/>
+          <p:cNvPr id="2" name="Text: LIGHT PARTY  /  青少年團契"/>
           <p:cNvSpPr txBox="1"/>
           <p:nvPr/>
         </p:nvSpPr>
@@ -10119,7 +10119,7 @@
                 <a:latin typeface="Microsoft JhengHei"/>
                 <a:ea typeface="Microsoft JhengHei"/>
               </a:rPr>
-              <a:t>光明派對  /  青少年團契</a:t>
+              <a:t>LIGHT PARTY  /  青少年團契</a:t>
             </a:r>
           </a:p>
         </p:txBody>
@@ -10798,7 +10798,7 @@
       <p:grpSpPr/>
       <p:sp>
         <p:nvSpPr>
-          <p:cNvPr id="2" name="Text: 光明派對  /  青少年團契"/>
+          <p:cNvPr id="2" name="Text: LIGHT PARTY  /  青少年團契"/>
           <p:cNvSpPr txBox="1"/>
           <p:nvPr/>
         </p:nvSpPr>
@@ -10837,7 +10837,7 @@
                 <a:latin typeface="Microsoft JhengHei"/>
                 <a:ea typeface="Microsoft JhengHei"/>
               </a:rPr>
-              <a:t>光明派對  /  青少年團契</a:t>
+              <a:t>LIGHT PARTY  /  青少年團契</a:t>
             </a:r>
           </a:p>
         </p:txBody>
@@ -11539,7 +11539,7 @@
       <p:grpSpPr/>
       <p:sp>
         <p:nvSpPr>
-          <p:cNvPr id="2" name="Text: 光明派對  /  青少年團契"/>
+          <p:cNvPr id="2" name="Text: LIGHT PARTY  /  青少年團契"/>
           <p:cNvSpPr txBox="1"/>
           <p:nvPr/>
         </p:nvSpPr>
@@ -11578,7 +11578,7 @@
                 <a:latin typeface="Microsoft JhengHei"/>
                 <a:ea typeface="Microsoft JhengHei"/>
               </a:rPr>
-              <a:t>光明派對  /  青少年團契</a:t>
+              <a:t>LIGHT PARTY  /  青少年團契</a:t>
             </a:r>
           </a:p>
         </p:txBody>
@@ -12257,7 +12257,7 @@
       <p:grpSpPr/>
       <p:sp>
         <p:nvSpPr>
-          <p:cNvPr id="2" name="Text: 光明派對  /  青少年團契"/>
+          <p:cNvPr id="2" name="Text: LIGHT PARTY  /  青少年團契"/>
           <p:cNvSpPr txBox="1"/>
           <p:nvPr/>
         </p:nvSpPr>
@@ -12296,7 +12296,7 @@
                 <a:latin typeface="Microsoft JhengHei"/>
                 <a:ea typeface="Microsoft JhengHei"/>
               </a:rPr>
-              <a:t>光明派對  /  青少年團契</a:t>
+              <a:t>LIGHT PARTY  /  青少年團契</a:t>
             </a:r>
           </a:p>
         </p:txBody>
@@ -13217,7 +13217,7 @@
       <p:grpSpPr/>
       <p:sp>
         <p:nvSpPr>
-          <p:cNvPr id="2" name="Text: 光明派對  /  青少年團契"/>
+          <p:cNvPr id="2" name="Text: LIGHT PARTY  /  青少年團契"/>
           <p:cNvSpPr txBox="1"/>
           <p:nvPr/>
         </p:nvSpPr>
@@ -13256,7 +13256,7 @@
                 <a:latin typeface="Microsoft JhengHei"/>
                 <a:ea typeface="Microsoft JhengHei"/>
               </a:rPr>
-              <a:t>光明派對  /  青少年團契</a:t>
+              <a:t>LIGHT PARTY  /  青少年團契</a:t>
             </a:r>
           </a:p>
         </p:txBody>
@@ -13924,7 +13924,7 @@
       <p:grpSpPr/>
       <p:sp>
         <p:nvSpPr>
-          <p:cNvPr id="2" name="Text: 光明派對  /  青少年團契"/>
+          <p:cNvPr id="2" name="Text: LIGHT PARTY  /  青少年團契"/>
           <p:cNvSpPr txBox="1"/>
           <p:nvPr/>
         </p:nvSpPr>
@@ -13963,7 +13963,7 @@
                 <a:latin typeface="Microsoft JhengHei"/>
                 <a:ea typeface="Microsoft JhengHei"/>
               </a:rPr>
-              <a:t>光明派對  /  青少年團契</a:t>
+              <a:t>LIGHT PARTY  /  青少年團契</a:t>
             </a:r>
           </a:p>
         </p:txBody>
@@ -14953,7 +14953,7 @@
       <p:grpSpPr/>
       <p:sp>
         <p:nvSpPr>
-          <p:cNvPr id="2" name="Text: 光明派對  /  青少年團契"/>
+          <p:cNvPr id="2" name="Text: LIGHT PARTY  /  青少年團契"/>
           <p:cNvSpPr txBox="1"/>
           <p:nvPr/>
         </p:nvSpPr>
@@ -14992,7 +14992,7 @@
                 <a:latin typeface="Microsoft JhengHei"/>
                 <a:ea typeface="Microsoft JhengHei"/>
               </a:rPr>
-              <a:t>光明派對  /  青少年團契</a:t>
+              <a:t>LIGHT PARTY  /  青少年團契</a:t>
             </a:r>
           </a:p>
         </p:txBody>
@@ -15394,7 +15394,7 @@
       <p:grpSpPr/>
       <p:sp>
         <p:nvSpPr>
-          <p:cNvPr id="2" name="Text: 光明派對  /  青少年團契"/>
+          <p:cNvPr id="2" name="Text: LIGHT PARTY  /  青少年團契"/>
           <p:cNvSpPr txBox="1"/>
           <p:nvPr/>
         </p:nvSpPr>
@@ -15433,7 +15433,7 @@
                 <a:latin typeface="Microsoft JhengHei"/>
                 <a:ea typeface="Microsoft JhengHei"/>
               </a:rPr>
-              <a:t>光明派對  /  青少年團契</a:t>
+              <a:t>LIGHT PARTY  /  青少年團契</a:t>
             </a:r>
           </a:p>
         </p:txBody>
@@ -15602,7 +15602,7 @@
       </p:sp>
       <p:sp>
         <p:nvSpPr>
-          <p:cNvPr id="7" name="Text: 今日流程"/>
+          <p:cNvPr id="7" name="Text: TODAY'S ROUTE"/>
           <p:cNvSpPr txBox="1"/>
           <p:nvPr/>
         </p:nvSpPr>
@@ -15641,7 +15641,7 @@
                 <a:latin typeface="Microsoft JhengHei"/>
                 <a:ea typeface="Microsoft JhengHei"/>
               </a:rPr>
-              <a:t>今日流程</a:t>
+              <a:t>TODAY'S ROUTE</a:t>
             </a:r>
           </a:p>
         </p:txBody>
@@ -16631,7 +16631,7 @@
       <p:grpSpPr/>
       <p:sp>
         <p:nvSpPr>
-          <p:cNvPr id="2" name="Text: 光明派對  /  青少年團契"/>
+          <p:cNvPr id="2" name="Text: LIGHT PARTY  /  青少年團契"/>
           <p:cNvSpPr txBox="1"/>
           <p:nvPr/>
         </p:nvSpPr>
@@ -16670,7 +16670,7 @@
                 <a:latin typeface="Microsoft JhengHei"/>
                 <a:ea typeface="Microsoft JhengHei"/>
               </a:rPr>
-              <a:t>光明派對  /  青少年團契</a:t>
+              <a:t>LIGHT PARTY  /  青少年團契</a:t>
             </a:r>
           </a:p>
         </p:txBody>
@@ -17026,7 +17026,7 @@
       <p:grpSpPr/>
       <p:sp>
         <p:nvSpPr>
-          <p:cNvPr id="2" name="Text: 光明派對  /  青少年團契"/>
+          <p:cNvPr id="2" name="Text: LIGHT PARTY  /  青少年團契"/>
           <p:cNvSpPr txBox="1"/>
           <p:nvPr/>
         </p:nvSpPr>
@@ -17065,7 +17065,7 @@
                 <a:latin typeface="Microsoft JhengHei"/>
                 <a:ea typeface="Microsoft JhengHei"/>
               </a:rPr>
-              <a:t>光明派對  /  青少年團契</a:t>
+              <a:t>LIGHT PARTY  /  青少年團契</a:t>
             </a:r>
           </a:p>
         </p:txBody>
@@ -17986,7 +17986,7 @@
       <p:grpSpPr/>
       <p:sp>
         <p:nvSpPr>
-          <p:cNvPr id="2" name="Text: 光明派對  /  青少年團契"/>
+          <p:cNvPr id="2" name="Text: LIGHT PARTY  /  青少年團契"/>
           <p:cNvSpPr txBox="1"/>
           <p:nvPr/>
         </p:nvSpPr>
@@ -18025,7 +18025,7 @@
                 <a:latin typeface="Microsoft JhengHei"/>
                 <a:ea typeface="Microsoft JhengHei"/>
               </a:rPr>
-              <a:t>光明派對  /  青少年團契</a:t>
+              <a:t>LIGHT PARTY  /  青少年團契</a:t>
             </a:r>
           </a:p>
         </p:txBody>
@@ -18496,7 +18496,7 @@
       <p:grpSpPr/>
       <p:sp>
         <p:nvSpPr>
-          <p:cNvPr id="2" name="Text: 光明派對  /  青少年團契"/>
+          <p:cNvPr id="2" name="Text: LIGHT PARTY  /  青少年團契"/>
           <p:cNvSpPr txBox="1"/>
           <p:nvPr/>
         </p:nvSpPr>
@@ -18535,7 +18535,7 @@
                 <a:latin typeface="Microsoft JhengHei"/>
                 <a:ea typeface="Microsoft JhengHei"/>
               </a:rPr>
-              <a:t>光明派對  /  青少年團契</a:t>
+              <a:t>LIGHT PARTY  /  青少年團契</a:t>
             </a:r>
           </a:p>
         </p:txBody>
@@ -19410,7 +19410,7 @@
       <p:grpSpPr/>
       <p:sp>
         <p:nvSpPr>
-          <p:cNvPr id="2" name="Text: 光明派對  /  青少年團契"/>
+          <p:cNvPr id="2" name="Text: LIGHT PARTY  /  青少年團契"/>
           <p:cNvSpPr txBox="1"/>
           <p:nvPr/>
         </p:nvSpPr>
@@ -19449,7 +19449,7 @@
                 <a:latin typeface="Microsoft JhengHei"/>
                 <a:ea typeface="Microsoft JhengHei"/>
               </a:rPr>
-              <a:t>光明派對  /  青少年團契</a:t>
+              <a:t>LIGHT PARTY  /  青少年團契</a:t>
             </a:r>
           </a:p>
         </p:txBody>
@@ -19710,7 +19710,7 @@
       </p:sp>
       <p:sp>
         <p:nvSpPr>
-          <p:cNvPr id="9" name="Text: 光明派對"/>
+          <p:cNvPr id="9" name="Text: LIGHT PARTY"/>
           <p:cNvSpPr txBox="1"/>
           <p:nvPr/>
         </p:nvSpPr>
@@ -19749,7 +19749,7 @@
                 <a:latin typeface="PMingLiU"/>
                 <a:ea typeface="PMingLiU"/>
               </a:rPr>
-              <a:t>光明派對</a:t>
+              <a:t>LIGHT PARTY</a:t>
             </a:r>
           </a:p>
         </p:txBody>
@@ -20326,7 +20326,7 @@
       <p:grpSpPr/>
       <p:sp>
         <p:nvSpPr>
-          <p:cNvPr id="2" name="Text: 光明派對  /  青少年團契"/>
+          <p:cNvPr id="2" name="Text: LIGHT PARTY  /  青少年團契"/>
           <p:cNvSpPr txBox="1"/>
           <p:nvPr/>
         </p:nvSpPr>
@@ -20365,7 +20365,7 @@
                 <a:latin typeface="Microsoft JhengHei"/>
                 <a:ea typeface="Microsoft JhengHei"/>
               </a:rPr>
-              <a:t>光明派對  /  青少年團契</a:t>
+              <a:t>LIGHT PARTY  /  青少年團契</a:t>
             </a:r>
           </a:p>
         </p:txBody>
@@ -21065,7 +21065,7 @@
       <p:grpSpPr/>
       <p:sp>
         <p:nvSpPr>
-          <p:cNvPr id="2" name="Text: 光明派對  /  青少年團契"/>
+          <p:cNvPr id="2" name="Text: LIGHT PARTY  /  青少年團契"/>
           <p:cNvSpPr txBox="1"/>
           <p:nvPr/>
         </p:nvSpPr>
@@ -21104,7 +21104,7 @@
                 <a:latin typeface="Microsoft JhengHei"/>
                 <a:ea typeface="Microsoft JhengHei"/>
               </a:rPr>
-              <a:t>光明派對  /  青少年團契</a:t>
+              <a:t>LIGHT PARTY  /  青少年團契</a:t>
             </a:r>
           </a:p>
         </p:txBody>
@@ -21506,7 +21506,7 @@
       <p:grpSpPr/>
       <p:sp>
         <p:nvSpPr>
-          <p:cNvPr id="2" name="Text: 光明派對  /  青少年團契"/>
+          <p:cNvPr id="2" name="Text: LIGHT PARTY  /  青少年團契"/>
           <p:cNvSpPr txBox="1"/>
           <p:nvPr/>
         </p:nvSpPr>
@@ -21545,7 +21545,7 @@
                 <a:latin typeface="Microsoft JhengHei"/>
                 <a:ea typeface="Microsoft JhengHei"/>
               </a:rPr>
-              <a:t>光明派對  /  青少年團契</a:t>
+              <a:t>LIGHT PARTY  /  青少年團契</a:t>
             </a:r>
           </a:p>
         </p:txBody>
@@ -21852,7 +21852,7 @@
       </p:sp>
       <p:sp>
         <p:nvSpPr>
-          <p:cNvPr id="10" name="Text: 歷史資料｜萬聖節歷史簡介 ↗"/>
+          <p:cNvPr id="10" name="Text: HISTORY｜History of Halloween ↗"/>
           <p:cNvSpPr txBox="1"/>
           <p:nvPr/>
         </p:nvSpPr>
@@ -21892,7 +21892,7 @@
                 <a:ea typeface="Microsoft JhengHei"/>
                 <a:hlinkClick r:id="rId2"/>
               </a:rPr>
-              <a:t>歷史資料｜萬聖節歷史簡介 ↗</a:t>
+              <a:t>HISTORY｜History of Halloween ↗</a:t>
             </a:r>
           </a:p>
         </p:txBody>
@@ -21946,7 +21946,7 @@
       </p:sp>
       <p:sp>
         <p:nvSpPr>
-          <p:cNvPr id="12" name="Text: 歸藏簡報設計範本｜設計同 HTML 模板 ↗"/>
+          <p:cNvPr id="12" name="Text: Guizang PPT Skill｜設計同 HTML 模板 ↗"/>
           <p:cNvSpPr txBox="1"/>
           <p:nvPr/>
         </p:nvSpPr>
@@ -21986,7 +21986,7 @@
                 <a:ea typeface="Microsoft JhengHei"/>
                 <a:hlinkClick r:id="rId3"/>
               </a:rPr>
-              <a:t>歸藏簡報設計範本｜設計同 HTML 模板 ↗</a:t>
+              <a:t>Guizang PPT Skill｜設計同 HTML 模板 ↗</a:t>
             </a:r>
           </a:p>
         </p:txBody>
@@ -22204,7 +22204,7 @@
       <p:grpSpPr/>
       <p:sp>
         <p:nvSpPr>
-          <p:cNvPr id="2" name="Text: 光明派對  /  青少年團契"/>
+          <p:cNvPr id="2" name="Text: LIGHT PARTY  /  青少年團契"/>
           <p:cNvSpPr txBox="1"/>
           <p:nvPr/>
         </p:nvSpPr>
@@ -22243,7 +22243,7 @@
                 <a:latin typeface="Microsoft JhengHei"/>
                 <a:ea typeface="Microsoft JhengHei"/>
               </a:rPr>
-              <a:t>光明派對  /  青少年團契</a:t>
+              <a:t>LIGHT PARTY  /  青少年團契</a:t>
             </a:r>
           </a:p>
         </p:txBody>
@@ -23164,7 +23164,7 @@
       <p:grpSpPr/>
       <p:sp>
         <p:nvSpPr>
-          <p:cNvPr id="2" name="Text: 光明派對  /  青少年團契"/>
+          <p:cNvPr id="2" name="Text: LIGHT PARTY  /  青少年團契"/>
           <p:cNvSpPr txBox="1"/>
           <p:nvPr/>
         </p:nvSpPr>
@@ -23203,7 +23203,7 @@
                 <a:latin typeface="Microsoft JhengHei"/>
                 <a:ea typeface="Microsoft JhengHei"/>
               </a:rPr>
-              <a:t>光明派對  /  青少年團契</a:t>
+              <a:t>LIGHT PARTY  /  青少年團契</a:t>
             </a:r>
           </a:p>
         </p:txBody>
@@ -23372,7 +23372,7 @@
       </p:sp>
       <p:sp>
         <p:nvSpPr>
-          <p:cNvPr id="7" name="Text: 真假挑戰  /  問題 01"/>
+          <p:cNvPr id="7" name="Text: 真假挑戰  /  QUESTION 01"/>
           <p:cNvSpPr txBox="1"/>
           <p:nvPr/>
         </p:nvSpPr>
@@ -23411,14 +23411,14 @@
                 <a:latin typeface="Microsoft JhengHei"/>
                 <a:ea typeface="Microsoft JhengHei"/>
               </a:rPr>
-              <a:t>真假挑戰  /  問題 01</a:t>
-            </a:r>
-          </a:p>
-        </p:txBody>
-      </p:sp>
-      <p:sp>
-        <p:nvSpPr>
-          <p:cNvPr id="8" name="Text: 「唔畀糖，就搞搞震」一開始，&#10;係咪為咗攞朱古力？"/>
+              <a:t>真假挑戰  /  QUESTION 01</a:t>
+            </a:r>
+          </a:p>
+        </p:txBody>
+      </p:sp>
+      <p:sp>
+        <p:nvSpPr>
+          <p:cNvPr id="8" name="Text: 「Trick or Treat」一開始，&#10;就係為咗攞朱古力？"/>
           <p:cNvSpPr txBox="1"/>
           <p:nvPr/>
         </p:nvSpPr>
@@ -23457,7 +23457,7 @@
                 <a:latin typeface="PMingLiU"/>
                 <a:ea typeface="PMingLiU"/>
               </a:rPr>
-              <a:t>「唔畀糖，就搞搞震」一開始，</a:t>
+              <a:t>「Trick or Treat」一開始，</a:t>
             </a:r>
           </a:p>
           <a:p>
@@ -23480,7 +23480,7 @@
                 <a:latin typeface="PMingLiU"/>
                 <a:ea typeface="PMingLiU"/>
               </a:rPr>
-              <a:t>係咪為咗攞朱古力？</a:t>
+              <a:t>就係為咗攞朱古力？</a:t>
             </a:r>
           </a:p>
         </p:txBody>
@@ -23522,7 +23522,7 @@
       </p:cxnSp>
       <p:sp>
         <p:nvSpPr>
-          <p:cNvPr id="10" name="Text: 真"/>
+          <p:cNvPr id="10" name="Text: 真 TRUE"/>
           <p:cNvSpPr txBox="1"/>
           <p:nvPr/>
         </p:nvSpPr>
@@ -23561,7 +23561,7 @@
                 <a:latin typeface="PMingLiU"/>
                 <a:ea typeface="PMingLiU"/>
               </a:rPr>
-              <a:t>真</a:t>
+              <a:t>真 TRUE</a:t>
             </a:r>
           </a:p>
         </p:txBody>
@@ -23614,7 +23614,7 @@
       </p:sp>
       <p:sp>
         <p:nvSpPr>
-          <p:cNvPr id="12" name="Text: 假"/>
+          <p:cNvPr id="12" name="Text: 假 FALSE"/>
           <p:cNvSpPr txBox="1"/>
           <p:nvPr/>
         </p:nvSpPr>
@@ -23653,7 +23653,7 @@
                 <a:latin typeface="PMingLiU"/>
                 <a:ea typeface="PMingLiU"/>
               </a:rPr>
-              <a:t>假</a:t>
+              <a:t>假 FALSE</a:t>
             </a:r>
           </a:p>
         </p:txBody>
@@ -23732,7 +23732,7 @@
       <p:grpSpPr/>
       <p:sp>
         <p:nvSpPr>
-          <p:cNvPr id="2" name="Text: 光明派對  /  青少年團契"/>
+          <p:cNvPr id="2" name="Text: LIGHT PARTY  /  青少年團契"/>
           <p:cNvSpPr txBox="1"/>
           <p:nvPr/>
         </p:nvSpPr>
@@ -23771,7 +23771,7 @@
                 <a:latin typeface="Microsoft JhengHei"/>
                 <a:ea typeface="Microsoft JhengHei"/>
               </a:rPr>
-              <a:t>光明派對  /  青少年團契</a:t>
+              <a:t>LIGHT PARTY  /  青少年團契</a:t>
             </a:r>
           </a:p>
         </p:txBody>
@@ -24101,7 +24101,7 @@
       </p:sp>
       <p:sp>
         <p:nvSpPr>
-          <p:cNvPr id="10" name="Text: 有啲人會為亡者祈禱，換取「靈魂餅」；&#10;亦有人化裝上門表演，換取食"/>
+          <p:cNvPr id="10" name="Text: 相關前身包括祈禱換取「靈魂餅」，&#10;同埋裝扮表演換取食物或小禮物。"/>
           <p:cNvSpPr txBox="1"/>
           <p:nvPr/>
         </p:nvSpPr>
@@ -24140,7 +24140,7 @@
                 <a:latin typeface="Microsoft JhengHei"/>
                 <a:ea typeface="Microsoft JhengHei"/>
               </a:rPr>
-              <a:t>有啲人會為亡者祈禱，換取「靈魂餅」；</a:t>
+              <a:t>相關前身包括祈禱換取「靈魂餅」，</a:t>
             </a:r>
           </a:p>
           <a:p>
@@ -24163,7 +24163,7 @@
                 <a:latin typeface="Microsoft JhengHei"/>
                 <a:ea typeface="Microsoft JhengHei"/>
               </a:rPr>
-              <a:t>亦有人化裝上門表演，換取食物或小禮物。</a:t>
+              <a:t>同埋裝扮表演換取食物或小禮物。</a:t>
             </a:r>
           </a:p>
           <a:p>
@@ -24186,14 +24186,14 @@
                 <a:latin typeface="Microsoft JhengHei"/>
                 <a:ea typeface="Microsoft JhengHei"/>
               </a:rPr>
-              <a:t>今日嘅討糖果習俗由唔同文化慢慢演變而成。</a:t>
-            </a:r>
-          </a:p>
-        </p:txBody>
-      </p:sp>
-      <p:sp>
-        <p:nvSpPr>
-          <p:cNvPr id="11" name="Text: 歷史參考：歷史資料｜萬聖節歷史簡介"/>
+              <a:t>現代討糖果由多種習俗慢慢演變。</a:t>
+            </a:r>
+          </a:p>
+        </p:txBody>
+      </p:sp>
+      <p:sp>
+        <p:nvSpPr>
+          <p:cNvPr id="11" name="Text: 歷史參考：HISTORY｜History of Hallowee"/>
           <p:cNvSpPr txBox="1"/>
           <p:nvPr/>
         </p:nvSpPr>
@@ -24232,7 +24232,7 @@
                 <a:latin typeface="Microsoft JhengHei"/>
                 <a:ea typeface="Microsoft JhengHei"/>
               </a:rPr>
-              <a:t>歷史參考：歷史資料｜萬聖節歷史簡介</a:t>
+              <a:t>歷史參考：HISTORY｜History of Halloween</a:t>
             </a:r>
           </a:p>
         </p:txBody>
@@ -24265,7 +24265,7 @@
       <p:grpSpPr/>
       <p:sp>
         <p:nvSpPr>
-          <p:cNvPr id="2" name="Text: 光明派對  /  青少年團契"/>
+          <p:cNvPr id="2" name="Text: LIGHT PARTY  /  青少年團契"/>
           <p:cNvSpPr txBox="1"/>
           <p:nvPr/>
         </p:nvSpPr>
@@ -24304,7 +24304,7 @@
                 <a:latin typeface="Microsoft JhengHei"/>
                 <a:ea typeface="Microsoft JhengHei"/>
               </a:rPr>
-              <a:t>光明派對  /  青少年團契</a:t>
+              <a:t>LIGHT PARTY  /  青少年團契</a:t>
             </a:r>
           </a:p>
         </p:txBody>
@@ -24473,7 +24473,7 @@
       </p:sp>
       <p:sp>
         <p:nvSpPr>
-          <p:cNvPr id="7" name="Text: 真假挑戰  /  問題 02"/>
+          <p:cNvPr id="7" name="Text: 真假挑戰  /  QUESTION 02"/>
           <p:cNvSpPr txBox="1"/>
           <p:nvPr/>
         </p:nvSpPr>
@@ -24512,14 +24512,14 @@
                 <a:latin typeface="Microsoft JhengHei"/>
                 <a:ea typeface="Microsoft JhengHei"/>
               </a:rPr>
-              <a:t>真假挑戰  /  問題 02</a:t>
-            </a:r>
-          </a:p>
-        </p:txBody>
-      </p:sp>
-      <p:sp>
-        <p:nvSpPr>
-          <p:cNvPr id="8" name="Text: 傑克燈，&#10;最早係用南瓜做嘅？"/>
+              <a:t>真假挑戰  /  QUESTION 02</a:t>
+            </a:r>
+          </a:p>
+        </p:txBody>
+      </p:sp>
+      <p:sp>
+        <p:nvSpPr>
+          <p:cNvPr id="8" name="Text: Jack-o'-lantern，&#10;最早就係用南瓜做嘅？"/>
           <p:cNvSpPr txBox="1"/>
           <p:nvPr/>
         </p:nvSpPr>
@@ -24558,7 +24558,7 @@
                 <a:latin typeface="PMingLiU"/>
                 <a:ea typeface="PMingLiU"/>
               </a:rPr>
-              <a:t>傑克燈，</a:t>
+              <a:t>Jack-o'-lantern，</a:t>
             </a:r>
           </a:p>
           <a:p>
@@ -24581,7 +24581,7 @@
                 <a:latin typeface="PMingLiU"/>
                 <a:ea typeface="PMingLiU"/>
               </a:rPr>
-              <a:t>最早係用南瓜做嘅？</a:t>
+              <a:t>最早就係用南瓜做嘅？</a:t>
             </a:r>
           </a:p>
         </p:txBody>
@@ -24623,7 +24623,7 @@
       </p:cxnSp>
       <p:sp>
         <p:nvSpPr>
-          <p:cNvPr id="10" name="Text: 真"/>
+          <p:cNvPr id="10" name="Text: 真 TRUE"/>
           <p:cNvSpPr txBox="1"/>
           <p:nvPr/>
         </p:nvSpPr>
@@ -24662,7 +24662,7 @@
                 <a:latin typeface="PMingLiU"/>
                 <a:ea typeface="PMingLiU"/>
               </a:rPr>
-              <a:t>真</a:t>
+              <a:t>真 TRUE</a:t>
             </a:r>
           </a:p>
         </p:txBody>
@@ -24715,7 +24715,7 @@
       </p:sp>
       <p:sp>
         <p:nvSpPr>
-          <p:cNvPr id="12" name="Text: 假"/>
+          <p:cNvPr id="12" name="Text: 假 FALSE"/>
           <p:cNvSpPr txBox="1"/>
           <p:nvPr/>
         </p:nvSpPr>
@@ -24754,7 +24754,7 @@
                 <a:latin typeface="PMingLiU"/>
                 <a:ea typeface="PMingLiU"/>
               </a:rPr>
-              <a:t>假</a:t>
+              <a:t>假 FALSE</a:t>
             </a:r>
           </a:p>
         </p:txBody>
@@ -24833,7 +24833,7 @@
       <p:grpSpPr/>
       <p:sp>
         <p:nvSpPr>
-          <p:cNvPr id="2" name="Text: 光明派對  /  青少年團契"/>
+          <p:cNvPr id="2" name="Text: LIGHT PARTY  /  青少年團契"/>
           <p:cNvSpPr txBox="1"/>
           <p:nvPr/>
         </p:nvSpPr>
@@ -24872,7 +24872,7 @@
                 <a:latin typeface="Microsoft JhengHei"/>
                 <a:ea typeface="Microsoft JhengHei"/>
               </a:rPr>
-              <a:t>光明派對  /  青少年團契</a:t>
+              <a:t>LIGHT PARTY  /  青少年團契</a:t>
             </a:r>
           </a:p>
         </p:txBody>
@@ -25366,7 +25366,7 @@
       <p:grpSpPr/>
       <p:sp>
         <p:nvSpPr>
-          <p:cNvPr id="2" name="Text: 光明派對  /  青少年團契"/>
+          <p:cNvPr id="2" name="Text: LIGHT PARTY  /  青少年團契"/>
           <p:cNvSpPr txBox="1"/>
           <p:nvPr/>
         </p:nvSpPr>
@@ -25405,7 +25405,7 @@
                 <a:latin typeface="Microsoft JhengHei"/>
                 <a:ea typeface="Microsoft JhengHei"/>
               </a:rPr>
-              <a:t>光明派對  /  青少年團契</a:t>
+              <a:t>LIGHT PARTY  /  青少年團契</a:t>
             </a:r>
           </a:p>
         </p:txBody>
@@ -25574,7 +25574,7 @@
       </p:sp>
       <p:sp>
         <p:nvSpPr>
-          <p:cNvPr id="7" name="Text: 真假挑戰  /  問題 03"/>
+          <p:cNvPr id="7" name="Text: 真假挑戰  /  QUESTION 03"/>
           <p:cNvSpPr txBox="1"/>
           <p:nvPr/>
         </p:nvSpPr>
@@ -25613,7 +25613,7 @@
                 <a:latin typeface="Microsoft JhengHei"/>
                 <a:ea typeface="Microsoft JhengHei"/>
               </a:rPr>
-              <a:t>真假挑戰  /  問題 03</a:t>
+              <a:t>真假挑戰  /  QUESTION 03</a:t>
             </a:r>
           </a:p>
         </p:txBody>
@@ -25724,7 +25724,7 @@
       </p:cxnSp>
       <p:sp>
         <p:nvSpPr>
-          <p:cNvPr id="10" name="Text: 真"/>
+          <p:cNvPr id="10" name="Text: 真 TRUE"/>
           <p:cNvSpPr txBox="1"/>
           <p:nvPr/>
         </p:nvSpPr>
@@ -25763,7 +25763,7 @@
                 <a:latin typeface="PMingLiU"/>
                 <a:ea typeface="PMingLiU"/>
               </a:rPr>
-              <a:t>真</a:t>
+              <a:t>真 TRUE</a:t>
             </a:r>
           </a:p>
         </p:txBody>
@@ -25816,7 +25816,7 @@
       </p:sp>
       <p:sp>
         <p:nvSpPr>
-          <p:cNvPr id="12" name="Text: 假"/>
+          <p:cNvPr id="12" name="Text: 假 FALSE"/>
           <p:cNvSpPr txBox="1"/>
           <p:nvPr/>
         </p:nvSpPr>
@@ -25855,7 +25855,7 @@
                 <a:latin typeface="PMingLiU"/>
                 <a:ea typeface="PMingLiU"/>
               </a:rPr>
-              <a:t>假</a:t>
+              <a:t>假 FALSE</a:t>
             </a:r>
           </a:p>
         </p:txBody>
@@ -25934,7 +25934,7 @@
       <p:grpSpPr/>
       <p:sp>
         <p:nvSpPr>
-          <p:cNvPr id="2" name="Text: 光明派對  /  青少年團契"/>
+          <p:cNvPr id="2" name="Text: LIGHT PARTY  /  青少年團契"/>
           <p:cNvSpPr txBox="1"/>
           <p:nvPr/>
         </p:nvSpPr>
@@ -25973,7 +25973,7 @@
                 <a:latin typeface="Microsoft JhengHei"/>
                 <a:ea typeface="Microsoft JhengHei"/>
               </a:rPr>
-              <a:t>光明派對  /  青少年團契</a:t>
+              <a:t>LIGHT PARTY  /  青少年團契</a:t>
             </a:r>
           </a:p>
         </p:txBody>
@@ -26303,7 +26303,7 @@
       </p:sp>
       <p:sp>
         <p:nvSpPr>
-          <p:cNvPr id="10" name="Text: 薩溫節係重要歷史背景之一。&#10;時間大約係 10 月 31 日至 1"/>
+          <p:cNvPr id="10" name="Text: 薩溫節（Samhain）係重要歷史背景之一。&#10;時間大約係 10 "/>
           <p:cNvSpPr txBox="1"/>
           <p:nvPr/>
         </p:nvSpPr>
@@ -26342,7 +26342,7 @@
                 <a:latin typeface="Microsoft JhengHei"/>
                 <a:ea typeface="Microsoft JhengHei"/>
               </a:rPr>
-              <a:t>薩溫節係重要歷史背景之一。</a:t>
+              <a:t>薩溫節（Samhain）係重要歷史背景之一。</a:t>
             </a:r>
           </a:p>
           <a:p>
@@ -26388,7 +26388,7 @@
                 <a:latin typeface="Microsoft JhengHei"/>
                 <a:ea typeface="Microsoft JhengHei"/>
               </a:rPr>
-              <a:t>唔係冬至前夕，亦唔係萬聖節唯一嘅來源。</a:t>
+              <a:t>唔係冬至前夕；都唔係萬聖節嘅唯一來源。</a:t>
             </a:r>
           </a:p>
         </p:txBody>

--- a/light-party.pptx
+++ b/light-party.pptx
@@ -19802,53 +19802,7 @@
       </p:sp>
       <p:sp>
         <p:nvSpPr>
-          <p:cNvPr id="11" name="Text: 留意食物過敏；螢光棒唔拆開、唔咬破；保持走道暢通。"/>
-          <p:cNvSpPr txBox="1"/>
-          <p:nvPr/>
-        </p:nvSpPr>
-        <p:spPr>
-          <a:xfrm>
-            <a:off x="731520" y="5577840"/>
-            <a:ext cx="10725912" cy="384048"/>
-          </a:xfrm>
-          <a:prstGeom prst="rect">
-            <a:avLst/>
-          </a:prstGeom>
-          <a:noFill/>
-        </p:spPr>
-        <p:txBody>
-          <a:bodyPr wrap="square" lIns="0" rIns="0" tIns="0" bIns="0" anchor="t">
-            <a:spAutoFit/>
-          </a:bodyPr>
-          <a:lstStyle/>
-          <a:p>
-            <a:pPr algn="l">
-              <a:lnSpc>
-                <a:spcPct val="118000"/>
-              </a:lnSpc>
-              <a:spcBef>
-                <a:spcPts val="0"/>
-              </a:spcBef>
-              <a:spcAft>
-                <a:spcPts val="0"/>
-              </a:spcAft>
-            </a:pPr>
-            <a:r>
-              <a:rPr sz="1700" b="0" lang="zh-HK">
-                <a:solidFill>
-                  <a:srgbClr val="6A513D"/>
-                </a:solidFill>
-                <a:latin typeface="Microsoft JhengHei"/>
-                <a:ea typeface="Microsoft JhengHei"/>
-              </a:rPr>
-              <a:t>留意食物過敏；螢光棒唔拆開、唔咬破；保持走道暢通。</a:t>
-            </a:r>
-          </a:p>
-        </p:txBody>
-      </p:sp>
-      <p:sp>
-        <p:nvSpPr>
-          <p:cNvPr id="12" name="Oval 11"/>
+          <p:cNvPr id="11" name="Oval 10"/>
           <p:cNvSpPr/>
           <p:nvPr/>
         </p:nvSpPr>
@@ -19891,7 +19845,7 @@
       </p:sp>
       <p:sp>
         <p:nvSpPr>
-          <p:cNvPr id="13" name="Oval 12"/>
+          <p:cNvPr id="12" name="Oval 11"/>
           <p:cNvSpPr/>
           <p:nvPr/>
         </p:nvSpPr>
@@ -19934,7 +19888,7 @@
       </p:sp>
       <p:sp>
         <p:nvSpPr>
-          <p:cNvPr id="14" name="Oval 13"/>
+          <p:cNvPr id="13" name="Oval 12"/>
           <p:cNvSpPr/>
           <p:nvPr/>
         </p:nvSpPr>
@@ -19977,7 +19931,7 @@
       </p:sp>
       <p:sp>
         <p:nvSpPr>
-          <p:cNvPr id="15" name="Oval 14"/>
+          <p:cNvPr id="14" name="Oval 13"/>
           <p:cNvSpPr/>
           <p:nvPr/>
         </p:nvSpPr>
@@ -20020,14 +19974,49 @@
       </p:sp>
       <p:cxnSp>
         <p:nvCxnSpPr>
+          <p:cNvPr id="15" name="Connector 14"/>
+          <p:cNvCxnSpPr/>
+          <p:nvPr/>
+        </p:nvCxnSpPr>
+        <p:spPr>
+          <a:xfrm>
+            <a:off x="10252252" y="2779776"/>
+            <a:ext cx="135185" cy="0"/>
+          </a:xfrm>
+          <a:prstGeom prst="line">
+            <a:avLst/>
+          </a:prstGeom>
+          <a:ln w="17780">
+            <a:solidFill>
+              <a:srgbClr val="804212"/>
+            </a:solidFill>
+          </a:ln>
+        </p:spPr>
+        <p:style>
+          <a:lnRef idx="2">
+            <a:schemeClr val="accent1"/>
+          </a:lnRef>
+          <a:fillRef idx="0">
+            <a:schemeClr val="accent1"/>
+          </a:fillRef>
+          <a:effectRef idx="1">
+            <a:schemeClr val="accent1"/>
+          </a:effectRef>
+          <a:fontRef idx="minor">
+            <a:schemeClr val="tx1"/>
+          </a:fontRef>
+        </p:style>
+      </p:cxnSp>
+      <p:cxnSp>
+        <p:nvCxnSpPr>
           <p:cNvPr id="16" name="Connector 15"/>
           <p:cNvCxnSpPr/>
           <p:nvPr/>
         </p:nvCxnSpPr>
         <p:spPr>
           <a:xfrm>
-            <a:off x="10252252" y="2779776"/>
-            <a:ext cx="135185" cy="0"/>
+            <a:off x="10072276" y="3214276"/>
+            <a:ext cx="95590" cy="95590"/>
           </a:xfrm>
           <a:prstGeom prst="line">
             <a:avLst/>
@@ -20061,8 +20050,8 @@
         </p:nvCxnSpPr>
         <p:spPr>
           <a:xfrm>
-            <a:off x="10072276" y="3214276"/>
-            <a:ext cx="95590" cy="95590"/>
+            <a:off x="9637776" y="3394252"/>
+            <a:ext cx="0" cy="135185"/>
           </a:xfrm>
           <a:prstGeom prst="line">
             <a:avLst/>
@@ -20095,9 +20084,9 @@
           <p:nvPr/>
         </p:nvCxnSpPr>
         <p:spPr>
-          <a:xfrm>
-            <a:off x="9637776" y="3394252"/>
-            <a:ext cx="0" cy="135185"/>
+          <a:xfrm flipH="1">
+            <a:off x="9107685" y="3214276"/>
+            <a:ext cx="95590" cy="95590"/>
           </a:xfrm>
           <a:prstGeom prst="line">
             <a:avLst/>
@@ -20131,8 +20120,8 @@
         </p:nvCxnSpPr>
         <p:spPr>
           <a:xfrm flipH="1">
-            <a:off x="9107685" y="3214276"/>
-            <a:ext cx="95590" cy="95590"/>
+            <a:off x="8888114" y="2779776"/>
+            <a:ext cx="135185" cy="0"/>
           </a:xfrm>
           <a:prstGeom prst="line">
             <a:avLst/>
@@ -20165,9 +20154,9 @@
           <p:nvPr/>
         </p:nvCxnSpPr>
         <p:spPr>
-          <a:xfrm flipH="1">
-            <a:off x="8888114" y="2779776"/>
-            <a:ext cx="135185" cy="0"/>
+          <a:xfrm flipH="1" flipV="1">
+            <a:off x="9107685" y="2249685"/>
+            <a:ext cx="95590" cy="95590"/>
           </a:xfrm>
           <a:prstGeom prst="line">
             <a:avLst/>
@@ -20200,9 +20189,9 @@
           <p:nvPr/>
         </p:nvCxnSpPr>
         <p:spPr>
-          <a:xfrm flipH="1" flipV="1">
-            <a:off x="9107685" y="2249685"/>
-            <a:ext cx="95590" cy="95590"/>
+          <a:xfrm flipV="1">
+            <a:off x="9637776" y="2030114"/>
+            <a:ext cx="0" cy="135185"/>
           </a:xfrm>
           <a:prstGeom prst="line">
             <a:avLst/>
@@ -20231,41 +20220,6 @@
       <p:cxnSp>
         <p:nvCxnSpPr>
           <p:cNvPr id="22" name="Connector 21"/>
-          <p:cNvCxnSpPr/>
-          <p:nvPr/>
-        </p:nvCxnSpPr>
-        <p:spPr>
-          <a:xfrm flipV="1">
-            <a:off x="9637776" y="2030114"/>
-            <a:ext cx="0" cy="135185"/>
-          </a:xfrm>
-          <a:prstGeom prst="line">
-            <a:avLst/>
-          </a:prstGeom>
-          <a:ln w="17780">
-            <a:solidFill>
-              <a:srgbClr val="804212"/>
-            </a:solidFill>
-          </a:ln>
-        </p:spPr>
-        <p:style>
-          <a:lnRef idx="2">
-            <a:schemeClr val="accent1"/>
-          </a:lnRef>
-          <a:fillRef idx="0">
-            <a:schemeClr val="accent1"/>
-          </a:fillRef>
-          <a:effectRef idx="1">
-            <a:schemeClr val="accent1"/>
-          </a:effectRef>
-          <a:fontRef idx="minor">
-            <a:schemeClr val="tx1"/>
-          </a:fontRef>
-        </p:style>
-      </p:cxnSp>
-      <p:cxnSp>
-        <p:nvCxnSpPr>
-          <p:cNvPr id="23" name="Connector 22"/>
           <p:cNvCxnSpPr/>
           <p:nvPr/>
         </p:nvCxnSpPr>
